--- a/slides/Teori_Pertemuan_06.pptx
+++ b/slides/Teori_Pertemuan_06.pptx
@@ -2,45 +2,45 @@
 <file path=ppt/presentation.xml><?xml version="1.0" encoding="utf-8"?>
 <p:presentation xmlns:p="http://schemas.openxmlformats.org/presentationml/2006/main">
   <p:sldMasterIdLst>
-    <p:sldMasterId xmlns:r="http://schemas.openxmlformats.org/officeDocument/2006/relationships" id="2147483648" r:id="Rb214400e4f324965"/>
+    <p:sldMasterId xmlns:r="http://schemas.openxmlformats.org/officeDocument/2006/relationships" id="2147483648" r:id="Rdebaef7a3cfe46dc"/>
   </p:sldMasterIdLst>
   <p:notesMasterIdLst>
-    <p:notesMasterId xmlns:r="http://schemas.openxmlformats.org/officeDocument/2006/relationships" r:id="R5a702c627f514e89"/>
+    <p:notesMasterId xmlns:r="http://schemas.openxmlformats.org/officeDocument/2006/relationships" r:id="R00ffbaa6adef4034"/>
   </p:notesMasterIdLst>
   <p:sldIdLst>
-    <p:sldId xmlns:r="http://schemas.openxmlformats.org/officeDocument/2006/relationships" id="256" r:id="R1801509520624597"/>
-    <p:sldId xmlns:r="http://schemas.openxmlformats.org/officeDocument/2006/relationships" id="257" r:id="R8e9ca69430404bea"/>
-    <p:sldId xmlns:r="http://schemas.openxmlformats.org/officeDocument/2006/relationships" id="258" r:id="R54188a4da9c04237"/>
-    <p:sldId xmlns:r="http://schemas.openxmlformats.org/officeDocument/2006/relationships" id="259" r:id="R670879f888fa4b43"/>
-    <p:sldId xmlns:r="http://schemas.openxmlformats.org/officeDocument/2006/relationships" id="260" r:id="Rcc4a5489f43a4691"/>
-    <p:sldId xmlns:r="http://schemas.openxmlformats.org/officeDocument/2006/relationships" id="261" r:id="R9159fd4558a44dd7"/>
-    <p:sldId xmlns:r="http://schemas.openxmlformats.org/officeDocument/2006/relationships" id="262" r:id="R74560227bdeb48ec"/>
-    <p:sldId xmlns:r="http://schemas.openxmlformats.org/officeDocument/2006/relationships" id="263" r:id="R54e2d6471c1b439e"/>
-    <p:sldId xmlns:r="http://schemas.openxmlformats.org/officeDocument/2006/relationships" id="264" r:id="Rfb2c49b1d570472d"/>
-    <p:sldId xmlns:r="http://schemas.openxmlformats.org/officeDocument/2006/relationships" id="265" r:id="R21a40d9c89bc459e"/>
-    <p:sldId xmlns:r="http://schemas.openxmlformats.org/officeDocument/2006/relationships" id="266" r:id="R7789c43c5920450a"/>
-    <p:sldId xmlns:r="http://schemas.openxmlformats.org/officeDocument/2006/relationships" id="267" r:id="R095da304d8904781"/>
-    <p:sldId xmlns:r="http://schemas.openxmlformats.org/officeDocument/2006/relationships" id="268" r:id="Rf11a2639df3e4e3d"/>
-    <p:sldId xmlns:r="http://schemas.openxmlformats.org/officeDocument/2006/relationships" id="269" r:id="Rdf5cd273ebb941f2"/>
-    <p:sldId xmlns:r="http://schemas.openxmlformats.org/officeDocument/2006/relationships" id="270" r:id="R06c22764f6c54f6f"/>
-    <p:sldId xmlns:r="http://schemas.openxmlformats.org/officeDocument/2006/relationships" id="271" r:id="Ra362f14168774337"/>
-    <p:sldId xmlns:r="http://schemas.openxmlformats.org/officeDocument/2006/relationships" id="272" r:id="R8c5f4a86eb93472d"/>
-    <p:sldId xmlns:r="http://schemas.openxmlformats.org/officeDocument/2006/relationships" id="273" r:id="R3a0b87d8f71043eb"/>
-    <p:sldId xmlns:r="http://schemas.openxmlformats.org/officeDocument/2006/relationships" id="274" r:id="R2c8c07b6f88d4249"/>
-    <p:sldId xmlns:r="http://schemas.openxmlformats.org/officeDocument/2006/relationships" id="275" r:id="Red99dc808110471c"/>
-    <p:sldId xmlns:r="http://schemas.openxmlformats.org/officeDocument/2006/relationships" id="276" r:id="R58de088c4ee94641"/>
-    <p:sldId xmlns:r="http://schemas.openxmlformats.org/officeDocument/2006/relationships" id="277" r:id="R243d3ff90e9b4e25"/>
-    <p:sldId xmlns:r="http://schemas.openxmlformats.org/officeDocument/2006/relationships" id="278" r:id="Rdd2fe70477ac4203"/>
-    <p:sldId xmlns:r="http://schemas.openxmlformats.org/officeDocument/2006/relationships" id="279" r:id="R7ec92455a9214813"/>
-    <p:sldId xmlns:r="http://schemas.openxmlformats.org/officeDocument/2006/relationships" id="280" r:id="R40b7d720cf984715"/>
-    <p:sldId xmlns:r="http://schemas.openxmlformats.org/officeDocument/2006/relationships" id="281" r:id="R3144d2090ecd4d75"/>
-    <p:sldId xmlns:r="http://schemas.openxmlformats.org/officeDocument/2006/relationships" id="282" r:id="R265254b2a58c43df"/>
-    <p:sldId xmlns:r="http://schemas.openxmlformats.org/officeDocument/2006/relationships" id="283" r:id="R7fda89ef07cc46b5"/>
-    <p:sldId xmlns:r="http://schemas.openxmlformats.org/officeDocument/2006/relationships" id="284" r:id="R17d62635bc35421b"/>
-    <p:sldId xmlns:r="http://schemas.openxmlformats.org/officeDocument/2006/relationships" id="285" r:id="R9b2b12da28bb4713"/>
-    <p:sldId xmlns:r="http://schemas.openxmlformats.org/officeDocument/2006/relationships" id="286" r:id="Rf007a50025664c36"/>
-    <p:sldId xmlns:r="http://schemas.openxmlformats.org/officeDocument/2006/relationships" id="287" r:id="Rae40177940c54ef1"/>
-    <p:sldId xmlns:r="http://schemas.openxmlformats.org/officeDocument/2006/relationships" id="288" r:id="Rb9ea4473a9d345f5"/>
+    <p:sldId xmlns:r="http://schemas.openxmlformats.org/officeDocument/2006/relationships" id="256" r:id="Rbfd4e80c235c49f5"/>
+    <p:sldId xmlns:r="http://schemas.openxmlformats.org/officeDocument/2006/relationships" id="257" r:id="R590c27005ed842b1"/>
+    <p:sldId xmlns:r="http://schemas.openxmlformats.org/officeDocument/2006/relationships" id="258" r:id="R286c1acb172346d4"/>
+    <p:sldId xmlns:r="http://schemas.openxmlformats.org/officeDocument/2006/relationships" id="259" r:id="Rffa8587d0c2e4458"/>
+    <p:sldId xmlns:r="http://schemas.openxmlformats.org/officeDocument/2006/relationships" id="260" r:id="R8e8bf416cc124ce8"/>
+    <p:sldId xmlns:r="http://schemas.openxmlformats.org/officeDocument/2006/relationships" id="261" r:id="Rc9442fa962954b82"/>
+    <p:sldId xmlns:r="http://schemas.openxmlformats.org/officeDocument/2006/relationships" id="262" r:id="Rd9cd8e47b5a84cca"/>
+    <p:sldId xmlns:r="http://schemas.openxmlformats.org/officeDocument/2006/relationships" id="263" r:id="R13781993356f40cd"/>
+    <p:sldId xmlns:r="http://schemas.openxmlformats.org/officeDocument/2006/relationships" id="264" r:id="Rd5cc7ab278514c04"/>
+    <p:sldId xmlns:r="http://schemas.openxmlformats.org/officeDocument/2006/relationships" id="265" r:id="R401513811d954492"/>
+    <p:sldId xmlns:r="http://schemas.openxmlformats.org/officeDocument/2006/relationships" id="266" r:id="Rcfb8a734a4934e50"/>
+    <p:sldId xmlns:r="http://schemas.openxmlformats.org/officeDocument/2006/relationships" id="267" r:id="Rcb7290fd70fd4706"/>
+    <p:sldId xmlns:r="http://schemas.openxmlformats.org/officeDocument/2006/relationships" id="268" r:id="Ra0eb451db6324aa4"/>
+    <p:sldId xmlns:r="http://schemas.openxmlformats.org/officeDocument/2006/relationships" id="269" r:id="Rc535b3a167b34997"/>
+    <p:sldId xmlns:r="http://schemas.openxmlformats.org/officeDocument/2006/relationships" id="270" r:id="Rfdba5d814e464cab"/>
+    <p:sldId xmlns:r="http://schemas.openxmlformats.org/officeDocument/2006/relationships" id="271" r:id="Rd396fcdd64d54b04"/>
+    <p:sldId xmlns:r="http://schemas.openxmlformats.org/officeDocument/2006/relationships" id="272" r:id="Rc6e452a891ef4535"/>
+    <p:sldId xmlns:r="http://schemas.openxmlformats.org/officeDocument/2006/relationships" id="273" r:id="R8f80348c846a40d2"/>
+    <p:sldId xmlns:r="http://schemas.openxmlformats.org/officeDocument/2006/relationships" id="274" r:id="R6deea2ffa74b4381"/>
+    <p:sldId xmlns:r="http://schemas.openxmlformats.org/officeDocument/2006/relationships" id="275" r:id="R762647d46f264bb4"/>
+    <p:sldId xmlns:r="http://schemas.openxmlformats.org/officeDocument/2006/relationships" id="276" r:id="Rda7d5d0bd73542d9"/>
+    <p:sldId xmlns:r="http://schemas.openxmlformats.org/officeDocument/2006/relationships" id="277" r:id="Rda0bb24652d041b5"/>
+    <p:sldId xmlns:r="http://schemas.openxmlformats.org/officeDocument/2006/relationships" id="278" r:id="Rbf270592480a425c"/>
+    <p:sldId xmlns:r="http://schemas.openxmlformats.org/officeDocument/2006/relationships" id="279" r:id="Ra46d6e91457749e5"/>
+    <p:sldId xmlns:r="http://schemas.openxmlformats.org/officeDocument/2006/relationships" id="280" r:id="Rc530c7e36e4146f9"/>
+    <p:sldId xmlns:r="http://schemas.openxmlformats.org/officeDocument/2006/relationships" id="281" r:id="Rcd715b6f0bdd4821"/>
+    <p:sldId xmlns:r="http://schemas.openxmlformats.org/officeDocument/2006/relationships" id="282" r:id="R9a91000a1aa2441b"/>
+    <p:sldId xmlns:r="http://schemas.openxmlformats.org/officeDocument/2006/relationships" id="283" r:id="R88c9dff0a0544a74"/>
+    <p:sldId xmlns:r="http://schemas.openxmlformats.org/officeDocument/2006/relationships" id="284" r:id="Ra209435e020344af"/>
+    <p:sldId xmlns:r="http://schemas.openxmlformats.org/officeDocument/2006/relationships" id="285" r:id="Rbaf738f007a342e7"/>
+    <p:sldId xmlns:r="http://schemas.openxmlformats.org/officeDocument/2006/relationships" id="286" r:id="Ra42dd095d3244c97"/>
+    <p:sldId xmlns:r="http://schemas.openxmlformats.org/officeDocument/2006/relationships" id="287" r:id="R942e3b6e2d314199"/>
+    <p:sldId xmlns:r="http://schemas.openxmlformats.org/officeDocument/2006/relationships" id="288" r:id="R4157c3776df44ce3"/>
   </p:sldIdLst>
   <p:sldSz cx="12192000" cy="6858000"/>
   <p:notesSz cx="6858000" cy="9144000"/>
@@ -785,6 +785,9 @@
           <a:bodyPr xmlns:a="http://schemas.openxmlformats.org/drawingml/2006/main"/>
           <a:lstStyle xmlns:a="http://schemas.openxmlformats.org/drawingml/2006/main"/>
           <a:p xmlns:a="http://schemas.openxmlformats.org/drawingml/2006/main">
+            <a:r>
+              <a:t>Healthcheck dan startup: https://docs.docker.com/reference/compose-file/services/ dan https://docs.docker.com/compose/how-tos/startup-order/. Healthcheck sukses tidak menjamin layanan tetap sehat setelah startup.</a:t>
+            </a:r>
             <a:endParaRPr/>
           </a:p>
         </p:txBody>
@@ -1057,6 +1060,9 @@
           <a:bodyPr xmlns:a="http://schemas.openxmlformats.org/drawingml/2006/main"/>
           <a:lstStyle xmlns:a="http://schemas.openxmlformats.org/drawingml/2006/main"/>
           <a:p xmlns:a="http://schemas.openxmlformats.org/drawingml/2006/main">
+            <a:r>
+              <a:t>Gunakan perintah docker compose lengkap. https://docs.docker.com/reference/cli/docker/compose/. docker compose up membuat/build image yang belum ada sesuai kebutuhan. --build meminta build sebelum startup. logs tanpa -f membaca jejak tersimpan. Shell sh tersedia pada image lab.</a:t>
+            </a:r>
             <a:endParaRPr/>
           </a:p>
         </p:txBody>
@@ -1193,6 +1199,9 @@
           <a:bodyPr xmlns:a="http://schemas.openxmlformats.org/drawingml/2006/main"/>
           <a:lstStyle xmlns:a="http://schemas.openxmlformats.org/drawingml/2006/main"/>
           <a:p xmlns:a="http://schemas.openxmlformats.org/drawingml/2006/main">
+            <a:r>
+              <a:t>Sumber: https://docs.docker.com/reference/compose-file/services/ (container_name) dan https://docs.docker.com/compose/how-tos/networking/. Lab06 memakai 127.0.0.1:8000:8000 sehingga tidak dapat langsung menambah replica API. Load balancer memerlukan konfigurasi upstream dan mekanisme resolusi alamat yang sesuai. Nginx: https://nginx.org/en/docs/http/ngx_http_upstream_module.html. Contoh output IP di slide lama diganti command verifikasi aktual. https://docs.docker.com/reference/cli/docker/compose/</a:t>
+            </a:r>
             <a:endParaRPr/>
           </a:p>
         </p:txBody>
@@ -1261,6 +1270,9 @@
           <a:bodyPr xmlns:a="http://schemas.openxmlformats.org/drawingml/2006/main"/>
           <a:lstStyle xmlns:a="http://schemas.openxmlformats.org/drawingml/2006/main"/>
           <a:p xmlns:a="http://schemas.openxmlformats.org/drawingml/2006/main">
+            <a:r>
+              <a:t>Ukuran image bergantung tag, arsitektur, dan dependency. Ukur image yang dipakai dengan docker images.</a:t>
+            </a:r>
             <a:endParaRPr/>
           </a:p>
         </p:txBody>
@@ -1669,6 +1681,9 @@
           <a:bodyPr xmlns:a="http://schemas.openxmlformats.org/drawingml/2006/main"/>
           <a:lstStyle xmlns:a="http://schemas.openxmlformats.org/drawingml/2006/main"/>
           <a:p xmlns:a="http://schemas.openxmlformats.org/drawingml/2006/main">
+            <a:r>
+              <a:t>Backup logis PostgreSQL16: https://www.postgresql.org/docs/16/app-pgdump.html, https://www.postgresql.org/docs/16/app-pgrestore.html. Jalankan dari root repo Lab06. pg_dump -Fc menulis arsip pada /tmp di container, lalu docker compose cp menyalin file biner tanpa redirection PowerShell. Restore ke database baru cloudnotes_restore_check pada DB lab yang sama, jangan timpa cloudnotes. Bila database tujuan sudah ada, pilih nama baru. Periksa exit code dan query data. mkdir -p adalah Bash. Bentuk PowerShell: New-Item -ItemType Directory -Force ./backups | Out-Null. Command Docker yang memakai backslash baris lanjutan harus disatukan menjadi satu baris pada PowerShell. Detail di TEORI_LANGKAH_DEMI_LANGKAH.md. Backup dapat mengandung data, jangan commit file dump.</a:t>
+            </a:r>
             <a:endParaRPr/>
           </a:p>
         </p:txBody>
@@ -1805,6 +1820,9 @@
           <a:bodyPr xmlns:a="http://schemas.openxmlformats.org/drawingml/2006/main"/>
           <a:lstStyle xmlns:a="http://schemas.openxmlformats.org/drawingml/2006/main"/>
           <a:p xmlns:a="http://schemas.openxmlformats.org/drawingml/2006/main">
+            <a:r>
+              <a:t>Fixed port host dalam base example membatasi api menjadi satu replica. Hapus fixed host port dan siapkan proxy sebelum mencoba --scale. https://docs.docker.com/reference/compose-file/services/</a:t>
+            </a:r>
             <a:endParaRPr/>
           </a:p>
         </p:txBody>
@@ -1873,6 +1891,9 @@
           <a:bodyPr xmlns:a="http://schemas.openxmlformats.org/drawingml/2006/main"/>
           <a:lstStyle xmlns:a="http://schemas.openxmlformats.org/drawingml/2006/main"/>
           <a:p xmlns:a="http://schemas.openxmlformats.org/drawingml/2006/main">
+            <a:r>
+              <a:t>Compose secrets dari file lokal memasang file ke container yang mendapat akses. Ini tidak mengenkripsi file host. Batasi hak akses host dan Docker, gunakan .gitignore, dan secret manager untuk kebutuhan operasional. https://docs.docker.com/compose/how-tos/use-secrets/</a:t>
+            </a:r>
             <a:endParaRPr/>
           </a:p>
         </p:txBody>
@@ -1941,6 +1962,9 @@
           <a:bodyPr xmlns:a="http://schemas.openxmlformats.org/drawingml/2006/main"/>
           <a:lstStyle xmlns:a="http://schemas.openxmlformats.org/drawingml/2006/main"/>
           <a:p xmlns:a="http://schemas.openxmlformats.org/drawingml/2006/main">
+            <a:r>
+              <a:t>Jangan hapus volume untuk memperbaiki konflik port. Cari proses/container pemilik port, hentikan hanya lab terkait, atau ubah host mapping. Restart API tidak mengganti image hasil build.</a:t>
+            </a:r>
             <a:endParaRPr/>
           </a:p>
         </p:txBody>
@@ -2077,6 +2101,9 @@
           <a:bodyPr xmlns:a="http://schemas.openxmlformats.org/drawingml/2006/main"/>
           <a:lstStyle xmlns:a="http://schemas.openxmlformats.org/drawingml/2006/main"/>
           <a:p xmlns:a="http://schemas.openxmlformats.org/drawingml/2006/main">
+            <a:r>
+              <a:t>&lt;v&gt; dan &lt;n&gt; adalah placeholder nama volume/network. docker compose config -q sama dengan --quiet. Network/volume CLI berasal dari docker, bukan subcommand compose. Sumber: https://docs.docker.com/reference/cli/docker/compose/. Panduan lengkap: https://github.com/SeedFlora/meet6CloudService/blob/main/TEORI_LANGKAH_DEMI_LANGKAH.md</a:t>
+            </a:r>
             <a:endParaRPr/>
           </a:p>
         </p:txBody>
@@ -2807,8 +2834,8 @@
   </p:cSld>
   <p:clrMap bg1="lt1" tx1="dk1" bg2="lt2" tx2="dk2" accent1="accent1" accent2="accent2" accent3="accent3" accent4="accent4" accent5="accent5" accent6="accent6" hlink="hlink" folHlink="folHlink"/>
   <p:sldLayoutIdLst>
-    <p:sldLayoutId xmlns:r="http://schemas.openxmlformats.org/officeDocument/2006/relationships" id="2147483649" r:id="R5640d0cc5fdb469b"/>
-    <p:sldLayoutId xmlns:r="http://schemas.openxmlformats.org/officeDocument/2006/relationships" id="2147483650" r:id="R49116a156ca14527"/>
+    <p:sldLayoutId xmlns:r="http://schemas.openxmlformats.org/officeDocument/2006/relationships" id="2147483649" r:id="Ra1914a28809146ef"/>
+    <p:sldLayoutId xmlns:r="http://schemas.openxmlformats.org/officeDocument/2006/relationships" id="2147483650" r:id="Rdcbe455343ba49cd"/>
   </p:sldLayoutIdLst>
   <p:hf sldNum="0" hdr="0" ftr="0" dt="0"/>
   <p:txStyles>
@@ -3361,7 +3388,7 @@
     <p:bg>
       <p:bgPr>
         <a:blipFill xmlns:a="http://schemas.openxmlformats.org/drawingml/2006/main" rotWithShape="1">
-          <a:blip xmlns:r="http://schemas.openxmlformats.org/officeDocument/2006/relationships" r:embed="R86c6e822d6a142b8">
+          <a:blip xmlns:r="http://schemas.openxmlformats.org/officeDocument/2006/relationships" r:embed="Rc24811ba6af9460a">
             <a:lum/>
           </a:blip>
           <a:srcRect l="0" t="0" r="0" b="0"/>
@@ -3382,14 +3409,20 @@
       </p:grpSpPr>
       <p:pic>
         <p:nvPicPr>
-          <p:cNvPr id="13" name="Image 0"/>
+          <p:cNvPr id="13" name="Image 0">
+            <a:extLst xmlns:a="http://schemas.openxmlformats.org/drawingml/2006/main">
+              <a:ext uri="{FF2B5EF4-FFF2-40B4-BE49-F238E27FC236}">
+                <a16:creationId xmlns:a16="http://schemas.microsoft.com/office/drawing/2014/main" id="{98B573AD-E34B-4D89-8F79-C445CE699F69}"/>
+              </a:ext>
+            </a:extLst>
+          </p:cNvPr>
           <p:cNvPicPr>
             <a:picLocks xmlns:a="http://schemas.openxmlformats.org/drawingml/2006/main" noChangeAspect="1"/>
           </p:cNvPicPr>
           <p:nvPr/>
         </p:nvPicPr>
         <p:blipFill>
-          <a:blip xmlns:r="http://schemas.openxmlformats.org/officeDocument/2006/relationships" xmlns:a="http://schemas.openxmlformats.org/drawingml/2006/main" r:embed="R413c389a8bbc4e4e"/>
+          <a:blip xmlns:r="http://schemas.openxmlformats.org/officeDocument/2006/relationships" xmlns:a="http://schemas.openxmlformats.org/drawingml/2006/main" r:embed="Rcc0fb90f70a04d10"/>
           <a:stretch xmlns:a="http://schemas.openxmlformats.org/drawingml/2006/main">
             <a:fillRect l="0" t="0" r="0" b="0"/>
           </a:stretch>
@@ -3406,14 +3439,20 @@
       </p:pic>
       <p:pic>
         <p:nvPicPr>
-          <p:cNvPr id="14" name="Image 1"/>
+          <p:cNvPr id="14" name="Image 1">
+            <a:extLst xmlns:a="http://schemas.openxmlformats.org/drawingml/2006/main">
+              <a:ext uri="{FF2B5EF4-FFF2-40B4-BE49-F238E27FC236}">
+                <a16:creationId xmlns:a16="http://schemas.microsoft.com/office/drawing/2014/main" id="{BC71693F-B271-4B1A-8230-C0BD84D0215B}"/>
+              </a:ext>
+            </a:extLst>
+          </p:cNvPr>
           <p:cNvPicPr>
             <a:picLocks xmlns:a="http://schemas.openxmlformats.org/drawingml/2006/main" noChangeAspect="1"/>
           </p:cNvPicPr>
           <p:nvPr/>
         </p:nvPicPr>
         <p:blipFill>
-          <a:blip xmlns:r="http://schemas.openxmlformats.org/officeDocument/2006/relationships" xmlns:a="http://schemas.openxmlformats.org/drawingml/2006/main" r:embed="R8205bab5656b4721"/>
+          <a:blip xmlns:r="http://schemas.openxmlformats.org/officeDocument/2006/relationships" xmlns:a="http://schemas.openxmlformats.org/drawingml/2006/main" r:embed="R1441c42617c54467"/>
           <a:stretch xmlns:a="http://schemas.openxmlformats.org/drawingml/2006/main">
             <a:fillRect l="0" t="0" r="0" b="0"/>
           </a:stretch>
@@ -3893,14 +3932,20 @@
       </p:sp>
       <p:pic>
         <p:nvPicPr>
-          <p:cNvPr id="31" name="Image 0"/>
+          <p:cNvPr id="31" name="Image 0">
+            <a:extLst xmlns:a="http://schemas.openxmlformats.org/drawingml/2006/main">
+              <a:ext uri="{FF2B5EF4-FFF2-40B4-BE49-F238E27FC236}">
+                <a16:creationId xmlns:a16="http://schemas.microsoft.com/office/drawing/2014/main" id="{CFEE58BD-23D6-4896-B240-987751E93AB8}"/>
+              </a:ext>
+            </a:extLst>
+          </p:cNvPr>
           <p:cNvPicPr>
             <a:picLocks xmlns:a="http://schemas.openxmlformats.org/drawingml/2006/main" noChangeAspect="1"/>
           </p:cNvPicPr>
           <p:nvPr/>
         </p:nvPicPr>
         <p:blipFill>
-          <a:blip xmlns:r="http://schemas.openxmlformats.org/officeDocument/2006/relationships" xmlns:a="http://schemas.openxmlformats.org/drawingml/2006/main" r:embed="R5693a166c3a04dd2"/>
+          <a:blip xmlns:r="http://schemas.openxmlformats.org/officeDocument/2006/relationships" xmlns:a="http://schemas.openxmlformats.org/drawingml/2006/main" r:embed="R4584372f555b47d8"/>
           <a:stretch xmlns:a="http://schemas.openxmlformats.org/drawingml/2006/main">
             <a:fillRect l="0" t="0" r="0" b="0"/>
           </a:stretch>
@@ -3917,14 +3962,20 @@
       </p:pic>
       <p:pic>
         <p:nvPicPr>
-          <p:cNvPr id="32" name="Image 1"/>
+          <p:cNvPr id="32" name="Image 1">
+            <a:extLst xmlns:a="http://schemas.openxmlformats.org/drawingml/2006/main">
+              <a:ext uri="{FF2B5EF4-FFF2-40B4-BE49-F238E27FC236}">
+                <a16:creationId xmlns:a16="http://schemas.microsoft.com/office/drawing/2014/main" id="{BE875B5F-DF0A-46A2-830D-DF75B91C188C}"/>
+              </a:ext>
+            </a:extLst>
+          </p:cNvPr>
           <p:cNvPicPr>
             <a:picLocks xmlns:a="http://schemas.openxmlformats.org/drawingml/2006/main" noChangeAspect="1"/>
           </p:cNvPicPr>
           <p:nvPr/>
         </p:nvPicPr>
         <p:blipFill>
-          <a:blip xmlns:r="http://schemas.openxmlformats.org/officeDocument/2006/relationships" xmlns:a="http://schemas.openxmlformats.org/drawingml/2006/main" r:embed="R947a46e44c324085"/>
+          <a:blip xmlns:r="http://schemas.openxmlformats.org/officeDocument/2006/relationships" xmlns:a="http://schemas.openxmlformats.org/drawingml/2006/main" r:embed="R49d026d09857404e"/>
           <a:stretch xmlns:a="http://schemas.openxmlformats.org/drawingml/2006/main">
             <a:fillRect l="0" t="0" r="0" b="0"/>
           </a:stretch>
@@ -4984,7 +5035,7 @@
             <a:r>
               <a:rPr sz="1100" b="1">
                 <a:solidFill>
-                  <a:srgbClr val="60A5FA"/>
+                  <a:srgbClr val="F37021"/>
                 </a:solidFill>
                 <a:latin typeface="Consolas"/>
                 <a:ea typeface="Consolas"/>
@@ -4992,7 +5043,6 @@
               </a:rPr>
               <a:t>  web:</a:t>
             </a:r>
-            <a:endParaRPr sz="1100"/>
           </a:p>
           <a:p xmlns:a="http://schemas.openxmlformats.org/drawingml/2006/main">
             <a:pPr marL="0" indent="0">
@@ -5002,9 +5052,9 @@
               <a:buNone/>
             </a:pPr>
             <a:r>
-              <a:rPr sz="1100">
-                <a:solidFill>
-                  <a:srgbClr val="E2E8F0"/>
+              <a:rPr sz="1100" b="1">
+                <a:solidFill>
+                  <a:srgbClr val="F37021"/>
                 </a:solidFill>
                 <a:latin typeface="Consolas"/>
                 <a:ea typeface="Consolas"/>
@@ -5012,7 +5062,6 @@
               </a:rPr>
               <a:t>    image: nginx</a:t>
             </a:r>
-            <a:endParaRPr sz="1100"/>
           </a:p>
           <a:p xmlns:a="http://schemas.openxmlformats.org/drawingml/2006/main">
             <a:pPr marL="0" indent="0">
@@ -5022,9 +5071,9 @@
               <a:buNone/>
             </a:pPr>
             <a:r>
-              <a:rPr sz="1100">
-                <a:solidFill>
-                  <a:srgbClr val="E2E8F0"/>
+              <a:rPr sz="1100" b="1">
+                <a:solidFill>
+                  <a:srgbClr val="F37021"/>
                 </a:solidFill>
                 <a:latin typeface="Consolas"/>
                 <a:ea typeface="Consolas"/>
@@ -5032,7 +5081,6 @@
               </a:rPr>
               <a:t>    networks:</a:t>
             </a:r>
-            <a:endParaRPr sz="1100"/>
           </a:p>
           <a:p xmlns:a="http://schemas.openxmlformats.org/drawingml/2006/main">
             <a:pPr marL="0" indent="0">
@@ -5042,9 +5090,9 @@
               <a:buNone/>
             </a:pPr>
             <a:r>
-              <a:rPr sz="1100">
-                <a:solidFill>
-                  <a:srgbClr val="10B981"/>
+              <a:rPr sz="1100" b="1">
+                <a:solidFill>
+                  <a:srgbClr val="F37021"/>
                 </a:solidFill>
                 <a:latin typeface="Consolas"/>
                 <a:ea typeface="Consolas"/>
@@ -5052,7 +5100,6 @@
               </a:rPr>
               <a:t>      - frontend</a:t>
             </a:r>
-            <a:endParaRPr sz="1100"/>
           </a:p>
           <a:p xmlns:a="http://schemas.openxmlformats.org/drawingml/2006/main">
             <a:pPr marL="0" indent="0">
@@ -5061,7 +5108,17 @@
               </a:spcAft>
               <a:buNone/>
             </a:pPr>
-            <a:endParaRPr sz="1100"/>
+            <a:r>
+              <a:rPr sz="1100" b="1">
+                <a:solidFill>
+                  <a:srgbClr val="F37021"/>
+                </a:solidFill>
+                <a:latin typeface="Consolas"/>
+                <a:ea typeface="Consolas"/>
+                <a:cs typeface="Consolas"/>
+              </a:rPr>
+              <a:t>  api:</a:t>
+            </a:r>
           </a:p>
           <a:p xmlns:a="http://schemas.openxmlformats.org/drawingml/2006/main">
             <a:pPr marL="0" indent="0">
@@ -5073,15 +5130,14 @@
             <a:r>
               <a:rPr sz="1100" b="1">
                 <a:solidFill>
-                  <a:srgbClr val="60A5FA"/>
-                </a:solidFill>
-                <a:latin typeface="Consolas"/>
-                <a:ea typeface="Consolas"/>
-                <a:cs typeface="Consolas"/>
-              </a:rPr>
-              <a:t>  api:</a:t>
-            </a:r>
-            <a:endParaRPr sz="1100"/>
+                  <a:srgbClr val="F37021"/>
+                </a:solidFill>
+                <a:latin typeface="Consolas"/>
+                <a:ea typeface="Consolas"/>
+                <a:cs typeface="Consolas"/>
+              </a:rPr>
+              <a:t>    image: myapp/api</a:t>
+            </a:r>
           </a:p>
           <a:p xmlns:a="http://schemas.openxmlformats.org/drawingml/2006/main">
             <a:pPr marL="0" indent="0">
@@ -5091,17 +5147,16 @@
               <a:buNone/>
             </a:pPr>
             <a:r>
-              <a:rPr sz="1100">
-                <a:solidFill>
-                  <a:srgbClr val="E2E8F0"/>
-                </a:solidFill>
-                <a:latin typeface="Consolas"/>
-                <a:ea typeface="Consolas"/>
-                <a:cs typeface="Consolas"/>
-              </a:rPr>
-              <a:t>    image: myapp/api</a:t>
-            </a:r>
-            <a:endParaRPr sz="1100"/>
+              <a:rPr sz="1100" b="1">
+                <a:solidFill>
+                  <a:srgbClr val="F37021"/>
+                </a:solidFill>
+                <a:latin typeface="Consolas"/>
+                <a:ea typeface="Consolas"/>
+                <a:cs typeface="Consolas"/>
+              </a:rPr>
+              <a:t>    networks:</a:t>
+            </a:r>
           </a:p>
           <a:p xmlns:a="http://schemas.openxmlformats.org/drawingml/2006/main">
             <a:pPr marL="0" indent="0">
@@ -5111,17 +5166,16 @@
               <a:buNone/>
             </a:pPr>
             <a:r>
-              <a:rPr sz="1100">
-                <a:solidFill>
-                  <a:srgbClr val="E2E8F0"/>
-                </a:solidFill>
-                <a:latin typeface="Consolas"/>
-                <a:ea typeface="Consolas"/>
-                <a:cs typeface="Consolas"/>
-              </a:rPr>
-              <a:t>    networks:</a:t>
-            </a:r>
-            <a:endParaRPr sz="1100"/>
+              <a:rPr sz="1100" b="1">
+                <a:solidFill>
+                  <a:srgbClr val="F37021"/>
+                </a:solidFill>
+                <a:latin typeface="Consolas"/>
+                <a:ea typeface="Consolas"/>
+                <a:cs typeface="Consolas"/>
+              </a:rPr>
+              <a:t>      - frontend    # bisa kontak web</a:t>
+            </a:r>
           </a:p>
           <a:p xmlns:a="http://schemas.openxmlformats.org/drawingml/2006/main">
             <a:pPr marL="0" indent="0">
@@ -5131,17 +5185,16 @@
               <a:buNone/>
             </a:pPr>
             <a:r>
-              <a:rPr sz="1100">
-                <a:solidFill>
-                  <a:srgbClr val="10B981"/>
-                </a:solidFill>
-                <a:latin typeface="Consolas"/>
-                <a:ea typeface="Consolas"/>
-                <a:cs typeface="Consolas"/>
-              </a:rPr>
-              <a:t>      - frontend    # bisa kontak web</a:t>
-            </a:r>
-            <a:endParaRPr sz="1100"/>
+              <a:rPr sz="1100" b="1">
+                <a:solidFill>
+                  <a:srgbClr val="F37021"/>
+                </a:solidFill>
+                <a:latin typeface="Consolas"/>
+                <a:ea typeface="Consolas"/>
+                <a:cs typeface="Consolas"/>
+              </a:rPr>
+              <a:t>      - backend     # bisa kontak db</a:t>
+            </a:r>
           </a:p>
           <a:p xmlns:a="http://schemas.openxmlformats.org/drawingml/2006/main">
             <a:pPr marL="0" indent="0">
@@ -5151,17 +5204,16 @@
               <a:buNone/>
             </a:pPr>
             <a:r>
-              <a:rPr sz="1100">
-                <a:solidFill>
-                  <a:srgbClr val="10B981"/>
-                </a:solidFill>
-                <a:latin typeface="Consolas"/>
-                <a:ea typeface="Consolas"/>
-                <a:cs typeface="Consolas"/>
-              </a:rPr>
-              <a:t>      - backend     # bisa kontak db</a:t>
-            </a:r>
-            <a:endParaRPr sz="1100"/>
+              <a:rPr sz="1100" b="1">
+                <a:solidFill>
+                  <a:srgbClr val="F37021"/>
+                </a:solidFill>
+                <a:latin typeface="Consolas"/>
+                <a:ea typeface="Consolas"/>
+                <a:cs typeface="Consolas"/>
+              </a:rPr>
+              <a:t>  db:</a:t>
+            </a:r>
           </a:p>
           <a:p xmlns:a="http://schemas.openxmlformats.org/drawingml/2006/main">
             <a:pPr marL="0" indent="0">
@@ -5170,7 +5222,17 @@
               </a:spcAft>
               <a:buNone/>
             </a:pPr>
-            <a:endParaRPr sz="1100"/>
+            <a:r>
+              <a:rPr sz="1100" b="1">
+                <a:solidFill>
+                  <a:srgbClr val="F37021"/>
+                </a:solidFill>
+                <a:latin typeface="Consolas"/>
+                <a:ea typeface="Consolas"/>
+                <a:cs typeface="Consolas"/>
+              </a:rPr>
+              <a:t>    image: postgres:15</a:t>
+            </a:r>
           </a:p>
           <a:p xmlns:a="http://schemas.openxmlformats.org/drawingml/2006/main">
             <a:pPr marL="0" indent="0">
@@ -5182,15 +5244,14 @@
             <a:r>
               <a:rPr sz="1100" b="1">
                 <a:solidFill>
-                  <a:srgbClr val="60A5FA"/>
-                </a:solidFill>
-                <a:latin typeface="Consolas"/>
-                <a:ea typeface="Consolas"/>
-                <a:cs typeface="Consolas"/>
-              </a:rPr>
-              <a:t>  db:</a:t>
-            </a:r>
-            <a:endParaRPr sz="1100"/>
+                  <a:srgbClr val="F37021"/>
+                </a:solidFill>
+                <a:latin typeface="Consolas"/>
+                <a:ea typeface="Consolas"/>
+                <a:cs typeface="Consolas"/>
+              </a:rPr>
+              <a:t>    networks:</a:t>
+            </a:r>
           </a:p>
           <a:p xmlns:a="http://schemas.openxmlformats.org/drawingml/2006/main">
             <a:pPr marL="0" indent="0">
@@ -5200,17 +5261,16 @@
               <a:buNone/>
             </a:pPr>
             <a:r>
-              <a:rPr sz="1100">
-                <a:solidFill>
-                  <a:srgbClr val="E2E8F0"/>
-                </a:solidFill>
-                <a:latin typeface="Consolas"/>
-                <a:ea typeface="Consolas"/>
-                <a:cs typeface="Consolas"/>
-              </a:rPr>
-              <a:t>    image: postgres:15</a:t>
-            </a:r>
-            <a:endParaRPr sz="1100"/>
+              <a:rPr sz="1100" b="1">
+                <a:solidFill>
+                  <a:srgbClr val="F37021"/>
+                </a:solidFill>
+                <a:latin typeface="Consolas"/>
+                <a:ea typeface="Consolas"/>
+                <a:cs typeface="Consolas"/>
+              </a:rPr>
+              <a:t>      - backend     # ISOLATED dari web</a:t>
+            </a:r>
           </a:p>
           <a:p xmlns:a="http://schemas.openxmlformats.org/drawingml/2006/main">
             <a:pPr marL="0" indent="0">
@@ -5220,17 +5280,16 @@
               <a:buNone/>
             </a:pPr>
             <a:r>
-              <a:rPr sz="1100">
-                <a:solidFill>
-                  <a:srgbClr val="E2E8F0"/>
-                </a:solidFill>
-                <a:latin typeface="Consolas"/>
-                <a:ea typeface="Consolas"/>
-                <a:cs typeface="Consolas"/>
-              </a:rPr>
-              <a:t>    networks:</a:t>
-            </a:r>
-            <a:endParaRPr sz="1100"/>
+              <a:rPr sz="1100" b="1">
+                <a:solidFill>
+                  <a:srgbClr val="F37021"/>
+                </a:solidFill>
+                <a:latin typeface="Consolas"/>
+                <a:ea typeface="Consolas"/>
+                <a:cs typeface="Consolas"/>
+              </a:rPr>
+              <a:t>networks:</a:t>
+            </a:r>
           </a:p>
           <a:p xmlns:a="http://schemas.openxmlformats.org/drawingml/2006/main">
             <a:pPr marL="0" indent="0">
@@ -5240,17 +5299,16 @@
               <a:buNone/>
             </a:pPr>
             <a:r>
-              <a:rPr sz="1100">
-                <a:solidFill>
-                  <a:srgbClr val="10B981"/>
-                </a:solidFill>
-                <a:latin typeface="Consolas"/>
-                <a:ea typeface="Consolas"/>
-                <a:cs typeface="Consolas"/>
-              </a:rPr>
-              <a:t>      - backend     # ISOLATED dari web</a:t>
-            </a:r>
-            <a:endParaRPr sz="1100"/>
+              <a:rPr sz="1100" b="1">
+                <a:solidFill>
+                  <a:srgbClr val="F37021"/>
+                </a:solidFill>
+                <a:latin typeface="Consolas"/>
+                <a:ea typeface="Consolas"/>
+                <a:cs typeface="Consolas"/>
+              </a:rPr>
+              <a:t>  frontend:</a:t>
+            </a:r>
           </a:p>
           <a:p xmlns:a="http://schemas.openxmlformats.org/drawingml/2006/main">
             <a:pPr marL="0" indent="0">
@@ -5259,15 +5317,6 @@
               </a:spcAft>
               <a:buNone/>
             </a:pPr>
-            <a:endParaRPr sz="1100"/>
-          </a:p>
-          <a:p xmlns:a="http://schemas.openxmlformats.org/drawingml/2006/main">
-            <a:pPr marL="0" indent="0">
-              <a:spcAft>
-                <a:spcPts val="200"/>
-              </a:spcAft>
-              <a:buNone/>
-            </a:pPr>
             <a:r>
               <a:rPr sz="1100" b="1">
                 <a:solidFill>
@@ -5277,49 +5326,8 @@
                 <a:ea typeface="Consolas"/>
                 <a:cs typeface="Consolas"/>
               </a:rPr>
-              <a:t>networks:</a:t>
-            </a:r>
-            <a:endParaRPr sz="1100"/>
-          </a:p>
-          <a:p xmlns:a="http://schemas.openxmlformats.org/drawingml/2006/main">
-            <a:pPr marL="0" indent="0">
-              <a:spcAft>
-                <a:spcPts val="200"/>
-              </a:spcAft>
-              <a:buNone/>
-            </a:pPr>
-            <a:r>
-              <a:rPr sz="1100">
-                <a:solidFill>
-                  <a:srgbClr val="60A5FA"/>
-                </a:solidFill>
-                <a:latin typeface="Consolas"/>
-                <a:ea typeface="Consolas"/>
-                <a:cs typeface="Consolas"/>
-              </a:rPr>
-              <a:t>  frontend:</a:t>
-            </a:r>
-            <a:endParaRPr sz="1100"/>
-          </a:p>
-          <a:p xmlns:a="http://schemas.openxmlformats.org/drawingml/2006/main">
-            <a:pPr marL="0" indent="0">
-              <a:spcAft>
-                <a:spcPts val="200"/>
-              </a:spcAft>
-              <a:buNone/>
-            </a:pPr>
-            <a:r>
-              <a:rPr sz="1100">
-                <a:solidFill>
-                  <a:srgbClr val="60A5FA"/>
-                </a:solidFill>
-                <a:latin typeface="Consolas"/>
-                <a:ea typeface="Consolas"/>
-                <a:cs typeface="Consolas"/>
-              </a:rPr>
               <a:t>  backend:</a:t>
             </a:r>
-            <a:endParaRPr sz="1100"/>
           </a:p>
         </p:txBody>
       </p:sp>
@@ -5479,14 +5487,20 @@
       </p:sp>
       <p:pic>
         <p:nvPicPr>
-          <p:cNvPr id="37" name="Image 0"/>
+          <p:cNvPr id="37" name="Image 0">
+            <a:extLst xmlns:a="http://schemas.openxmlformats.org/drawingml/2006/main">
+              <a:ext uri="{FF2B5EF4-FFF2-40B4-BE49-F238E27FC236}">
+                <a16:creationId xmlns:a16="http://schemas.microsoft.com/office/drawing/2014/main" id="{95343856-0AF8-4B16-B7F6-1A7E1AB82BC8}"/>
+              </a:ext>
+            </a:extLst>
+          </p:cNvPr>
           <p:cNvPicPr>
             <a:picLocks xmlns:a="http://schemas.openxmlformats.org/drawingml/2006/main" noChangeAspect="1"/>
           </p:cNvPicPr>
           <p:nvPr/>
         </p:nvPicPr>
         <p:blipFill>
-          <a:blip xmlns:r="http://schemas.openxmlformats.org/officeDocument/2006/relationships" xmlns:a="http://schemas.openxmlformats.org/drawingml/2006/main" r:embed="Rde7e54de3ed84b60"/>
+          <a:blip xmlns:r="http://schemas.openxmlformats.org/officeDocument/2006/relationships" xmlns:a="http://schemas.openxmlformats.org/drawingml/2006/main" r:embed="Re8960bf41f3249e6"/>
           <a:stretch xmlns:a="http://schemas.openxmlformats.org/drawingml/2006/main">
             <a:fillRect l="0" t="0" r="0" b="0"/>
           </a:stretch>
@@ -5503,14 +5517,20 @@
       </p:pic>
       <p:pic>
         <p:nvPicPr>
-          <p:cNvPr id="38" name="Image 1"/>
+          <p:cNvPr id="38" name="Image 1">
+            <a:extLst xmlns:a="http://schemas.openxmlformats.org/drawingml/2006/main">
+              <a:ext uri="{FF2B5EF4-FFF2-40B4-BE49-F238E27FC236}">
+                <a16:creationId xmlns:a16="http://schemas.microsoft.com/office/drawing/2014/main" id="{70A147F7-F427-47FC-86C9-BA0C822866C8}"/>
+              </a:ext>
+            </a:extLst>
+          </p:cNvPr>
           <p:cNvPicPr>
             <a:picLocks xmlns:a="http://schemas.openxmlformats.org/drawingml/2006/main" noChangeAspect="1"/>
           </p:cNvPicPr>
           <p:nvPr/>
         </p:nvPicPr>
         <p:blipFill>
-          <a:blip xmlns:r="http://schemas.openxmlformats.org/officeDocument/2006/relationships" xmlns:a="http://schemas.openxmlformats.org/drawingml/2006/main" r:embed="R1560a86f556349d4"/>
+          <a:blip xmlns:r="http://schemas.openxmlformats.org/officeDocument/2006/relationships" xmlns:a="http://schemas.openxmlformats.org/drawingml/2006/main" r:embed="R0dfc9f00fd0647f6"/>
           <a:stretch xmlns:a="http://schemas.openxmlformats.org/drawingml/2006/main">
             <a:fillRect l="0" t="0" r="0" b="0"/>
           </a:stretch>
@@ -6074,7 +6094,7 @@
             <a:r>
               <a:rPr sz="1100" b="1">
                 <a:solidFill>
-                  <a:srgbClr val="60A5FA"/>
+                  <a:srgbClr val="F37021"/>
                 </a:solidFill>
                 <a:latin typeface="Consolas"/>
                 <a:ea typeface="Consolas"/>
@@ -6082,7 +6102,6 @@
               </a:rPr>
               <a:t>  db:</a:t>
             </a:r>
-            <a:endParaRPr sz="1100"/>
           </a:p>
           <a:p xmlns:a="http://schemas.openxmlformats.org/drawingml/2006/main">
             <a:pPr marL="0" indent="0">
@@ -6092,9 +6111,9 @@
               <a:buNone/>
             </a:pPr>
             <a:r>
-              <a:rPr sz="1100">
-                <a:solidFill>
-                  <a:srgbClr val="E2E8F0"/>
+              <a:rPr sz="1100" b="1">
+                <a:solidFill>
+                  <a:srgbClr val="F37021"/>
                 </a:solidFill>
                 <a:latin typeface="Consolas"/>
                 <a:ea typeface="Consolas"/>
@@ -6102,7 +6121,6 @@
               </a:rPr>
               <a:t>    image: postgres:15-alpine</a:t>
             </a:r>
-            <a:endParaRPr sz="1100"/>
           </a:p>
           <a:p xmlns:a="http://schemas.openxmlformats.org/drawingml/2006/main">
             <a:pPr marL="0" indent="0">
@@ -6112,9 +6130,9 @@
               <a:buNone/>
             </a:pPr>
             <a:r>
-              <a:rPr sz="1100">
-                <a:solidFill>
-                  <a:srgbClr val="E2E8F0"/>
+              <a:rPr sz="1100" b="1">
+                <a:solidFill>
+                  <a:srgbClr val="F37021"/>
                 </a:solidFill>
                 <a:latin typeface="Consolas"/>
                 <a:ea typeface="Consolas"/>
@@ -6122,7 +6140,6 @@
               </a:rPr>
               <a:t>    volumes:</a:t>
             </a:r>
-            <a:endParaRPr sz="1100"/>
           </a:p>
           <a:p xmlns:a="http://schemas.openxmlformats.org/drawingml/2006/main">
             <a:pPr marL="0" indent="0">
@@ -6134,7 +6151,7 @@
             <a:r>
               <a:rPr sz="1100" b="1">
                 <a:solidFill>
-                  <a:srgbClr val="10B981"/>
+                  <a:srgbClr val="F37021"/>
                 </a:solidFill>
                 <a:latin typeface="Consolas"/>
                 <a:ea typeface="Consolas"/>
@@ -6142,7 +6159,6 @@
               </a:rPr>
               <a:t>      - db-data:/var/lib/postgresql/data</a:t>
             </a:r>
-            <a:endParaRPr sz="1100"/>
           </a:p>
           <a:p xmlns:a="http://schemas.openxmlformats.org/drawingml/2006/main">
             <a:pPr marL="0" indent="0">
@@ -6152,9 +6168,9 @@
               <a:buNone/>
             </a:pPr>
             <a:r>
-              <a:rPr sz="1100">
-                <a:solidFill>
-                  <a:srgbClr val="E2E8F0"/>
+              <a:rPr sz="1100" b="1">
+                <a:solidFill>
+                  <a:srgbClr val="F37021"/>
                 </a:solidFill>
                 <a:latin typeface="Consolas"/>
                 <a:ea typeface="Consolas"/>
@@ -6162,7 +6178,6 @@
               </a:rPr>
               <a:t>    environment:</a:t>
             </a:r>
-            <a:endParaRPr sz="1100"/>
           </a:p>
           <a:p xmlns:a="http://schemas.openxmlformats.org/drawingml/2006/main">
             <a:pPr marL="0" indent="0">
@@ -6172,9 +6187,9 @@
               <a:buNone/>
             </a:pPr>
             <a:r>
-              <a:rPr sz="1100">
-                <a:solidFill>
-                  <a:srgbClr val="E2E8F0"/>
+              <a:rPr sz="1100" b="1">
+                <a:solidFill>
+                  <a:srgbClr val="F37021"/>
                 </a:solidFill>
                 <a:latin typeface="Consolas"/>
                 <a:ea typeface="Consolas"/>
@@ -6182,7 +6197,6 @@
               </a:rPr>
               <a:t>      POSTGRES_PASSWORD: secret</a:t>
             </a:r>
-            <a:endParaRPr sz="1100"/>
           </a:p>
           <a:p xmlns:a="http://schemas.openxmlformats.org/drawingml/2006/main">
             <a:pPr marL="0" indent="0">
@@ -6191,7 +6205,17 @@
               </a:spcAft>
               <a:buNone/>
             </a:pPr>
-            <a:endParaRPr sz="1100"/>
+            <a:r>
+              <a:rPr sz="1100" b="1">
+                <a:solidFill>
+                  <a:srgbClr val="F37021"/>
+                </a:solidFill>
+                <a:latin typeface="Consolas"/>
+                <a:ea typeface="Consolas"/>
+                <a:cs typeface="Consolas"/>
+              </a:rPr>
+              <a:t># Wajib declare di top-level</a:t>
+            </a:r>
           </a:p>
           <a:p xmlns:a="http://schemas.openxmlformats.org/drawingml/2006/main">
             <a:pPr marL="0" indent="0">
@@ -6201,17 +6225,16 @@
               <a:buNone/>
             </a:pPr>
             <a:r>
-              <a:rPr sz="1100">
-                <a:solidFill>
-                  <a:srgbClr val="94A3B8"/>
-                </a:solidFill>
-                <a:latin typeface="Consolas"/>
-                <a:ea typeface="Consolas"/>
-                <a:cs typeface="Consolas"/>
-              </a:rPr>
-              <a:t># Wajib declare di top-level</a:t>
-            </a:r>
-            <a:endParaRPr sz="1100"/>
+              <a:rPr sz="1100" b="1">
+                <a:solidFill>
+                  <a:srgbClr val="F37021"/>
+                </a:solidFill>
+                <a:latin typeface="Consolas"/>
+                <a:ea typeface="Consolas"/>
+                <a:cs typeface="Consolas"/>
+              </a:rPr>
+              <a:t>volumes:</a:t>
+            </a:r>
           </a:p>
           <a:p xmlns:a="http://schemas.openxmlformats.org/drawingml/2006/main">
             <a:pPr marL="0" indent="0">
@@ -6229,9 +6252,8 @@
                 <a:ea typeface="Consolas"/>
                 <a:cs typeface="Consolas"/>
               </a:rPr>
-              <a:t>volumes:</a:t>
-            </a:r>
-            <a:endParaRPr sz="1100"/>
+              <a:t>  db-data:</a:t>
+            </a:r>
           </a:p>
           <a:p xmlns:a="http://schemas.openxmlformats.org/drawingml/2006/main">
             <a:pPr marL="0" indent="0">
@@ -6243,15 +6265,14 @@
             <a:r>
               <a:rPr sz="1100" b="1">
                 <a:solidFill>
-                  <a:srgbClr val="60A5FA"/>
-                </a:solidFill>
-                <a:latin typeface="Consolas"/>
-                <a:ea typeface="Consolas"/>
-                <a:cs typeface="Consolas"/>
-              </a:rPr>
-              <a:t>  db-data:</a:t>
-            </a:r>
-            <a:endParaRPr sz="1100"/>
+                  <a:srgbClr val="F37021"/>
+                </a:solidFill>
+                <a:latin typeface="Consolas"/>
+                <a:ea typeface="Consolas"/>
+                <a:cs typeface="Consolas"/>
+              </a:rPr>
+              <a:t>    # driver: local (default)</a:t>
+            </a:r>
           </a:p>
           <a:p xmlns:a="http://schemas.openxmlformats.org/drawingml/2006/main">
             <a:pPr marL="0" indent="0">
@@ -6261,17 +6282,16 @@
               <a:buNone/>
             </a:pPr>
             <a:r>
-              <a:rPr sz="1100">
-                <a:solidFill>
-                  <a:srgbClr val="94A3B8"/>
-                </a:solidFill>
-                <a:latin typeface="Consolas"/>
-                <a:ea typeface="Consolas"/>
-                <a:cs typeface="Consolas"/>
-              </a:rPr>
-              <a:t>    # driver: local (default)</a:t>
-            </a:r>
-            <a:endParaRPr sz="1100"/>
+              <a:rPr sz="1100" b="1">
+                <a:solidFill>
+                  <a:srgbClr val="F37021"/>
+                </a:solidFill>
+                <a:latin typeface="Consolas"/>
+                <a:ea typeface="Consolas"/>
+                <a:cs typeface="Consolas"/>
+              </a:rPr>
+              <a:t># Cek lokasi &amp; inspect:</a:t>
+            </a:r>
           </a:p>
           <a:p xmlns:a="http://schemas.openxmlformats.org/drawingml/2006/main">
             <a:pPr marL="0" indent="0">
@@ -6280,7 +6300,17 @@
               </a:spcAft>
               <a:buNone/>
             </a:pPr>
-            <a:endParaRPr sz="1100"/>
+            <a:r>
+              <a:rPr sz="1100" b="1">
+                <a:solidFill>
+                  <a:srgbClr val="F37021"/>
+                </a:solidFill>
+                <a:latin typeface="Consolas"/>
+                <a:ea typeface="Consolas"/>
+                <a:cs typeface="Consolas"/>
+              </a:rPr>
+              <a:t>$ docker volume ls</a:t>
+            </a:r>
           </a:p>
           <a:p xmlns:a="http://schemas.openxmlformats.org/drawingml/2006/main">
             <a:pPr marL="0" indent="0">
@@ -6290,49 +6320,9 @@
               <a:buNone/>
             </a:pPr>
             <a:r>
-              <a:rPr sz="1100">
-                <a:solidFill>
-                  <a:srgbClr val="94A3B8"/>
-                </a:solidFill>
-                <a:latin typeface="Consolas"/>
-                <a:ea typeface="Consolas"/>
-                <a:cs typeface="Consolas"/>
-              </a:rPr>
-              <a:t># Cek lokasi &amp; inspect:</a:t>
-            </a:r>
-            <a:endParaRPr sz="1100"/>
-          </a:p>
-          <a:p xmlns:a="http://schemas.openxmlformats.org/drawingml/2006/main">
-            <a:pPr marL="0" indent="0">
-              <a:spcAft>
-                <a:spcPts val="200"/>
-              </a:spcAft>
-              <a:buNone/>
-            </a:pPr>
-            <a:r>
-              <a:rPr sz="1100">
-                <a:solidFill>
-                  <a:srgbClr val="10B981"/>
-                </a:solidFill>
-                <a:latin typeface="Consolas"/>
-                <a:ea typeface="Consolas"/>
-                <a:cs typeface="Consolas"/>
-              </a:rPr>
-              <a:t>$ docker volume ls</a:t>
-            </a:r>
-            <a:endParaRPr sz="1100"/>
-          </a:p>
-          <a:p xmlns:a="http://schemas.openxmlformats.org/drawingml/2006/main">
-            <a:pPr marL="0" indent="0">
-              <a:spcAft>
-                <a:spcPts val="200"/>
-              </a:spcAft>
-              <a:buNone/>
-            </a:pPr>
-            <a:r>
-              <a:rPr sz="1100">
-                <a:solidFill>
-                  <a:srgbClr val="10B981"/>
+              <a:rPr sz="1100" b="1">
+                <a:solidFill>
+                  <a:srgbClr val="F37021"/>
                 </a:solidFill>
                 <a:latin typeface="Consolas"/>
                 <a:ea typeface="Consolas"/>
@@ -6340,7 +6330,6 @@
               </a:rPr>
               <a:t>$ docker volume inspect myapp_db-data</a:t>
             </a:r>
-            <a:endParaRPr sz="1100"/>
           </a:p>
         </p:txBody>
       </p:sp>
@@ -6770,7 +6759,7 @@
             <a:r>
               <a:rPr sz="1100" b="1">
                 <a:solidFill>
-                  <a:srgbClr val="60A5FA"/>
+                  <a:srgbClr val="F37021"/>
                 </a:solidFill>
                 <a:latin typeface="Consolas"/>
                 <a:ea typeface="Consolas"/>
@@ -6778,7 +6767,6 @@
               </a:rPr>
               <a:t>  api:</a:t>
             </a:r>
-            <a:endParaRPr sz="1100"/>
           </a:p>
           <a:p xmlns:a="http://schemas.openxmlformats.org/drawingml/2006/main">
             <a:pPr marL="0" indent="0">
@@ -6788,9 +6776,9 @@
               <a:buNone/>
             </a:pPr>
             <a:r>
-              <a:rPr sz="1100">
-                <a:solidFill>
-                  <a:srgbClr val="E2E8F0"/>
+              <a:rPr sz="1100" b="1">
+                <a:solidFill>
+                  <a:srgbClr val="F37021"/>
                 </a:solidFill>
                 <a:latin typeface="Consolas"/>
                 <a:ea typeface="Consolas"/>
@@ -6798,7 +6786,6 @@
               </a:rPr>
               <a:t>    build: ./api</a:t>
             </a:r>
-            <a:endParaRPr sz="1100"/>
           </a:p>
           <a:p xmlns:a="http://schemas.openxmlformats.org/drawingml/2006/main">
             <a:pPr marL="0" indent="0">
@@ -6808,9 +6795,9 @@
               <a:buNone/>
             </a:pPr>
             <a:r>
-              <a:rPr sz="1100">
-                <a:solidFill>
-                  <a:srgbClr val="E2E8F0"/>
+              <a:rPr sz="1100" b="1">
+                <a:solidFill>
+                  <a:srgbClr val="F37021"/>
                 </a:solidFill>
                 <a:latin typeface="Consolas"/>
                 <a:ea typeface="Consolas"/>
@@ -6818,7 +6805,6 @@
               </a:rPr>
               <a:t>    volumes:</a:t>
             </a:r>
-            <a:endParaRPr sz="1100"/>
           </a:p>
           <a:p xmlns:a="http://schemas.openxmlformats.org/drawingml/2006/main">
             <a:pPr marL="0" indent="0">
@@ -6828,9 +6814,9 @@
               <a:buNone/>
             </a:pPr>
             <a:r>
-              <a:rPr sz="1100">
-                <a:solidFill>
-                  <a:srgbClr val="94A3B8"/>
+              <a:rPr sz="1100" b="1">
+                <a:solidFill>
+                  <a:srgbClr val="F37021"/>
                 </a:solidFill>
                 <a:latin typeface="Consolas"/>
                 <a:ea typeface="Consolas"/>
@@ -6838,7 +6824,6 @@
               </a:rPr>
               <a:t>      # ./api host -&gt; /app container</a:t>
             </a:r>
-            <a:endParaRPr sz="1100"/>
           </a:p>
           <a:p xmlns:a="http://schemas.openxmlformats.org/drawingml/2006/main">
             <a:pPr marL="0" indent="0">
@@ -6850,7 +6835,7 @@
             <a:r>
               <a:rPr sz="1100" b="1">
                 <a:solidFill>
-                  <a:srgbClr val="10B981"/>
+                  <a:srgbClr val="F37021"/>
                 </a:solidFill>
                 <a:latin typeface="Consolas"/>
                 <a:ea typeface="Consolas"/>
@@ -6858,7 +6843,6 @@
               </a:rPr>
               <a:t>      - ./api:/app</a:t>
             </a:r>
-            <a:endParaRPr sz="1100"/>
           </a:p>
           <a:p xmlns:a="http://schemas.openxmlformats.org/drawingml/2006/main">
             <a:pPr marL="0" indent="0">
@@ -6868,9 +6852,9 @@
               <a:buNone/>
             </a:pPr>
             <a:r>
-              <a:rPr sz="1100">
-                <a:solidFill>
-                  <a:srgbClr val="94A3B8"/>
+              <a:rPr sz="1100" b="1">
+                <a:solidFill>
+                  <a:srgbClr val="F37021"/>
                 </a:solidFill>
                 <a:latin typeface="Consolas"/>
                 <a:ea typeface="Consolas"/>
@@ -6878,7 +6862,6 @@
               </a:rPr>
               <a:t>      # Anonymous vol cegah node_modules</a:t>
             </a:r>
-            <a:endParaRPr sz="1100"/>
           </a:p>
           <a:p xmlns:a="http://schemas.openxmlformats.org/drawingml/2006/main">
             <a:pPr marL="0" indent="0">
@@ -6888,9 +6871,9 @@
               <a:buNone/>
             </a:pPr>
             <a:r>
-              <a:rPr sz="1100">
-                <a:solidFill>
-                  <a:srgbClr val="10B981"/>
+              <a:rPr sz="1100" b="1">
+                <a:solidFill>
+                  <a:srgbClr val="F37021"/>
                 </a:solidFill>
                 <a:latin typeface="Consolas"/>
                 <a:ea typeface="Consolas"/>
@@ -6898,7 +6881,6 @@
               </a:rPr>
               <a:t>      - /app/node_modules</a:t>
             </a:r>
-            <a:endParaRPr sz="1100"/>
           </a:p>
           <a:p xmlns:a="http://schemas.openxmlformats.org/drawingml/2006/main">
             <a:pPr marL="0" indent="0">
@@ -6908,9 +6890,9 @@
               <a:buNone/>
             </a:pPr>
             <a:r>
-              <a:rPr sz="1100">
-                <a:solidFill>
-                  <a:srgbClr val="E2E8F0"/>
+              <a:rPr sz="1100" b="1">
+                <a:solidFill>
+                  <a:srgbClr val="F37021"/>
                 </a:solidFill>
                 <a:latin typeface="Consolas"/>
                 <a:ea typeface="Consolas"/>
@@ -6918,7 +6900,6 @@
               </a:rPr>
               <a:t>    command: npm run dev</a:t>
             </a:r>
-            <a:endParaRPr sz="1100"/>
           </a:p>
           <a:p xmlns:a="http://schemas.openxmlformats.org/drawingml/2006/main">
             <a:pPr marL="0" indent="0">
@@ -6927,7 +6908,17 @@
               </a:spcAft>
               <a:buNone/>
             </a:pPr>
-            <a:endParaRPr sz="1100"/>
+            <a:r>
+              <a:rPr sz="1100" b="1">
+                <a:solidFill>
+                  <a:srgbClr val="F37021"/>
+                </a:solidFill>
+                <a:latin typeface="Consolas"/>
+                <a:ea typeface="Consolas"/>
+                <a:cs typeface="Consolas"/>
+              </a:rPr>
+              <a:t># Edit ./api/server.js di host</a:t>
+            </a:r>
           </a:p>
           <a:p xmlns:a="http://schemas.openxmlformats.org/drawingml/2006/main">
             <a:pPr marL="0" indent="0">
@@ -6937,17 +6928,16 @@
               <a:buNone/>
             </a:pPr>
             <a:r>
-              <a:rPr sz="1100">
-                <a:solidFill>
-                  <a:srgbClr val="94A3B8"/>
-                </a:solidFill>
-                <a:latin typeface="Consolas"/>
-                <a:ea typeface="Consolas"/>
-                <a:cs typeface="Consolas"/>
-              </a:rPr>
-              <a:t># Edit ./api/server.js di host</a:t>
-            </a:r>
-            <a:endParaRPr sz="1100"/>
+              <a:rPr sz="1100" b="1">
+                <a:solidFill>
+                  <a:srgbClr val="F37021"/>
+                </a:solidFill>
+                <a:latin typeface="Consolas"/>
+                <a:ea typeface="Consolas"/>
+                <a:cs typeface="Consolas"/>
+              </a:rPr>
+              <a:t># nodemon di container auto-restart!</a:t>
+            </a:r>
           </a:p>
           <a:p xmlns:a="http://schemas.openxmlformats.org/drawingml/2006/main">
             <a:pPr marL="0" indent="0">
@@ -6957,17 +6947,16 @@
               <a:buNone/>
             </a:pPr>
             <a:r>
-              <a:rPr sz="1100">
-                <a:solidFill>
-                  <a:srgbClr val="10B981"/>
-                </a:solidFill>
-                <a:latin typeface="Consolas"/>
-                <a:ea typeface="Consolas"/>
-                <a:cs typeface="Consolas"/>
-              </a:rPr>
-              <a:t># nodemon di container auto-restart!</a:t>
-            </a:r>
-            <a:endParaRPr sz="1100"/>
+              <a:rPr sz="1100" b="1">
+                <a:solidFill>
+                  <a:srgbClr val="F37021"/>
+                </a:solidFill>
+                <a:latin typeface="Consolas"/>
+                <a:ea typeface="Consolas"/>
+                <a:cs typeface="Consolas"/>
+              </a:rPr>
+              <a:t># Format: HOST:CONTAINER[:MODE]</a:t>
+            </a:r>
           </a:p>
           <a:p xmlns:a="http://schemas.openxmlformats.org/drawingml/2006/main">
             <a:pPr marL="0" indent="0">
@@ -6976,7 +6965,17 @@
               </a:spcAft>
               <a:buNone/>
             </a:pPr>
-            <a:endParaRPr sz="1100"/>
+            <a:r>
+              <a:rPr sz="1100" b="1">
+                <a:solidFill>
+                  <a:srgbClr val="F37021"/>
+                </a:solidFill>
+                <a:latin typeface="Consolas"/>
+                <a:ea typeface="Consolas"/>
+                <a:cs typeface="Consolas"/>
+              </a:rPr>
+              <a:t># - ./src:/app/src     (rw, default)</a:t>
+            </a:r>
           </a:p>
           <a:p xmlns:a="http://schemas.openxmlformats.org/drawingml/2006/main">
             <a:pPr marL="0" indent="0">
@@ -6986,49 +6985,9 @@
               <a:buNone/>
             </a:pPr>
             <a:r>
-              <a:rPr sz="1100">
-                <a:solidFill>
-                  <a:srgbClr val="94A3B8"/>
-                </a:solidFill>
-                <a:latin typeface="Consolas"/>
-                <a:ea typeface="Consolas"/>
-                <a:cs typeface="Consolas"/>
-              </a:rPr>
-              <a:t># Format: HOST:CONTAINER[:MODE]</a:t>
-            </a:r>
-            <a:endParaRPr sz="1100"/>
-          </a:p>
-          <a:p xmlns:a="http://schemas.openxmlformats.org/drawingml/2006/main">
-            <a:pPr marL="0" indent="0">
-              <a:spcAft>
-                <a:spcPts val="200"/>
-              </a:spcAft>
-              <a:buNone/>
-            </a:pPr>
-            <a:r>
-              <a:rPr sz="1100">
-                <a:solidFill>
-                  <a:srgbClr val="94A3B8"/>
-                </a:solidFill>
-                <a:latin typeface="Consolas"/>
-                <a:ea typeface="Consolas"/>
-                <a:cs typeface="Consolas"/>
-              </a:rPr>
-              <a:t># - ./src:/app/src     (rw, default)</a:t>
-            </a:r>
-            <a:endParaRPr sz="1100"/>
-          </a:p>
-          <a:p xmlns:a="http://schemas.openxmlformats.org/drawingml/2006/main">
-            <a:pPr marL="0" indent="0">
-              <a:spcAft>
-                <a:spcPts val="200"/>
-              </a:spcAft>
-              <a:buNone/>
-            </a:pPr>
-            <a:r>
-              <a:rPr sz="1100">
-                <a:solidFill>
-                  <a:srgbClr val="94A3B8"/>
+              <a:rPr sz="1100" b="1">
+                <a:solidFill>
+                  <a:srgbClr val="F37021"/>
                 </a:solidFill>
                 <a:latin typeface="Consolas"/>
                 <a:ea typeface="Consolas"/>
@@ -7036,7 +6995,6 @@
               </a:rPr>
               <a:t># - ./conf:/etc:ro     (read-only)</a:t>
             </a:r>
-            <a:endParaRPr sz="1100"/>
           </a:p>
         </p:txBody>
       </p:sp>
@@ -7196,14 +7154,20 @@
       </p:sp>
       <p:pic>
         <p:nvPicPr>
-          <p:cNvPr id="48" name="Image 0"/>
+          <p:cNvPr id="48" name="Image 0">
+            <a:extLst xmlns:a="http://schemas.openxmlformats.org/drawingml/2006/main">
+              <a:ext uri="{FF2B5EF4-FFF2-40B4-BE49-F238E27FC236}">
+                <a16:creationId xmlns:a16="http://schemas.microsoft.com/office/drawing/2014/main" id="{73251307-28B8-40AD-ACC8-5D337C07353E}"/>
+              </a:ext>
+            </a:extLst>
+          </p:cNvPr>
           <p:cNvPicPr>
             <a:picLocks xmlns:a="http://schemas.openxmlformats.org/drawingml/2006/main" noChangeAspect="1"/>
           </p:cNvPicPr>
           <p:nvPr/>
         </p:nvPicPr>
         <p:blipFill>
-          <a:blip xmlns:r="http://schemas.openxmlformats.org/officeDocument/2006/relationships" xmlns:a="http://schemas.openxmlformats.org/drawingml/2006/main" r:embed="Rc953d2311ba74c7b"/>
+          <a:blip xmlns:r="http://schemas.openxmlformats.org/officeDocument/2006/relationships" xmlns:a="http://schemas.openxmlformats.org/drawingml/2006/main" r:embed="Ra50c38b43c7e4471"/>
           <a:stretch xmlns:a="http://schemas.openxmlformats.org/drawingml/2006/main">
             <a:fillRect l="0" t="0" r="0" b="0"/>
           </a:stretch>
@@ -7220,14 +7184,20 @@
       </p:pic>
       <p:pic>
         <p:nvPicPr>
-          <p:cNvPr id="49" name="Image 1"/>
+          <p:cNvPr id="49" name="Image 1">
+            <a:extLst xmlns:a="http://schemas.openxmlformats.org/drawingml/2006/main">
+              <a:ext uri="{FF2B5EF4-FFF2-40B4-BE49-F238E27FC236}">
+                <a16:creationId xmlns:a16="http://schemas.microsoft.com/office/drawing/2014/main" id="{B6E56C62-B67F-467B-A2F2-2376707FAD63}"/>
+              </a:ext>
+            </a:extLst>
+          </p:cNvPr>
           <p:cNvPicPr>
             <a:picLocks xmlns:a="http://schemas.openxmlformats.org/drawingml/2006/main" noChangeAspect="1"/>
           </p:cNvPicPr>
           <p:nvPr/>
         </p:nvPicPr>
         <p:blipFill>
-          <a:blip xmlns:r="http://schemas.openxmlformats.org/officeDocument/2006/relationships" xmlns:a="http://schemas.openxmlformats.org/drawingml/2006/main" r:embed="Rdf795a6696324b86"/>
+          <a:blip xmlns:r="http://schemas.openxmlformats.org/officeDocument/2006/relationships" xmlns:a="http://schemas.openxmlformats.org/drawingml/2006/main" r:embed="R895b99a25b034309"/>
           <a:stretch xmlns:a="http://schemas.openxmlformats.org/drawingml/2006/main">
             <a:fillRect l="0" t="0" r="0" b="0"/>
           </a:stretch>
@@ -9353,14 +9323,20 @@
       </p:sp>
       <p:pic>
         <p:nvPicPr>
-          <p:cNvPr id="31" name="Image 0"/>
+          <p:cNvPr id="31" name="Image 0">
+            <a:extLst xmlns:a="http://schemas.openxmlformats.org/drawingml/2006/main">
+              <a:ext uri="{FF2B5EF4-FFF2-40B4-BE49-F238E27FC236}">
+                <a16:creationId xmlns:a16="http://schemas.microsoft.com/office/drawing/2014/main" id="{CAFB2E1A-C7C1-4563-B6D7-61479E80AEF8}"/>
+              </a:ext>
+            </a:extLst>
+          </p:cNvPr>
           <p:cNvPicPr>
             <a:picLocks xmlns:a="http://schemas.openxmlformats.org/drawingml/2006/main" noChangeAspect="1"/>
           </p:cNvPicPr>
           <p:nvPr/>
         </p:nvPicPr>
         <p:blipFill>
-          <a:blip xmlns:r="http://schemas.openxmlformats.org/officeDocument/2006/relationships" xmlns:a="http://schemas.openxmlformats.org/drawingml/2006/main" r:embed="R44b8a94cb3234a56"/>
+          <a:blip xmlns:r="http://schemas.openxmlformats.org/officeDocument/2006/relationships" xmlns:a="http://schemas.openxmlformats.org/drawingml/2006/main" r:embed="Rce8124b91ee5419a"/>
           <a:stretch xmlns:a="http://schemas.openxmlformats.org/drawingml/2006/main">
             <a:fillRect l="0" t="0" r="0" b="0"/>
           </a:stretch>
@@ -9377,14 +9353,20 @@
       </p:pic>
       <p:pic>
         <p:nvPicPr>
-          <p:cNvPr id="32" name="Image 1"/>
+          <p:cNvPr id="32" name="Image 1">
+            <a:extLst xmlns:a="http://schemas.openxmlformats.org/drawingml/2006/main">
+              <a:ext uri="{FF2B5EF4-FFF2-40B4-BE49-F238E27FC236}">
+                <a16:creationId xmlns:a16="http://schemas.microsoft.com/office/drawing/2014/main" id="{CF2DA990-2C98-4EF6-878E-561DC31108C2}"/>
+              </a:ext>
+            </a:extLst>
+          </p:cNvPr>
           <p:cNvPicPr>
             <a:picLocks xmlns:a="http://schemas.openxmlformats.org/drawingml/2006/main" noChangeAspect="1"/>
           </p:cNvPicPr>
           <p:nvPr/>
         </p:nvPicPr>
         <p:blipFill>
-          <a:blip xmlns:r="http://schemas.openxmlformats.org/officeDocument/2006/relationships" xmlns:a="http://schemas.openxmlformats.org/drawingml/2006/main" r:embed="R99b69776ac5d4d40"/>
+          <a:blip xmlns:r="http://schemas.openxmlformats.org/officeDocument/2006/relationships" xmlns:a="http://schemas.openxmlformats.org/drawingml/2006/main" r:embed="R0ed981a3ab4f44fd"/>
           <a:stretch xmlns:a="http://schemas.openxmlformats.org/drawingml/2006/main">
             <a:fillRect l="0" t="0" r="0" b="0"/>
           </a:stretch>
@@ -9595,18 +9577,7 @@
                 <a:ea typeface="Calibri"/>
                 <a:cs typeface="Calibri"/>
               </a:rPr>
-              <a:t>Pitfall: </a:t>
-            </a:r>
-            <a:r>
-              <a:rPr sz="1200">
-                <a:solidFill>
-                  <a:srgbClr val="FFFFFF"/>
-                </a:solidFill>
-                <a:latin typeface="Calibri"/>
-                <a:ea typeface="Calibri"/>
-                <a:cs typeface="Calibri"/>
-              </a:rPr>
-              <a:t>depends_on cuma tunggu container 'started', BUKAN 'ready'. Postgres butuh 5-10 detik untuk siap accept connection.</a:t>
+              <a:t>depends_on bentuk pendek menunggu startup. service_healthy menunggu healthcheck yang Anda definisikan. Waktu siap bergantung layanan.</a:t>
             </a:r>
             <a:endParaRPr sz="1300"/>
           </a:p>
@@ -10642,7 +10613,7 @@
                 <a:ea typeface="Consolas"/>
                 <a:cs typeface="Consolas"/>
               </a:rPr>
-              <a:t># baru start. No more race condition!</a:t>
+              <a:t># baru start. Tetap siapkan retry saat runtime.</a:t>
             </a:r>
             <a:endParaRPr sz="1100"/>
           </a:p>
@@ -10918,14 +10889,20 @@
       </p:sp>
       <p:pic>
         <p:nvPicPr>
-          <p:cNvPr id="24" name="Image 0"/>
+          <p:cNvPr id="24" name="Image 0">
+            <a:extLst xmlns:a="http://schemas.openxmlformats.org/drawingml/2006/main">
+              <a:ext uri="{FF2B5EF4-FFF2-40B4-BE49-F238E27FC236}">
+                <a16:creationId xmlns:a16="http://schemas.microsoft.com/office/drawing/2014/main" id="{0342B61B-8830-4B40-83E9-F43CA9D82100}"/>
+              </a:ext>
+            </a:extLst>
+          </p:cNvPr>
           <p:cNvPicPr>
             <a:picLocks xmlns:a="http://schemas.openxmlformats.org/drawingml/2006/main" noChangeAspect="1"/>
           </p:cNvPicPr>
           <p:nvPr/>
         </p:nvPicPr>
         <p:blipFill>
-          <a:blip xmlns:r="http://schemas.openxmlformats.org/officeDocument/2006/relationships" xmlns:a="http://schemas.openxmlformats.org/drawingml/2006/main" r:embed="Rf165ed5934c74afc"/>
+          <a:blip xmlns:r="http://schemas.openxmlformats.org/officeDocument/2006/relationships" xmlns:a="http://schemas.openxmlformats.org/drawingml/2006/main" r:embed="Rc56f64906605484f"/>
           <a:stretch xmlns:a="http://schemas.openxmlformats.org/drawingml/2006/main">
             <a:fillRect l="0" t="0" r="0" b="0"/>
           </a:stretch>
@@ -10942,14 +10919,20 @@
       </p:pic>
       <p:pic>
         <p:nvPicPr>
-          <p:cNvPr id="25" name="Image 1"/>
+          <p:cNvPr id="25" name="Image 1">
+            <a:extLst xmlns:a="http://schemas.openxmlformats.org/drawingml/2006/main">
+              <a:ext uri="{FF2B5EF4-FFF2-40B4-BE49-F238E27FC236}">
+                <a16:creationId xmlns:a16="http://schemas.microsoft.com/office/drawing/2014/main" id="{4536A006-5F7B-44A8-BFA0-6D06A2195835}"/>
+              </a:ext>
+            </a:extLst>
+          </p:cNvPr>
           <p:cNvPicPr>
             <a:picLocks xmlns:a="http://schemas.openxmlformats.org/drawingml/2006/main" noChangeAspect="1"/>
           </p:cNvPicPr>
           <p:nvPr/>
         </p:nvPicPr>
         <p:blipFill>
-          <a:blip xmlns:r="http://schemas.openxmlformats.org/officeDocument/2006/relationships" xmlns:a="http://schemas.openxmlformats.org/drawingml/2006/main" r:embed="R097b4b605dc54f1d"/>
+          <a:blip xmlns:r="http://schemas.openxmlformats.org/officeDocument/2006/relationships" xmlns:a="http://schemas.openxmlformats.org/drawingml/2006/main" r:embed="Rd7fbeb5e6e1344d5"/>
           <a:stretch xmlns:a="http://schemas.openxmlformats.org/drawingml/2006/main">
             <a:fillRect l="0" t="0" r="0" b="0"/>
           </a:stretch>
@@ -11308,14 +11291,20 @@
       </p:sp>
       <p:pic>
         <p:nvPicPr>
-          <p:cNvPr id="66" name="Image 0"/>
+          <p:cNvPr id="66" name="Image 0">
+            <a:extLst xmlns:a="http://schemas.openxmlformats.org/drawingml/2006/main">
+              <a:ext uri="{FF2B5EF4-FFF2-40B4-BE49-F238E27FC236}">
+                <a16:creationId xmlns:a16="http://schemas.microsoft.com/office/drawing/2014/main" id="{61F29647-F848-4AA8-8767-6C8FE1067748}"/>
+              </a:ext>
+            </a:extLst>
+          </p:cNvPr>
           <p:cNvPicPr>
             <a:picLocks xmlns:a="http://schemas.openxmlformats.org/drawingml/2006/main" noChangeAspect="1"/>
           </p:cNvPicPr>
           <p:nvPr/>
         </p:nvPicPr>
         <p:blipFill>
-          <a:blip xmlns:r="http://schemas.openxmlformats.org/officeDocument/2006/relationships" xmlns:a="http://schemas.openxmlformats.org/drawingml/2006/main" r:embed="Rebe29bb3aef64709"/>
+          <a:blip xmlns:r="http://schemas.openxmlformats.org/officeDocument/2006/relationships" xmlns:a="http://schemas.openxmlformats.org/drawingml/2006/main" r:embed="R00c6c050c5374249"/>
           <a:stretch xmlns:a="http://schemas.openxmlformats.org/drawingml/2006/main">
             <a:fillRect l="0" t="0" r="0" b="0"/>
           </a:stretch>
@@ -11332,14 +11321,20 @@
       </p:pic>
       <p:pic>
         <p:nvPicPr>
-          <p:cNvPr id="67" name="Image 1"/>
+          <p:cNvPr id="67" name="Image 1">
+            <a:extLst xmlns:a="http://schemas.openxmlformats.org/drawingml/2006/main">
+              <a:ext uri="{FF2B5EF4-FFF2-40B4-BE49-F238E27FC236}">
+                <a16:creationId xmlns:a16="http://schemas.microsoft.com/office/drawing/2014/main" id="{142F26BE-3A63-4B60-89CE-9B6E07FB2F88}"/>
+              </a:ext>
+            </a:extLst>
+          </p:cNvPr>
           <p:cNvPicPr>
             <a:picLocks xmlns:a="http://schemas.openxmlformats.org/drawingml/2006/main" noChangeAspect="1"/>
           </p:cNvPicPr>
           <p:nvPr/>
         </p:nvPicPr>
         <p:blipFill>
-          <a:blip xmlns:r="http://schemas.openxmlformats.org/officeDocument/2006/relationships" xmlns:a="http://schemas.openxmlformats.org/drawingml/2006/main" r:embed="R278cb8cf92614753"/>
+          <a:blip xmlns:r="http://schemas.openxmlformats.org/officeDocument/2006/relationships" xmlns:a="http://schemas.openxmlformats.org/drawingml/2006/main" r:embed="R809bb72dcebb4396"/>
           <a:stretch xmlns:a="http://schemas.openxmlformats.org/drawingml/2006/main">
             <a:fillRect l="0" t="0" r="0" b="0"/>
           </a:stretch>
@@ -11545,14 +11540,20 @@
       </p:sp>
       <p:pic>
         <p:nvPicPr>
-          <p:cNvPr id="73" name="Image 2"/>
+          <p:cNvPr id="73" name="Image 2">
+            <a:extLst xmlns:a="http://schemas.openxmlformats.org/drawingml/2006/main">
+              <a:ext uri="{FF2B5EF4-FFF2-40B4-BE49-F238E27FC236}">
+                <a16:creationId xmlns:a16="http://schemas.microsoft.com/office/drawing/2014/main" id="{6269B8F5-64CD-473D-8D42-F8E973EF0006}"/>
+              </a:ext>
+            </a:extLst>
+          </p:cNvPr>
           <p:cNvPicPr>
             <a:picLocks xmlns:a="http://schemas.openxmlformats.org/drawingml/2006/main" noChangeAspect="1"/>
           </p:cNvPicPr>
           <p:nvPr/>
         </p:nvPicPr>
         <p:blipFill>
-          <a:blip xmlns:r="http://schemas.openxmlformats.org/officeDocument/2006/relationships" xmlns:a="http://schemas.openxmlformats.org/drawingml/2006/main" r:embed="R8bc64e3e27974d0d"/>
+          <a:blip xmlns:r="http://schemas.openxmlformats.org/officeDocument/2006/relationships" xmlns:a="http://schemas.openxmlformats.org/drawingml/2006/main" r:embed="Rc867b9e17ad24bf8"/>
           <a:stretch xmlns:a="http://schemas.openxmlformats.org/drawingml/2006/main">
             <a:fillRect l="0" t="0" r="0" b="0"/>
           </a:stretch>
@@ -11727,14 +11728,20 @@
       </p:sp>
       <p:pic>
         <p:nvPicPr>
-          <p:cNvPr id="78" name="Image 3"/>
+          <p:cNvPr id="78" name="Image 3">
+            <a:extLst xmlns:a="http://schemas.openxmlformats.org/drawingml/2006/main">
+              <a:ext uri="{FF2B5EF4-FFF2-40B4-BE49-F238E27FC236}">
+                <a16:creationId xmlns:a16="http://schemas.microsoft.com/office/drawing/2014/main" id="{7ED7B190-4B80-4FCE-90F6-A23E1A53BEE5}"/>
+              </a:ext>
+            </a:extLst>
+          </p:cNvPr>
           <p:cNvPicPr>
             <a:picLocks xmlns:a="http://schemas.openxmlformats.org/drawingml/2006/main" noChangeAspect="1"/>
           </p:cNvPicPr>
           <p:nvPr/>
         </p:nvPicPr>
         <p:blipFill>
-          <a:blip xmlns:r="http://schemas.openxmlformats.org/officeDocument/2006/relationships" xmlns:a="http://schemas.openxmlformats.org/drawingml/2006/main" r:embed="R74966a859f7045e9"/>
+          <a:blip xmlns:r="http://schemas.openxmlformats.org/officeDocument/2006/relationships" xmlns:a="http://schemas.openxmlformats.org/drawingml/2006/main" r:embed="Ra040668c9f394c5a"/>
           <a:stretch xmlns:a="http://schemas.openxmlformats.org/drawingml/2006/main">
             <a:fillRect l="0" t="0" r="0" b="0"/>
           </a:stretch>
@@ -11955,14 +11962,20 @@
       </p:sp>
       <p:pic>
         <p:nvPicPr>
-          <p:cNvPr id="84" name="Image 4"/>
+          <p:cNvPr id="84" name="Image 4">
+            <a:extLst xmlns:a="http://schemas.openxmlformats.org/drawingml/2006/main">
+              <a:ext uri="{FF2B5EF4-FFF2-40B4-BE49-F238E27FC236}">
+                <a16:creationId xmlns:a16="http://schemas.microsoft.com/office/drawing/2014/main" id="{E0F4F9EF-F453-4A27-BF8D-089757635208}"/>
+              </a:ext>
+            </a:extLst>
+          </p:cNvPr>
           <p:cNvPicPr>
             <a:picLocks xmlns:a="http://schemas.openxmlformats.org/drawingml/2006/main" noChangeAspect="1"/>
           </p:cNvPicPr>
           <p:nvPr/>
         </p:nvPicPr>
         <p:blipFill>
-          <a:blip xmlns:r="http://schemas.openxmlformats.org/officeDocument/2006/relationships" xmlns:a="http://schemas.openxmlformats.org/drawingml/2006/main" r:embed="Ra35197b72d684ba7"/>
+          <a:blip xmlns:r="http://schemas.openxmlformats.org/officeDocument/2006/relationships" xmlns:a="http://schemas.openxmlformats.org/drawingml/2006/main" r:embed="R759ac6030e4a4a2a"/>
           <a:stretch xmlns:a="http://schemas.openxmlformats.org/drawingml/2006/main">
             <a:fillRect l="0" t="0" r="0" b="0"/>
           </a:stretch>
@@ -12262,14 +12275,20 @@
       </p:sp>
       <p:pic>
         <p:nvPicPr>
-          <p:cNvPr id="92" name="Image 5"/>
+          <p:cNvPr id="92" name="Image 5">
+            <a:extLst xmlns:a="http://schemas.openxmlformats.org/drawingml/2006/main">
+              <a:ext uri="{FF2B5EF4-FFF2-40B4-BE49-F238E27FC236}">
+                <a16:creationId xmlns:a16="http://schemas.microsoft.com/office/drawing/2014/main" id="{B0017203-5161-4DE8-97B8-4D4F911C347E}"/>
+              </a:ext>
+            </a:extLst>
+          </p:cNvPr>
           <p:cNvPicPr>
             <a:picLocks xmlns:a="http://schemas.openxmlformats.org/drawingml/2006/main" noChangeAspect="1"/>
           </p:cNvPicPr>
           <p:nvPr/>
         </p:nvPicPr>
         <p:blipFill>
-          <a:blip xmlns:r="http://schemas.openxmlformats.org/officeDocument/2006/relationships" xmlns:a="http://schemas.openxmlformats.org/drawingml/2006/main" r:embed="Rc88e8263f17a4792"/>
+          <a:blip xmlns:r="http://schemas.openxmlformats.org/officeDocument/2006/relationships" xmlns:a="http://schemas.openxmlformats.org/drawingml/2006/main" r:embed="R813492f92cef4f8a"/>
           <a:stretch xmlns:a="http://schemas.openxmlformats.org/drawingml/2006/main">
             <a:fillRect l="0" t="0" r="0" b="0"/>
           </a:stretch>
@@ -12411,14 +12430,20 @@
       </p:sp>
       <p:pic>
         <p:nvPicPr>
-          <p:cNvPr id="96" name="Image 6"/>
+          <p:cNvPr id="96" name="Image 6">
+            <a:extLst xmlns:a="http://schemas.openxmlformats.org/drawingml/2006/main">
+              <a:ext uri="{FF2B5EF4-FFF2-40B4-BE49-F238E27FC236}">
+                <a16:creationId xmlns:a16="http://schemas.microsoft.com/office/drawing/2014/main" id="{5623E770-F0E7-4829-BFBE-8ABE75998F8D}"/>
+              </a:ext>
+            </a:extLst>
+          </p:cNvPr>
           <p:cNvPicPr>
             <a:picLocks xmlns:a="http://schemas.openxmlformats.org/drawingml/2006/main" noChangeAspect="1"/>
           </p:cNvPicPr>
           <p:nvPr/>
         </p:nvPicPr>
         <p:blipFill>
-          <a:blip xmlns:r="http://schemas.openxmlformats.org/officeDocument/2006/relationships" xmlns:a="http://schemas.openxmlformats.org/drawingml/2006/main" r:embed="R207c14ca41e945cf"/>
+          <a:blip xmlns:r="http://schemas.openxmlformats.org/officeDocument/2006/relationships" xmlns:a="http://schemas.openxmlformats.org/drawingml/2006/main" r:embed="Rfe5c54b0dfb74558"/>
           <a:stretch xmlns:a="http://schemas.openxmlformats.org/drawingml/2006/main">
             <a:fillRect l="0" t="0" r="0" b="0"/>
           </a:stretch>
@@ -12560,14 +12585,20 @@
       </p:sp>
       <p:pic>
         <p:nvPicPr>
-          <p:cNvPr id="100" name="Image 7"/>
+          <p:cNvPr id="100" name="Image 7">
+            <a:extLst xmlns:a="http://schemas.openxmlformats.org/drawingml/2006/main">
+              <a:ext uri="{FF2B5EF4-FFF2-40B4-BE49-F238E27FC236}">
+                <a16:creationId xmlns:a16="http://schemas.microsoft.com/office/drawing/2014/main" id="{6E3D2478-11BD-4C9B-967B-5695BAAD0A84}"/>
+              </a:ext>
+            </a:extLst>
+          </p:cNvPr>
           <p:cNvPicPr>
             <a:picLocks xmlns:a="http://schemas.openxmlformats.org/drawingml/2006/main" noChangeAspect="1"/>
           </p:cNvPicPr>
           <p:nvPr/>
         </p:nvPicPr>
         <p:blipFill>
-          <a:blip xmlns:r="http://schemas.openxmlformats.org/officeDocument/2006/relationships" xmlns:a="http://schemas.openxmlformats.org/drawingml/2006/main" r:embed="R7e2f91e95ea84244"/>
+          <a:blip xmlns:r="http://schemas.openxmlformats.org/officeDocument/2006/relationships" xmlns:a="http://schemas.openxmlformats.org/drawingml/2006/main" r:embed="Rc4636afb550b4799"/>
           <a:stretch xmlns:a="http://schemas.openxmlformats.org/drawingml/2006/main">
             <a:fillRect l="0" t="0" r="0" b="0"/>
           </a:stretch>
@@ -13155,7 +13186,7 @@
                 <a:ea typeface="Calibri"/>
                 <a:cs typeface="Calibri"/>
               </a:rPr>
-              <a:t>~10 detik</a:t>
+              <a:t>ukur waktu</a:t>
             </a:r>
             <a:endParaRPr sz="1600"/>
           </a:p>
@@ -13201,7 +13232,7 @@
                 <a:ea typeface="Calibri"/>
                 <a:cs typeface="Calibri"/>
               </a:rPr>
-              <a:t>up dari kosong ke ready</a:t>
+              <a:t>startup tergantung kondisi</a:t>
             </a:r>
             <a:endParaRPr sz="1000"/>
           </a:p>
@@ -13363,14 +13394,20 @@
       </p:sp>
       <p:pic>
         <p:nvPicPr>
-          <p:cNvPr id="22" name="Image 0"/>
+          <p:cNvPr id="22" name="Image 0">
+            <a:extLst xmlns:a="http://schemas.openxmlformats.org/drawingml/2006/main">
+              <a:ext uri="{FF2B5EF4-FFF2-40B4-BE49-F238E27FC236}">
+                <a16:creationId xmlns:a16="http://schemas.microsoft.com/office/drawing/2014/main" id="{530EC534-E72D-40E3-A4F4-85EA7FBCE08B}"/>
+              </a:ext>
+            </a:extLst>
+          </p:cNvPr>
           <p:cNvPicPr>
             <a:picLocks xmlns:a="http://schemas.openxmlformats.org/drawingml/2006/main" noChangeAspect="1"/>
           </p:cNvPicPr>
           <p:nvPr/>
         </p:nvPicPr>
         <p:blipFill>
-          <a:blip xmlns:r="http://schemas.openxmlformats.org/officeDocument/2006/relationships" xmlns:a="http://schemas.openxmlformats.org/drawingml/2006/main" r:embed="Rb65b8756c0df44c1"/>
+          <a:blip xmlns:r="http://schemas.openxmlformats.org/officeDocument/2006/relationships" xmlns:a="http://schemas.openxmlformats.org/drawingml/2006/main" r:embed="R0e03cdf07b9241e7"/>
           <a:stretch xmlns:a="http://schemas.openxmlformats.org/drawingml/2006/main">
             <a:fillRect l="0" t="0" r="0" b="0"/>
           </a:stretch>
@@ -13387,14 +13424,20 @@
       </p:pic>
       <p:pic>
         <p:nvPicPr>
-          <p:cNvPr id="23" name="Image 1"/>
+          <p:cNvPr id="23" name="Image 1">
+            <a:extLst xmlns:a="http://schemas.openxmlformats.org/drawingml/2006/main">
+              <a:ext uri="{FF2B5EF4-FFF2-40B4-BE49-F238E27FC236}">
+                <a16:creationId xmlns:a16="http://schemas.microsoft.com/office/drawing/2014/main" id="{90BC5504-6EEF-4278-B7D4-A3044F6894CC}"/>
+              </a:ext>
+            </a:extLst>
+          </p:cNvPr>
           <p:cNvPicPr>
             <a:picLocks xmlns:a="http://schemas.openxmlformats.org/drawingml/2006/main" noChangeAspect="1"/>
           </p:cNvPicPr>
           <p:nvPr/>
         </p:nvPicPr>
         <p:blipFill>
-          <a:blip xmlns:r="http://schemas.openxmlformats.org/officeDocument/2006/relationships" xmlns:a="http://schemas.openxmlformats.org/drawingml/2006/main" r:embed="Rcc5fadc33465497f"/>
+          <a:blip xmlns:r="http://schemas.openxmlformats.org/officeDocument/2006/relationships" xmlns:a="http://schemas.openxmlformats.org/drawingml/2006/main" r:embed="R8264d919e175478e"/>
           <a:stretch xmlns:a="http://schemas.openxmlformats.org/drawingml/2006/main">
             <a:fillRect l="0" t="0" r="0" b="0"/>
           </a:stretch>
@@ -13800,7 +13843,7 @@
             <a:r>
               <a:rPr sz="800" b="1">
                 <a:solidFill>
-                  <a:srgbClr val="60A5FA"/>
+                  <a:srgbClr val="F37021"/>
                 </a:solidFill>
                 <a:latin typeface="Consolas"/>
                 <a:ea typeface="Consolas"/>
@@ -13808,7 +13851,6 @@
               </a:rPr>
               <a:t>  web:</a:t>
             </a:r>
-            <a:endParaRPr sz="800"/>
           </a:p>
           <a:p xmlns:a="http://schemas.openxmlformats.org/drawingml/2006/main">
             <a:pPr marL="0" indent="0">
@@ -13818,9 +13860,9 @@
               <a:buNone/>
             </a:pPr>
             <a:r>
-              <a:rPr sz="800">
-                <a:solidFill>
-                  <a:srgbClr val="E2E8F0"/>
+              <a:rPr sz="800" b="1">
+                <a:solidFill>
+                  <a:srgbClr val="F37021"/>
                 </a:solidFill>
                 <a:latin typeface="Consolas"/>
                 <a:ea typeface="Consolas"/>
@@ -13828,7 +13870,6 @@
               </a:rPr>
               <a:t>    image: nginx:1.27-alpine</a:t>
             </a:r>
-            <a:endParaRPr sz="800"/>
           </a:p>
           <a:p xmlns:a="http://schemas.openxmlformats.org/drawingml/2006/main">
             <a:pPr marL="0" indent="0">
@@ -13838,9 +13879,9 @@
               <a:buNone/>
             </a:pPr>
             <a:r>
-              <a:rPr sz="800">
-                <a:solidFill>
-                  <a:srgbClr val="E2E8F0"/>
+              <a:rPr sz="800" b="1">
+                <a:solidFill>
+                  <a:srgbClr val="F37021"/>
                 </a:solidFill>
                 <a:latin typeface="Consolas"/>
                 <a:ea typeface="Consolas"/>
@@ -13848,7 +13889,6 @@
               </a:rPr>
               <a:t>    ports: ["80:80"]</a:t>
             </a:r>
-            <a:endParaRPr sz="800"/>
           </a:p>
           <a:p xmlns:a="http://schemas.openxmlformats.org/drawingml/2006/main">
             <a:pPr marL="0" indent="0">
@@ -13858,9 +13898,9 @@
               <a:buNone/>
             </a:pPr>
             <a:r>
-              <a:rPr sz="800">
-                <a:solidFill>
-                  <a:srgbClr val="E2E8F0"/>
+              <a:rPr sz="800" b="1">
+                <a:solidFill>
+                  <a:srgbClr val="F37021"/>
                 </a:solidFill>
                 <a:latin typeface="Consolas"/>
                 <a:ea typeface="Consolas"/>
@@ -13868,7 +13908,6 @@
               </a:rPr>
               <a:t>    volumes:</a:t>
             </a:r>
-            <a:endParaRPr sz="800"/>
           </a:p>
           <a:p xmlns:a="http://schemas.openxmlformats.org/drawingml/2006/main">
             <a:pPr marL="0" indent="0">
@@ -13878,9 +13917,9 @@
               <a:buNone/>
             </a:pPr>
             <a:r>
-              <a:rPr sz="800">
-                <a:solidFill>
-                  <a:srgbClr val="E2E8F0"/>
+              <a:rPr sz="800" b="1">
+                <a:solidFill>
+                  <a:srgbClr val="F37021"/>
                 </a:solidFill>
                 <a:latin typeface="Consolas"/>
                 <a:ea typeface="Consolas"/>
@@ -13888,7 +13927,6 @@
               </a:rPr>
               <a:t>      - ./nginx.conf:/etc/nginx/nginx.conf:ro</a:t>
             </a:r>
-            <a:endParaRPr sz="800"/>
           </a:p>
           <a:p xmlns:a="http://schemas.openxmlformats.org/drawingml/2006/main">
             <a:pPr marL="0" indent="0">
@@ -13898,9 +13936,9 @@
               <a:buNone/>
             </a:pPr>
             <a:r>
-              <a:rPr sz="800">
-                <a:solidFill>
-                  <a:srgbClr val="E2E8F0"/>
+              <a:rPr sz="800" b="1">
+                <a:solidFill>
+                  <a:srgbClr val="F37021"/>
                 </a:solidFill>
                 <a:latin typeface="Consolas"/>
                 <a:ea typeface="Consolas"/>
@@ -13908,7 +13946,6 @@
               </a:rPr>
               <a:t>    depends_on: [api]</a:t>
             </a:r>
-            <a:endParaRPr sz="800"/>
           </a:p>
           <a:p xmlns:a="http://schemas.openxmlformats.org/drawingml/2006/main">
             <a:pPr marL="0" indent="0">
@@ -13917,7 +13954,17 @@
               </a:spcAft>
               <a:buNone/>
             </a:pPr>
-            <a:endParaRPr sz="800"/>
+            <a:r>
+              <a:rPr sz="800" b="1">
+                <a:solidFill>
+                  <a:srgbClr val="F37021"/>
+                </a:solidFill>
+                <a:latin typeface="Consolas"/>
+                <a:ea typeface="Consolas"/>
+                <a:cs typeface="Consolas"/>
+              </a:rPr>
+              <a:t>  api:</a:t>
+            </a:r>
           </a:p>
           <a:p xmlns:a="http://schemas.openxmlformats.org/drawingml/2006/main">
             <a:pPr marL="0" indent="0">
@@ -13929,15 +13976,14 @@
             <a:r>
               <a:rPr sz="800" b="1">
                 <a:solidFill>
-                  <a:srgbClr val="60A5FA"/>
-                </a:solidFill>
-                <a:latin typeface="Consolas"/>
-                <a:ea typeface="Consolas"/>
-                <a:cs typeface="Consolas"/>
-              </a:rPr>
-              <a:t>  api:</a:t>
-            </a:r>
-            <a:endParaRPr sz="800"/>
+                  <a:srgbClr val="F37021"/>
+                </a:solidFill>
+                <a:latin typeface="Consolas"/>
+                <a:ea typeface="Consolas"/>
+                <a:cs typeface="Consolas"/>
+              </a:rPr>
+              <a:t>    build: ./api</a:t>
+            </a:r>
           </a:p>
           <a:p xmlns:a="http://schemas.openxmlformats.org/drawingml/2006/main">
             <a:pPr marL="0" indent="0">
@@ -13947,17 +13993,16 @@
               <a:buNone/>
             </a:pPr>
             <a:r>
-              <a:rPr sz="800">
-                <a:solidFill>
-                  <a:srgbClr val="E2E8F0"/>
-                </a:solidFill>
-                <a:latin typeface="Consolas"/>
-                <a:ea typeface="Consolas"/>
-                <a:cs typeface="Consolas"/>
-              </a:rPr>
-              <a:t>    build: ./api</a:t>
-            </a:r>
-            <a:endParaRPr sz="800"/>
+              <a:rPr sz="800" b="1">
+                <a:solidFill>
+                  <a:srgbClr val="F37021"/>
+                </a:solidFill>
+                <a:latin typeface="Consolas"/>
+                <a:ea typeface="Consolas"/>
+                <a:cs typeface="Consolas"/>
+              </a:rPr>
+              <a:t>    environment:</a:t>
+            </a:r>
           </a:p>
           <a:p xmlns:a="http://schemas.openxmlformats.org/drawingml/2006/main">
             <a:pPr marL="0" indent="0">
@@ -13967,17 +14012,16 @@
               <a:buNone/>
             </a:pPr>
             <a:r>
-              <a:rPr sz="800">
-                <a:solidFill>
-                  <a:srgbClr val="E2E8F0"/>
-                </a:solidFill>
-                <a:latin typeface="Consolas"/>
-                <a:ea typeface="Consolas"/>
-                <a:cs typeface="Consolas"/>
-              </a:rPr>
-              <a:t>    environment:</a:t>
-            </a:r>
-            <a:endParaRPr sz="800"/>
+              <a:rPr sz="800" b="1">
+                <a:solidFill>
+                  <a:srgbClr val="F37021"/>
+                </a:solidFill>
+                <a:latin typeface="Consolas"/>
+                <a:ea typeface="Consolas"/>
+                <a:cs typeface="Consolas"/>
+              </a:rPr>
+              <a:t>      DATABASE_URL: postgresql://app:secret@db:5432/mydb</a:t>
+            </a:r>
           </a:p>
           <a:p xmlns:a="http://schemas.openxmlformats.org/drawingml/2006/main">
             <a:pPr marL="0" indent="0">
@@ -13987,17 +14031,16 @@
               <a:buNone/>
             </a:pPr>
             <a:r>
-              <a:rPr sz="800">
-                <a:solidFill>
-                  <a:srgbClr val="10B981"/>
-                </a:solidFill>
-                <a:latin typeface="Consolas"/>
-                <a:ea typeface="Consolas"/>
-                <a:cs typeface="Consolas"/>
-              </a:rPr>
-              <a:t>      DATABASE_URL: postgresql://app:secret@db:5432/mydb</a:t>
-            </a:r>
-            <a:endParaRPr sz="800"/>
+              <a:rPr sz="800" b="1">
+                <a:solidFill>
+                  <a:srgbClr val="F37021"/>
+                </a:solidFill>
+                <a:latin typeface="Consolas"/>
+                <a:ea typeface="Consolas"/>
+                <a:cs typeface="Consolas"/>
+              </a:rPr>
+              <a:t>      REDIS_URL: redis://cache:6379</a:t>
+            </a:r>
           </a:p>
           <a:p xmlns:a="http://schemas.openxmlformats.org/drawingml/2006/main">
             <a:pPr marL="0" indent="0">
@@ -14007,17 +14050,16 @@
               <a:buNone/>
             </a:pPr>
             <a:r>
-              <a:rPr sz="800">
-                <a:solidFill>
-                  <a:srgbClr val="10B981"/>
-                </a:solidFill>
-                <a:latin typeface="Consolas"/>
-                <a:ea typeface="Consolas"/>
-                <a:cs typeface="Consolas"/>
-              </a:rPr>
-              <a:t>      REDIS_URL: redis://cache:6379</a:t>
-            </a:r>
-            <a:endParaRPr sz="800"/>
+              <a:rPr sz="800" b="1">
+                <a:solidFill>
+                  <a:srgbClr val="F37021"/>
+                </a:solidFill>
+                <a:latin typeface="Consolas"/>
+                <a:ea typeface="Consolas"/>
+                <a:cs typeface="Consolas"/>
+              </a:rPr>
+              <a:t>    depends_on:</a:t>
+            </a:r>
           </a:p>
           <a:p xmlns:a="http://schemas.openxmlformats.org/drawingml/2006/main">
             <a:pPr marL="0" indent="0">
@@ -14027,17 +14069,16 @@
               <a:buNone/>
             </a:pPr>
             <a:r>
-              <a:rPr sz="800">
-                <a:solidFill>
-                  <a:srgbClr val="E2E8F0"/>
-                </a:solidFill>
-                <a:latin typeface="Consolas"/>
-                <a:ea typeface="Consolas"/>
-                <a:cs typeface="Consolas"/>
-              </a:rPr>
-              <a:t>    depends_on:</a:t>
-            </a:r>
-            <a:endParaRPr sz="800"/>
+              <a:rPr sz="800" b="1">
+                <a:solidFill>
+                  <a:srgbClr val="F37021"/>
+                </a:solidFill>
+                <a:latin typeface="Consolas"/>
+                <a:ea typeface="Consolas"/>
+                <a:cs typeface="Consolas"/>
+              </a:rPr>
+              <a:t>      db: { condition: service_healthy }</a:t>
+            </a:r>
           </a:p>
           <a:p xmlns:a="http://schemas.openxmlformats.org/drawingml/2006/main">
             <a:pPr marL="0" indent="0">
@@ -14047,17 +14088,16 @@
               <a:buNone/>
             </a:pPr>
             <a:r>
-              <a:rPr sz="800">
-                <a:solidFill>
-                  <a:srgbClr val="E2E8F0"/>
-                </a:solidFill>
-                <a:latin typeface="Consolas"/>
-                <a:ea typeface="Consolas"/>
-                <a:cs typeface="Consolas"/>
-              </a:rPr>
-              <a:t>      db: { condition: service_healthy }</a:t>
-            </a:r>
-            <a:endParaRPr sz="800"/>
+              <a:rPr sz="800" b="1">
+                <a:solidFill>
+                  <a:srgbClr val="F37021"/>
+                </a:solidFill>
+                <a:latin typeface="Consolas"/>
+                <a:ea typeface="Consolas"/>
+                <a:cs typeface="Consolas"/>
+              </a:rPr>
+              <a:t>      cache: { condition: service_started }</a:t>
+            </a:r>
           </a:p>
           <a:p xmlns:a="http://schemas.openxmlformats.org/drawingml/2006/main">
             <a:pPr marL="0" indent="0">
@@ -14067,17 +14107,16 @@
               <a:buNone/>
             </a:pPr>
             <a:r>
-              <a:rPr sz="800">
-                <a:solidFill>
-                  <a:srgbClr val="E2E8F0"/>
-                </a:solidFill>
-                <a:latin typeface="Consolas"/>
-                <a:ea typeface="Consolas"/>
-                <a:cs typeface="Consolas"/>
-              </a:rPr>
-              <a:t>      cache: { condition: service_started }</a:t>
-            </a:r>
-            <a:endParaRPr sz="800"/>
+              <a:rPr sz="800" b="1">
+                <a:solidFill>
+                  <a:srgbClr val="F37021"/>
+                </a:solidFill>
+                <a:latin typeface="Consolas"/>
+                <a:ea typeface="Consolas"/>
+                <a:cs typeface="Consolas"/>
+              </a:rPr>
+              <a:t>  db:</a:t>
+            </a:r>
           </a:p>
           <a:p xmlns:a="http://schemas.openxmlformats.org/drawingml/2006/main">
             <a:pPr marL="0" indent="0">
@@ -14086,7 +14125,17 @@
               </a:spcAft>
               <a:buNone/>
             </a:pPr>
-            <a:endParaRPr sz="800"/>
+            <a:r>
+              <a:rPr sz="800" b="1">
+                <a:solidFill>
+                  <a:srgbClr val="F37021"/>
+                </a:solidFill>
+                <a:latin typeface="Consolas"/>
+                <a:ea typeface="Consolas"/>
+                <a:cs typeface="Consolas"/>
+              </a:rPr>
+              <a:t>    image: postgres:15-alpine</a:t>
+            </a:r>
           </a:p>
           <a:p xmlns:a="http://schemas.openxmlformats.org/drawingml/2006/main">
             <a:pPr marL="0" indent="0">
@@ -14098,15 +14147,14 @@
             <a:r>
               <a:rPr sz="800" b="1">
                 <a:solidFill>
-                  <a:srgbClr val="60A5FA"/>
-                </a:solidFill>
-                <a:latin typeface="Consolas"/>
-                <a:ea typeface="Consolas"/>
-                <a:cs typeface="Consolas"/>
-              </a:rPr>
-              <a:t>  db:</a:t>
-            </a:r>
-            <a:endParaRPr sz="800"/>
+                  <a:srgbClr val="F37021"/>
+                </a:solidFill>
+                <a:latin typeface="Consolas"/>
+                <a:ea typeface="Consolas"/>
+                <a:cs typeface="Consolas"/>
+              </a:rPr>
+              <a:t>    environment:</a:t>
+            </a:r>
           </a:p>
           <a:p xmlns:a="http://schemas.openxmlformats.org/drawingml/2006/main">
             <a:pPr marL="0" indent="0">
@@ -14116,17 +14164,16 @@
               <a:buNone/>
             </a:pPr>
             <a:r>
-              <a:rPr sz="800">
-                <a:solidFill>
-                  <a:srgbClr val="E2E8F0"/>
-                </a:solidFill>
-                <a:latin typeface="Consolas"/>
-                <a:ea typeface="Consolas"/>
-                <a:cs typeface="Consolas"/>
-              </a:rPr>
-              <a:t>    image: postgres:15-alpine</a:t>
-            </a:r>
-            <a:endParaRPr sz="800"/>
+              <a:rPr sz="800" b="1">
+                <a:solidFill>
+                  <a:srgbClr val="F37021"/>
+                </a:solidFill>
+                <a:latin typeface="Consolas"/>
+                <a:ea typeface="Consolas"/>
+                <a:cs typeface="Consolas"/>
+              </a:rPr>
+              <a:t>      POSTGRES_USER: app</a:t>
+            </a:r>
           </a:p>
           <a:p xmlns:a="http://schemas.openxmlformats.org/drawingml/2006/main">
             <a:pPr marL="0" indent="0">
@@ -14136,17 +14183,16 @@
               <a:buNone/>
             </a:pPr>
             <a:r>
-              <a:rPr sz="800">
-                <a:solidFill>
-                  <a:srgbClr val="E2E8F0"/>
-                </a:solidFill>
-                <a:latin typeface="Consolas"/>
-                <a:ea typeface="Consolas"/>
-                <a:cs typeface="Consolas"/>
-              </a:rPr>
-              <a:t>    environment:</a:t>
-            </a:r>
-            <a:endParaRPr sz="800"/>
+              <a:rPr sz="800" b="1">
+                <a:solidFill>
+                  <a:srgbClr val="F37021"/>
+                </a:solidFill>
+                <a:latin typeface="Consolas"/>
+                <a:ea typeface="Consolas"/>
+                <a:cs typeface="Consolas"/>
+              </a:rPr>
+              <a:t>      POSTGRES_PASSWORD: secret</a:t>
+            </a:r>
           </a:p>
           <a:p xmlns:a="http://schemas.openxmlformats.org/drawingml/2006/main">
             <a:pPr marL="0" indent="0">
@@ -14156,17 +14202,16 @@
               <a:buNone/>
             </a:pPr>
             <a:r>
-              <a:rPr sz="800">
-                <a:solidFill>
-                  <a:srgbClr val="E2E8F0"/>
-                </a:solidFill>
-                <a:latin typeface="Consolas"/>
-                <a:ea typeface="Consolas"/>
-                <a:cs typeface="Consolas"/>
-              </a:rPr>
-              <a:t>      POSTGRES_USER: app</a:t>
-            </a:r>
-            <a:endParaRPr sz="800"/>
+              <a:rPr sz="800" b="1">
+                <a:solidFill>
+                  <a:srgbClr val="F37021"/>
+                </a:solidFill>
+                <a:latin typeface="Consolas"/>
+                <a:ea typeface="Consolas"/>
+                <a:cs typeface="Consolas"/>
+              </a:rPr>
+              <a:t>      POSTGRES_DB: mydb</a:t>
+            </a:r>
           </a:p>
           <a:p xmlns:a="http://schemas.openxmlformats.org/drawingml/2006/main">
             <a:pPr marL="0" indent="0">
@@ -14176,17 +14221,16 @@
               <a:buNone/>
             </a:pPr>
             <a:r>
-              <a:rPr sz="800">
-                <a:solidFill>
-                  <a:srgbClr val="E2E8F0"/>
-                </a:solidFill>
-                <a:latin typeface="Consolas"/>
-                <a:ea typeface="Consolas"/>
-                <a:cs typeface="Consolas"/>
-              </a:rPr>
-              <a:t>      POSTGRES_PASSWORD: secret</a:t>
-            </a:r>
-            <a:endParaRPr sz="800"/>
+              <a:rPr sz="800" b="1">
+                <a:solidFill>
+                  <a:srgbClr val="F37021"/>
+                </a:solidFill>
+                <a:latin typeface="Consolas"/>
+                <a:ea typeface="Consolas"/>
+                <a:cs typeface="Consolas"/>
+              </a:rPr>
+              <a:t>    volumes: ["db-data:/var/lib/postgresql/data"]</a:t>
+            </a:r>
           </a:p>
           <a:p xmlns:a="http://schemas.openxmlformats.org/drawingml/2006/main">
             <a:pPr marL="0" indent="0">
@@ -14196,17 +14240,16 @@
               <a:buNone/>
             </a:pPr>
             <a:r>
-              <a:rPr sz="800">
-                <a:solidFill>
-                  <a:srgbClr val="E2E8F0"/>
-                </a:solidFill>
-                <a:latin typeface="Consolas"/>
-                <a:ea typeface="Consolas"/>
-                <a:cs typeface="Consolas"/>
-              </a:rPr>
-              <a:t>      POSTGRES_DB: mydb</a:t>
-            </a:r>
-            <a:endParaRPr sz="800"/>
+              <a:rPr sz="800" b="1">
+                <a:solidFill>
+                  <a:srgbClr val="F37021"/>
+                </a:solidFill>
+                <a:latin typeface="Consolas"/>
+                <a:ea typeface="Consolas"/>
+                <a:cs typeface="Consolas"/>
+              </a:rPr>
+              <a:t>    healthcheck:</a:t>
+            </a:r>
           </a:p>
           <a:p xmlns:a="http://schemas.openxmlformats.org/drawingml/2006/main">
             <a:pPr marL="0" indent="0">
@@ -14216,17 +14259,16 @@
               <a:buNone/>
             </a:pPr>
             <a:r>
-              <a:rPr sz="800">
-                <a:solidFill>
-                  <a:srgbClr val="10B981"/>
-                </a:solidFill>
-                <a:latin typeface="Consolas"/>
-                <a:ea typeface="Consolas"/>
-                <a:cs typeface="Consolas"/>
-              </a:rPr>
-              <a:t>    volumes: ["db-data:/var/lib/postgresql/data"]</a:t>
-            </a:r>
-            <a:endParaRPr sz="800"/>
+              <a:rPr sz="800" b="1">
+                <a:solidFill>
+                  <a:srgbClr val="F37021"/>
+                </a:solidFill>
+                <a:latin typeface="Consolas"/>
+                <a:ea typeface="Consolas"/>
+                <a:cs typeface="Consolas"/>
+              </a:rPr>
+              <a:t>      test: ["CMD", "pg_isready", "-U", "app"]</a:t>
+            </a:r>
           </a:p>
           <a:p xmlns:a="http://schemas.openxmlformats.org/drawingml/2006/main">
             <a:pPr marL="0" indent="0">
@@ -14236,17 +14278,16 @@
               <a:buNone/>
             </a:pPr>
             <a:r>
-              <a:rPr sz="800">
-                <a:solidFill>
-                  <a:srgbClr val="E2E8F0"/>
-                </a:solidFill>
-                <a:latin typeface="Consolas"/>
-                <a:ea typeface="Consolas"/>
-                <a:cs typeface="Consolas"/>
-              </a:rPr>
-              <a:t>    healthcheck:</a:t>
-            </a:r>
-            <a:endParaRPr sz="800"/>
+              <a:rPr sz="800" b="1">
+                <a:solidFill>
+                  <a:srgbClr val="F37021"/>
+                </a:solidFill>
+                <a:latin typeface="Consolas"/>
+                <a:ea typeface="Consolas"/>
+                <a:cs typeface="Consolas"/>
+              </a:rPr>
+              <a:t>      interval: 5s</a:t>
+            </a:r>
           </a:p>
           <a:p xmlns:a="http://schemas.openxmlformats.org/drawingml/2006/main">
             <a:pPr marL="0" indent="0">
@@ -14256,17 +14297,16 @@
               <a:buNone/>
             </a:pPr>
             <a:r>
-              <a:rPr sz="800">
-                <a:solidFill>
-                  <a:srgbClr val="E2E8F0"/>
-                </a:solidFill>
-                <a:latin typeface="Consolas"/>
-                <a:ea typeface="Consolas"/>
-                <a:cs typeface="Consolas"/>
-              </a:rPr>
-              <a:t>      test: ["CMD", "pg_isready", "-U", "app"]</a:t>
-            </a:r>
-            <a:endParaRPr sz="800"/>
+              <a:rPr sz="800" b="1">
+                <a:solidFill>
+                  <a:srgbClr val="F37021"/>
+                </a:solidFill>
+                <a:latin typeface="Consolas"/>
+                <a:ea typeface="Consolas"/>
+                <a:cs typeface="Consolas"/>
+              </a:rPr>
+              <a:t>  cache:</a:t>
+            </a:r>
           </a:p>
           <a:p xmlns:a="http://schemas.openxmlformats.org/drawingml/2006/main">
             <a:pPr marL="0" indent="0">
@@ -14276,17 +14316,16 @@
               <a:buNone/>
             </a:pPr>
             <a:r>
-              <a:rPr sz="800">
-                <a:solidFill>
-                  <a:srgbClr val="E2E8F0"/>
-                </a:solidFill>
-                <a:latin typeface="Consolas"/>
-                <a:ea typeface="Consolas"/>
-                <a:cs typeface="Consolas"/>
-              </a:rPr>
-              <a:t>      interval: 5s</a:t>
-            </a:r>
-            <a:endParaRPr sz="800"/>
+              <a:rPr sz="800" b="1">
+                <a:solidFill>
+                  <a:srgbClr val="F37021"/>
+                </a:solidFill>
+                <a:latin typeface="Consolas"/>
+                <a:ea typeface="Consolas"/>
+                <a:cs typeface="Consolas"/>
+              </a:rPr>
+              <a:t>    image: redis:7-alpine</a:t>
+            </a:r>
           </a:p>
           <a:p xmlns:a="http://schemas.openxmlformats.org/drawingml/2006/main">
             <a:pPr marL="0" indent="0">
@@ -14295,7 +14334,17 @@
               </a:spcAft>
               <a:buNone/>
             </a:pPr>
-            <a:endParaRPr sz="800"/>
+            <a:r>
+              <a:rPr sz="800" b="1">
+                <a:solidFill>
+                  <a:srgbClr val="F37021"/>
+                </a:solidFill>
+                <a:latin typeface="Consolas"/>
+                <a:ea typeface="Consolas"/>
+                <a:cs typeface="Consolas"/>
+              </a:rPr>
+              <a:t>volumes:</a:t>
+            </a:r>
           </a:p>
           <a:p xmlns:a="http://schemas.openxmlformats.org/drawingml/2006/main">
             <a:pPr marL="0" indent="0">
@@ -14307,84 +14356,14 @@
             <a:r>
               <a:rPr sz="800" b="1">
                 <a:solidFill>
-                  <a:srgbClr val="60A5FA"/>
-                </a:solidFill>
-                <a:latin typeface="Consolas"/>
-                <a:ea typeface="Consolas"/>
-                <a:cs typeface="Consolas"/>
-              </a:rPr>
-              <a:t>  cache:</a:t>
-            </a:r>
-            <a:endParaRPr sz="800"/>
-          </a:p>
-          <a:p xmlns:a="http://schemas.openxmlformats.org/drawingml/2006/main">
-            <a:pPr marL="0" indent="0">
-              <a:spcAft>
-                <a:spcPts val="200"/>
-              </a:spcAft>
-              <a:buNone/>
-            </a:pPr>
-            <a:r>
-              <a:rPr sz="800">
-                <a:solidFill>
-                  <a:srgbClr val="E2E8F0"/>
-                </a:solidFill>
-                <a:latin typeface="Consolas"/>
-                <a:ea typeface="Consolas"/>
-                <a:cs typeface="Consolas"/>
-              </a:rPr>
-              <a:t>    image: redis:7-alpine</a:t>
-            </a:r>
-            <a:endParaRPr sz="800"/>
-          </a:p>
-          <a:p xmlns:a="http://schemas.openxmlformats.org/drawingml/2006/main">
-            <a:pPr marL="0" indent="0">
-              <a:spcAft>
-                <a:spcPts val="200"/>
-              </a:spcAft>
-              <a:buNone/>
-            </a:pPr>
-            <a:endParaRPr sz="800"/>
-          </a:p>
-          <a:p xmlns:a="http://schemas.openxmlformats.org/drawingml/2006/main">
-            <a:pPr marL="0" indent="0">
-              <a:spcAft>
-                <a:spcPts val="200"/>
-              </a:spcAft>
-              <a:buNone/>
-            </a:pPr>
-            <a:r>
-              <a:rPr sz="800" b="1">
-                <a:solidFill>
                   <a:srgbClr val="F37021"/>
                 </a:solidFill>
                 <a:latin typeface="Consolas"/>
                 <a:ea typeface="Consolas"/>
                 <a:cs typeface="Consolas"/>
               </a:rPr>
-              <a:t>volumes:</a:t>
-            </a:r>
-            <a:endParaRPr sz="800"/>
-          </a:p>
-          <a:p xmlns:a="http://schemas.openxmlformats.org/drawingml/2006/main">
-            <a:pPr marL="0" indent="0">
-              <a:spcAft>
-                <a:spcPts val="200"/>
-              </a:spcAft>
-              <a:buNone/>
-            </a:pPr>
-            <a:r>
-              <a:rPr sz="800">
-                <a:solidFill>
-                  <a:srgbClr val="60A5FA"/>
-                </a:solidFill>
-                <a:latin typeface="Consolas"/>
-                <a:ea typeface="Consolas"/>
-                <a:cs typeface="Consolas"/>
-              </a:rPr>
               <a:t>  db-data:</a:t>
             </a:r>
-            <a:endParaRPr sz="800"/>
           </a:p>
         </p:txBody>
       </p:sp>
@@ -14544,14 +14523,20 @@
       </p:sp>
       <p:pic>
         <p:nvPicPr>
-          <p:cNvPr id="57" name="Image 0"/>
+          <p:cNvPr id="57" name="Image 0">
+            <a:extLst xmlns:a="http://schemas.openxmlformats.org/drawingml/2006/main">
+              <a:ext uri="{FF2B5EF4-FFF2-40B4-BE49-F238E27FC236}">
+                <a16:creationId xmlns:a16="http://schemas.microsoft.com/office/drawing/2014/main" id="{93316E82-65DF-47C2-AEB2-13870ED13C53}"/>
+              </a:ext>
+            </a:extLst>
+          </p:cNvPr>
           <p:cNvPicPr>
             <a:picLocks xmlns:a="http://schemas.openxmlformats.org/drawingml/2006/main" noChangeAspect="1"/>
           </p:cNvPicPr>
           <p:nvPr/>
         </p:nvPicPr>
         <p:blipFill>
-          <a:blip xmlns:r="http://schemas.openxmlformats.org/officeDocument/2006/relationships" xmlns:a="http://schemas.openxmlformats.org/drawingml/2006/main" r:embed="Rffe570aa07c5488b"/>
+          <a:blip xmlns:r="http://schemas.openxmlformats.org/officeDocument/2006/relationships" xmlns:a="http://schemas.openxmlformats.org/drawingml/2006/main" r:embed="Ra9851f0bb12343bb"/>
           <a:stretch xmlns:a="http://schemas.openxmlformats.org/drawingml/2006/main">
             <a:fillRect l="0" t="0" r="0" b="0"/>
           </a:stretch>
@@ -14568,14 +14553,20 @@
       </p:pic>
       <p:pic>
         <p:nvPicPr>
-          <p:cNvPr id="58" name="Image 1"/>
+          <p:cNvPr id="58" name="Image 1">
+            <a:extLst xmlns:a="http://schemas.openxmlformats.org/drawingml/2006/main">
+              <a:ext uri="{FF2B5EF4-FFF2-40B4-BE49-F238E27FC236}">
+                <a16:creationId xmlns:a16="http://schemas.microsoft.com/office/drawing/2014/main" id="{4206C37E-30C1-4199-8EE2-FFB79DA7C5DC}"/>
+              </a:ext>
+            </a:extLst>
+          </p:cNvPr>
           <p:cNvPicPr>
             <a:picLocks xmlns:a="http://schemas.openxmlformats.org/drawingml/2006/main" noChangeAspect="1"/>
           </p:cNvPicPr>
           <p:nvPr/>
         </p:nvPicPr>
         <p:blipFill>
-          <a:blip xmlns:r="http://schemas.openxmlformats.org/officeDocument/2006/relationships" xmlns:a="http://schemas.openxmlformats.org/drawingml/2006/main" r:embed="R029ca3621e574762"/>
+          <a:blip xmlns:r="http://schemas.openxmlformats.org/officeDocument/2006/relationships" xmlns:a="http://schemas.openxmlformats.org/drawingml/2006/main" r:embed="Rfe47c6a89029489a"/>
           <a:stretch xmlns:a="http://schemas.openxmlformats.org/drawingml/2006/main">
             <a:fillRect l="0" t="0" r="0" b="0"/>
           </a:stretch>
@@ -14865,7 +14856,7 @@
                 <a:ea typeface="Calibri"/>
                 <a:cs typeface="Calibri"/>
               </a:rPr>
-              <a:t>Build + start semua service (detached)</a:t>
+              <a:t>Start service. Tambahkan --build untuk rebuild.</a:t>
             </a:r>
             <a:endParaRPr sz="1000"/>
           </a:p>
@@ -15497,7 +15488,7 @@
                 <a:ea typeface="Calibri"/>
                 <a:cs typeface="Calibri"/>
               </a:rPr>
-              <a:t>Follow log 1 service saja</a:t>
+              <a:t>Baca log tersimpan. Tambahkan -f untuk mengikuti.</a:t>
             </a:r>
             <a:endParaRPr sz="1000"/>
           </a:p>
@@ -15609,7 +15600,7 @@
                 <a:ea typeface="Consolas"/>
                 <a:cs typeface="Consolas"/>
               </a:rPr>
-              <a:t>docker compose exec api bash</a:t>
+              <a:t>docker compose exec api sh</a:t>
             </a:r>
             <a:endParaRPr sz="1050"/>
           </a:p>
@@ -16366,84 +16357,7 @@
                 <a:ea typeface="Calibri"/>
                 <a:cs typeface="Calibri"/>
               </a:rPr>
-              <a:t>Workflow harian: </a:t>
-            </a:r>
-            <a:r>
-              <a:rPr sz="1100" b="1">
-                <a:solidFill>
-                  <a:srgbClr val="FFFFFF"/>
-                </a:solidFill>
-                <a:latin typeface="Consolas"/>
-                <a:ea typeface="Consolas"/>
-                <a:cs typeface="Consolas"/>
-              </a:rPr>
-              <a:t>compose up -d</a:t>
-            </a:r>
-            <a:r>
-              <a:rPr sz="1100">
-                <a:solidFill>
-                  <a:srgbClr val="FFFFFF"/>
-                </a:solidFill>
-                <a:latin typeface="Calibri"/>
-                <a:ea typeface="Calibri"/>
-                <a:cs typeface="Calibri"/>
-              </a:rPr>
-              <a:t>  -&gt;  </a:t>
-            </a:r>
-            <a:r>
-              <a:rPr sz="1100" b="1">
-                <a:solidFill>
-                  <a:srgbClr val="FFFFFF"/>
-                </a:solidFill>
-                <a:latin typeface="Consolas"/>
-                <a:ea typeface="Consolas"/>
-                <a:cs typeface="Consolas"/>
-              </a:rPr>
-              <a:t>compose logs -f api</a:t>
-            </a:r>
-            <a:r>
-              <a:rPr sz="1100">
-                <a:solidFill>
-                  <a:srgbClr val="FFFFFF"/>
-                </a:solidFill>
-                <a:latin typeface="Calibri"/>
-                <a:ea typeface="Calibri"/>
-                <a:cs typeface="Calibri"/>
-              </a:rPr>
-              <a:t>  -&gt;  edit code  -&gt;  </a:t>
-            </a:r>
-            <a:r>
-              <a:rPr sz="1100" b="1">
-                <a:solidFill>
-                  <a:srgbClr val="FFFFFF"/>
-                </a:solidFill>
-                <a:latin typeface="Consolas"/>
-                <a:ea typeface="Consolas"/>
-                <a:cs typeface="Consolas"/>
-              </a:rPr>
-              <a:t>compose restart api</a:t>
-            </a:r>
-            <a:r>
-              <a:rPr sz="1100">
-                <a:solidFill>
-                  <a:srgbClr val="FFFFFF"/>
-                </a:solidFill>
-                <a:latin typeface="Calibri"/>
-                <a:ea typeface="Calibri"/>
-                <a:cs typeface="Calibri"/>
-              </a:rPr>
-              <a:t>  -&gt;  selesai: </a:t>
-            </a:r>
-            <a:r>
-              <a:rPr sz="1100" b="1">
-                <a:solidFill>
-                  <a:srgbClr val="FFFFFF"/>
-                </a:solidFill>
-                <a:latin typeface="Consolas"/>
-                <a:ea typeface="Consolas"/>
-                <a:cs typeface="Consolas"/>
-              </a:rPr>
-              <a:t>compose down</a:t>
+              <a:t>Urutan Lab 06: docker compose up --build -d --wait, docker compose ps, uji HTTP, lalu docker compose --profile debug down.</a:t>
             </a:r>
             <a:endParaRPr sz="1100"/>
           </a:p>
@@ -16719,14 +16633,20 @@
       </p:sp>
       <p:pic>
         <p:nvPicPr>
-          <p:cNvPr id="24" name="Image 0"/>
+          <p:cNvPr id="24" name="Image 0">
+            <a:extLst xmlns:a="http://schemas.openxmlformats.org/drawingml/2006/main">
+              <a:ext uri="{FF2B5EF4-FFF2-40B4-BE49-F238E27FC236}">
+                <a16:creationId xmlns:a16="http://schemas.microsoft.com/office/drawing/2014/main" id="{3355EC55-ABC8-4EA3-B047-08F93D849BF4}"/>
+              </a:ext>
+            </a:extLst>
+          </p:cNvPr>
           <p:cNvPicPr>
             <a:picLocks xmlns:a="http://schemas.openxmlformats.org/drawingml/2006/main" noChangeAspect="1"/>
           </p:cNvPicPr>
           <p:nvPr/>
         </p:nvPicPr>
         <p:blipFill>
-          <a:blip xmlns:r="http://schemas.openxmlformats.org/officeDocument/2006/relationships" xmlns:a="http://schemas.openxmlformats.org/drawingml/2006/main" r:embed="Rae8eb3efd9ac452a"/>
+          <a:blip xmlns:r="http://schemas.openxmlformats.org/officeDocument/2006/relationships" xmlns:a="http://schemas.openxmlformats.org/drawingml/2006/main" r:embed="Rc5fad5f17f24426d"/>
           <a:stretch xmlns:a="http://schemas.openxmlformats.org/drawingml/2006/main">
             <a:fillRect l="0" t="0" r="0" b="0"/>
           </a:stretch>
@@ -16743,14 +16663,20 @@
       </p:pic>
       <p:pic>
         <p:nvPicPr>
-          <p:cNvPr id="25" name="Image 1"/>
+          <p:cNvPr id="25" name="Image 1">
+            <a:extLst xmlns:a="http://schemas.openxmlformats.org/drawingml/2006/main">
+              <a:ext uri="{FF2B5EF4-FFF2-40B4-BE49-F238E27FC236}">
+                <a16:creationId xmlns:a16="http://schemas.microsoft.com/office/drawing/2014/main" id="{CDC7876A-7436-4487-96AD-7F878966C434}"/>
+              </a:ext>
+            </a:extLst>
+          </p:cNvPr>
           <p:cNvPicPr>
             <a:picLocks xmlns:a="http://schemas.openxmlformats.org/drawingml/2006/main" noChangeAspect="1"/>
           </p:cNvPicPr>
           <p:nvPr/>
         </p:nvPicPr>
         <p:blipFill>
-          <a:blip xmlns:r="http://schemas.openxmlformats.org/officeDocument/2006/relationships" xmlns:a="http://schemas.openxmlformats.org/drawingml/2006/main" r:embed="Rf899a716f4de457e"/>
+          <a:blip xmlns:r="http://schemas.openxmlformats.org/officeDocument/2006/relationships" xmlns:a="http://schemas.openxmlformats.org/drawingml/2006/main" r:embed="Re4840aa50005475b"/>
           <a:stretch xmlns:a="http://schemas.openxmlformats.org/drawingml/2006/main">
             <a:fillRect l="0" t="0" r="0" b="0"/>
           </a:stretch>
@@ -17109,14 +17035,20 @@
       </p:sp>
       <p:pic>
         <p:nvPicPr>
-          <p:cNvPr id="31" name="Image 0"/>
+          <p:cNvPr id="31" name="Image 0">
+            <a:extLst xmlns:a="http://schemas.openxmlformats.org/drawingml/2006/main">
+              <a:ext uri="{FF2B5EF4-FFF2-40B4-BE49-F238E27FC236}">
+                <a16:creationId xmlns:a16="http://schemas.microsoft.com/office/drawing/2014/main" id="{A880052D-633D-4A01-9FE4-A3595248E572}"/>
+              </a:ext>
+            </a:extLst>
+          </p:cNvPr>
           <p:cNvPicPr>
             <a:picLocks xmlns:a="http://schemas.openxmlformats.org/drawingml/2006/main" noChangeAspect="1"/>
           </p:cNvPicPr>
           <p:nvPr/>
         </p:nvPicPr>
         <p:blipFill>
-          <a:blip xmlns:r="http://schemas.openxmlformats.org/officeDocument/2006/relationships" xmlns:a="http://schemas.openxmlformats.org/drawingml/2006/main" r:embed="Rbe992aa10edf4a23"/>
+          <a:blip xmlns:r="http://schemas.openxmlformats.org/officeDocument/2006/relationships" xmlns:a="http://schemas.openxmlformats.org/drawingml/2006/main" r:embed="R6cd1d5654b804da1"/>
           <a:stretch xmlns:a="http://schemas.openxmlformats.org/drawingml/2006/main">
             <a:fillRect l="0" t="0" r="0" b="0"/>
           </a:stretch>
@@ -17133,14 +17065,20 @@
       </p:pic>
       <p:pic>
         <p:nvPicPr>
-          <p:cNvPr id="32" name="Image 1"/>
+          <p:cNvPr id="32" name="Image 1">
+            <a:extLst xmlns:a="http://schemas.openxmlformats.org/drawingml/2006/main">
+              <a:ext uri="{FF2B5EF4-FFF2-40B4-BE49-F238E27FC236}">
+                <a16:creationId xmlns:a16="http://schemas.microsoft.com/office/drawing/2014/main" id="{B6C64632-36DB-4E8E-988C-FF33EC035693}"/>
+              </a:ext>
+            </a:extLst>
+          </p:cNvPr>
           <p:cNvPicPr>
             <a:picLocks xmlns:a="http://schemas.openxmlformats.org/drawingml/2006/main" noChangeAspect="1"/>
           </p:cNvPicPr>
           <p:nvPr/>
         </p:nvPicPr>
         <p:blipFill>
-          <a:blip xmlns:r="http://schemas.openxmlformats.org/officeDocument/2006/relationships" xmlns:a="http://schemas.openxmlformats.org/drawingml/2006/main" r:embed="Rc23dfbf7d6474d7b"/>
+          <a:blip xmlns:r="http://schemas.openxmlformats.org/officeDocument/2006/relationships" xmlns:a="http://schemas.openxmlformats.org/drawingml/2006/main" r:embed="R5f5434bbbdbb4b74"/>
           <a:stretch xmlns:a="http://schemas.openxmlformats.org/drawingml/2006/main">
             <a:fillRect l="0" t="0" r="0" b="0"/>
           </a:stretch>
@@ -17351,18 +17289,7 @@
                 <a:ea typeface="Calibri"/>
                 <a:cs typeface="Calibri"/>
               </a:rPr>
-              <a:t>Magic: </a:t>
-            </a:r>
-            <a:r>
-              <a:rPr sz="1300">
-                <a:solidFill>
-                  <a:srgbClr val="FFFFFF"/>
-                </a:solidFill>
-                <a:latin typeface="Calibri"/>
-                <a:ea typeface="Calibri"/>
-                <a:cs typeface="Calibri"/>
-              </a:rPr>
-              <a:t>Compose punya embedded DNS server. Tiap service name auto-resolve ke IP container-nya.</a:t>
+              <a:t>DNS: Docker menyediakan DNS internal. Nama service mengarah ke IP container pada network yang sama.</a:t>
             </a:r>
             <a:endParaRPr sz="1400"/>
           </a:p>
@@ -17639,7 +17566,7 @@
                 <a:ea typeface="Consolas"/>
                 <a:cs typeface="Consolas"/>
               </a:rPr>
-              <a:t># compose.yml</a:t>
+              <a:t># Potongan compose.yaml Lab 06</a:t>
             </a:r>
             <a:endParaRPr sz="1100"/>
           </a:p>
@@ -17651,9 +17578,9 @@
               <a:buNone/>
             </a:pPr>
             <a:r>
-              <a:rPr sz="1100" b="1">
-                <a:solidFill>
-                  <a:srgbClr val="F37021"/>
+              <a:rPr sz="1100">
+                <a:solidFill>
+                  <a:srgbClr val="94A3B8"/>
                 </a:solidFill>
                 <a:latin typeface="Consolas"/>
                 <a:ea typeface="Consolas"/>
@@ -17661,7 +17588,6 @@
               </a:rPr>
               <a:t>services:</a:t>
             </a:r>
-            <a:endParaRPr sz="1100"/>
           </a:p>
           <a:p xmlns:a="http://schemas.openxmlformats.org/drawingml/2006/main">
             <a:pPr marL="0" indent="0">
@@ -17671,9 +17597,9 @@
               <a:buNone/>
             </a:pPr>
             <a:r>
-              <a:rPr sz="1100" b="1">
-                <a:solidFill>
-                  <a:srgbClr val="60A5FA"/>
+              <a:rPr sz="1100">
+                <a:solidFill>
+                  <a:srgbClr val="94A3B8"/>
                 </a:solidFill>
                 <a:latin typeface="Consolas"/>
                 <a:ea typeface="Consolas"/>
@@ -17681,7 +17607,6 @@
               </a:rPr>
               <a:t>  db:</a:t>
             </a:r>
-            <a:endParaRPr sz="1100"/>
           </a:p>
           <a:p xmlns:a="http://schemas.openxmlformats.org/drawingml/2006/main">
             <a:pPr marL="0" indent="0">
@@ -17693,15 +17618,14 @@
             <a:r>
               <a:rPr sz="1100">
                 <a:solidFill>
-                  <a:srgbClr val="E2E8F0"/>
-                </a:solidFill>
-                <a:latin typeface="Consolas"/>
-                <a:ea typeface="Consolas"/>
-                <a:cs typeface="Consolas"/>
-              </a:rPr>
-              <a:t>    image: postgres:15</a:t>
-            </a:r>
-            <a:endParaRPr sz="1100"/>
+                  <a:srgbClr val="94A3B8"/>
+                </a:solidFill>
+                <a:latin typeface="Consolas"/>
+                <a:ea typeface="Consolas"/>
+                <a:cs typeface="Consolas"/>
+              </a:rPr>
+              <a:t>    image: postgres:16-alpine</a:t>
+            </a:r>
           </a:p>
           <a:p xmlns:a="http://schemas.openxmlformats.org/drawingml/2006/main">
             <a:pPr marL="0" indent="0">
@@ -17711,9 +17635,9 @@
               <a:buNone/>
             </a:pPr>
             <a:r>
-              <a:rPr sz="1100" b="1">
-                <a:solidFill>
-                  <a:srgbClr val="60A5FA"/>
+              <a:rPr sz="1100">
+                <a:solidFill>
+                  <a:srgbClr val="94A3B8"/>
                 </a:solidFill>
                 <a:latin typeface="Consolas"/>
                 <a:ea typeface="Consolas"/>
@@ -17721,7 +17645,6 @@
               </a:rPr>
               <a:t>  api:</a:t>
             </a:r>
-            <a:endParaRPr sz="1100"/>
           </a:p>
           <a:p xmlns:a="http://schemas.openxmlformats.org/drawingml/2006/main">
             <a:pPr marL="0" indent="0">
@@ -17733,15 +17656,14 @@
             <a:r>
               <a:rPr sz="1100">
                 <a:solidFill>
-                  <a:srgbClr val="E2E8F0"/>
-                </a:solidFill>
-                <a:latin typeface="Consolas"/>
-                <a:ea typeface="Consolas"/>
-                <a:cs typeface="Consolas"/>
-              </a:rPr>
-              <a:t>    image: myapp/api</a:t>
-            </a:r>
-            <a:endParaRPr sz="1100"/>
+                  <a:srgbClr val="94A3B8"/>
+                </a:solidFill>
+                <a:latin typeface="Consolas"/>
+                <a:ea typeface="Consolas"/>
+                <a:cs typeface="Consolas"/>
+              </a:rPr>
+              <a:t>    build: ./api</a:t>
+            </a:r>
           </a:p>
           <a:p xmlns:a="http://schemas.openxmlformats.org/drawingml/2006/main">
             <a:pPr marL="0" indent="0">
@@ -17750,7 +17672,17 @@
               </a:spcAft>
               <a:buNone/>
             </a:pPr>
-            <a:endParaRPr sz="1100"/>
+            <a:r>
+              <a:rPr sz="1100">
+                <a:solidFill>
+                  <a:srgbClr val="94A3B8"/>
+                </a:solidFill>
+                <a:latin typeface="Consolas"/>
+                <a:ea typeface="Consolas"/>
+                <a:cs typeface="Consolas"/>
+              </a:rPr>
+              <a:t>    environment:</a:t>
+            </a:r>
           </a:p>
           <a:p xmlns:a="http://schemas.openxmlformats.org/drawingml/2006/main">
             <a:pPr marL="0" indent="0">
@@ -17768,9 +17700,8 @@
                 <a:ea typeface="Consolas"/>
                 <a:cs typeface="Consolas"/>
               </a:rPr>
-              <a:t># Di code api - pakai 'db' bukan IP:</a:t>
-            </a:r>
-            <a:endParaRPr sz="1100"/>
+              <a:t>      DB_HOST: db</a:t>
+            </a:r>
           </a:p>
           <a:p xmlns:a="http://schemas.openxmlformats.org/drawingml/2006/main">
             <a:pPr marL="0" indent="0">
@@ -17780,17 +17711,16 @@
               <a:buNone/>
             </a:pPr>
             <a:r>
-              <a:rPr sz="1100" b="1">
-                <a:solidFill>
-                  <a:srgbClr val="10B981"/>
-                </a:solidFill>
-                <a:latin typeface="Consolas"/>
-                <a:ea typeface="Consolas"/>
-                <a:cs typeface="Consolas"/>
-              </a:rPr>
-              <a:t>DATABASE_URL=postgresql://db:5432/mydb</a:t>
-            </a:r>
-            <a:endParaRPr sz="1100"/>
+              <a:rPr sz="1100">
+                <a:solidFill>
+                  <a:srgbClr val="94A3B8"/>
+                </a:solidFill>
+                <a:latin typeface="Consolas"/>
+                <a:ea typeface="Consolas"/>
+                <a:cs typeface="Consolas"/>
+              </a:rPr>
+              <a:t>      REDIS_URL: redis://cache:6379/0</a:t>
+            </a:r>
           </a:p>
           <a:p xmlns:a="http://schemas.openxmlformats.org/drawingml/2006/main">
             <a:pPr marL="0" indent="0">
@@ -17799,18 +17729,6 @@
               </a:spcAft>
               <a:buNone/>
             </a:pPr>
-            <a:r>
-              <a:rPr sz="1100">
-                <a:solidFill>
-                  <a:srgbClr val="10B981"/>
-                </a:solidFill>
-                <a:latin typeface="Consolas"/>
-                <a:ea typeface="Consolas"/>
-                <a:cs typeface="Consolas"/>
-              </a:rPr>
-              <a:t>                          ^^</a:t>
-            </a:r>
-            <a:endParaRPr sz="1100"/>
           </a:p>
           <a:p xmlns:a="http://schemas.openxmlformats.org/drawingml/2006/main">
             <a:pPr marL="0" indent="0">
@@ -17828,9 +17746,8 @@
                 <a:ea typeface="Consolas"/>
                 <a:cs typeface="Consolas"/>
               </a:rPr>
-              <a:t>                          service name</a:t>
-            </a:r>
-            <a:endParaRPr sz="1100"/>
+              <a:t># Jalankan di root repo Lab 06:</a:t>
+            </a:r>
           </a:p>
           <a:p xmlns:a="http://schemas.openxmlformats.org/drawingml/2006/main">
             <a:pPr marL="0" indent="0">
@@ -17839,7 +17756,17 @@
               </a:spcAft>
               <a:buNone/>
             </a:pPr>
-            <a:endParaRPr sz="1100"/>
+            <a:r>
+              <a:rPr sz="1100">
+                <a:solidFill>
+                  <a:srgbClr val="94A3B8"/>
+                </a:solidFill>
+                <a:latin typeface="Consolas"/>
+                <a:ea typeface="Consolas"/>
+                <a:cs typeface="Consolas"/>
+              </a:rPr>
+              <a:t>docker compose exec -T api \</a:t>
+            </a:r>
           </a:p>
           <a:p xmlns:a="http://schemas.openxmlformats.org/drawingml/2006/main">
             <a:pPr marL="0" indent="0">
@@ -17857,9 +17784,8 @@
                 <a:ea typeface="Consolas"/>
                 <a:cs typeface="Consolas"/>
               </a:rPr>
-              <a:t># Verify di container api:</a:t>
-            </a:r>
-            <a:endParaRPr sz="1100"/>
+              <a:t>  getent hosts db cache</a:t>
+            </a:r>
           </a:p>
           <a:p xmlns:a="http://schemas.openxmlformats.org/drawingml/2006/main">
             <a:pPr marL="0" indent="0">
@@ -17868,18 +17794,6 @@
               </a:spcAft>
               <a:buNone/>
             </a:pPr>
-            <a:r>
-              <a:rPr sz="1100">
-                <a:solidFill>
-                  <a:srgbClr val="10B981"/>
-                </a:solidFill>
-                <a:latin typeface="Consolas"/>
-                <a:ea typeface="Consolas"/>
-                <a:cs typeface="Consolas"/>
-              </a:rPr>
-              <a:t>$ docker compose exec api ping db</a:t>
-            </a:r>
-            <a:endParaRPr sz="1100"/>
           </a:p>
           <a:p xmlns:a="http://schemas.openxmlformats.org/drawingml/2006/main">
             <a:pPr marL="0" indent="0">
@@ -17891,15 +17805,14 @@
             <a:r>
               <a:rPr sz="1100">
                 <a:solidFill>
-                  <a:srgbClr val="10B981"/>
-                </a:solidFill>
-                <a:latin typeface="Consolas"/>
-                <a:ea typeface="Consolas"/>
-                <a:cs typeface="Consolas"/>
-              </a:rPr>
-              <a:t>PING db (172.18.0.2) 56(84) bytes...</a:t>
-            </a:r>
-            <a:endParaRPr sz="1100"/>
+                  <a:srgbClr val="94A3B8"/>
+                </a:solidFill>
+                <a:latin typeface="Consolas"/>
+                <a:ea typeface="Consolas"/>
+                <a:cs typeface="Consolas"/>
+              </a:rPr>
+              <a:t># Hasil: alamat untuk db dan cache.</a:t>
+            </a:r>
           </a:p>
           <a:p xmlns:a="http://schemas.openxmlformats.org/drawingml/2006/main">
             <a:pPr marL="0" indent="0">
@@ -17911,15 +17824,14 @@
             <a:r>
               <a:rPr sz="1100">
                 <a:solidFill>
-                  <a:srgbClr val="10B981"/>
-                </a:solidFill>
-                <a:latin typeface="Consolas"/>
-                <a:ea typeface="Consolas"/>
-                <a:cs typeface="Consolas"/>
-              </a:rPr>
-              <a:t>64 bytes from db.app_default: ttl=64</a:t>
-            </a:r>
-            <a:endParaRPr sz="1100"/>
+                  <a:srgbClr val="94A3B8"/>
+                </a:solidFill>
+                <a:latin typeface="Consolas"/>
+                <a:ea typeface="Consolas"/>
+                <a:cs typeface="Consolas"/>
+              </a:rPr>
+              <a:t># IP dapat berubah saat dibuat ulang.</a:t>
+            </a:r>
           </a:p>
         </p:txBody>
       </p:sp>
@@ -18128,7 +18040,7 @@
                 <a:ea typeface="Consolas"/>
                 <a:cs typeface="Consolas"/>
               </a:rPr>
-              <a:t>scale + load balancing</a:t>
+              <a:t>replica: syarat sebelum scale</a:t>
             </a:r>
             <a:endParaRPr sz="900"/>
           </a:p>
@@ -18177,7 +18089,7 @@
                 <a:ea typeface="Consolas"/>
                 <a:cs typeface="Consolas"/>
               </a:rPr>
-              <a:t># Scale 1 service jadi 3 replica</a:t>
+              <a:t># Replica adalah topik lanjutan.</a:t>
             </a:r>
             <a:endParaRPr sz="1100"/>
           </a:p>
@@ -18191,15 +18103,14 @@
             <a:r>
               <a:rPr sz="1100">
                 <a:solidFill>
-                  <a:srgbClr val="10B981"/>
-                </a:solidFill>
-                <a:latin typeface="Consolas"/>
-                <a:ea typeface="Consolas"/>
-                <a:cs typeface="Consolas"/>
-              </a:rPr>
-              <a:t>$ docker compose up -d --scale api=3</a:t>
-            </a:r>
-            <a:endParaRPr sz="1100"/>
+                  <a:srgbClr val="94A3B8"/>
+                </a:solidFill>
+                <a:latin typeface="Consolas"/>
+                <a:ea typeface="Consolas"/>
+                <a:cs typeface="Consolas"/>
+              </a:rPr>
+              <a:t># Lab 06 memakai host port tetap 8000.</a:t>
+            </a:r>
           </a:p>
           <a:p xmlns:a="http://schemas.openxmlformats.org/drawingml/2006/main">
             <a:pPr marL="0" indent="0">
@@ -18211,15 +18122,14 @@
             <a:r>
               <a:rPr sz="1100">
                 <a:solidFill>
-                  <a:srgbClr val="10B981"/>
-                </a:solidFill>
-                <a:latin typeface="Consolas"/>
-                <a:ea typeface="Consolas"/>
-                <a:cs typeface="Consolas"/>
-              </a:rPr>
-              <a:t>myapp-api-1  ... Started</a:t>
-            </a:r>
-            <a:endParaRPr sz="1100"/>
+                  <a:srgbClr val="94A3B8"/>
+                </a:solidFill>
+                <a:latin typeface="Consolas"/>
+                <a:ea typeface="Consolas"/>
+                <a:cs typeface="Consolas"/>
+              </a:rPr>
+              <a:t># Dua replica akan berebut port itu.</a:t>
+            </a:r>
           </a:p>
           <a:p xmlns:a="http://schemas.openxmlformats.org/drawingml/2006/main">
             <a:pPr marL="0" indent="0">
@@ -18228,18 +18138,6 @@
               </a:spcAft>
               <a:buNone/>
             </a:pPr>
-            <a:r>
-              <a:rPr sz="1100">
-                <a:solidFill>
-                  <a:srgbClr val="10B981"/>
-                </a:solidFill>
-                <a:latin typeface="Consolas"/>
-                <a:ea typeface="Consolas"/>
-                <a:cs typeface="Consolas"/>
-              </a:rPr>
-              <a:t>myapp-api-2  ... Started</a:t>
-            </a:r>
-            <a:endParaRPr sz="1100"/>
           </a:p>
           <a:p xmlns:a="http://schemas.openxmlformats.org/drawingml/2006/main">
             <a:pPr marL="0" indent="0">
@@ -18251,15 +18149,14 @@
             <a:r>
               <a:rPr sz="1100">
                 <a:solidFill>
-                  <a:srgbClr val="10B981"/>
-                </a:solidFill>
-                <a:latin typeface="Consolas"/>
-                <a:ea typeface="Consolas"/>
-                <a:cs typeface="Consolas"/>
-              </a:rPr>
-              <a:t>myapp-api-3  ... Started</a:t>
-            </a:r>
-            <a:endParaRPr sz="1100"/>
+                  <a:srgbClr val="94A3B8"/>
+                </a:solidFill>
+                <a:latin typeface="Consolas"/>
+                <a:ea typeface="Consolas"/>
+                <a:cs typeface="Consolas"/>
+              </a:rPr>
+              <a:t># Syarat sebelum --scale api=3:</a:t>
+            </a:r>
           </a:p>
           <a:p xmlns:a="http://schemas.openxmlformats.org/drawingml/2006/main">
             <a:pPr marL="0" indent="0">
@@ -18268,7 +18165,17 @@
               </a:spcAft>
               <a:buNone/>
             </a:pPr>
-            <a:endParaRPr sz="1100"/>
+            <a:r>
+              <a:rPr sz="1100">
+                <a:solidFill>
+                  <a:srgbClr val="94A3B8"/>
+                </a:solidFill>
+                <a:latin typeface="Consolas"/>
+                <a:ea typeface="Consolas"/>
+                <a:cs typeface="Consolas"/>
+              </a:rPr>
+              <a:t># 1. Hapus container_name.</a:t>
+            </a:r>
           </a:p>
           <a:p xmlns:a="http://schemas.openxmlformats.org/drawingml/2006/main">
             <a:pPr marL="0" indent="0">
@@ -18286,9 +18193,8 @@
                 <a:ea typeface="Consolas"/>
                 <a:cs typeface="Consolas"/>
               </a:rPr>
-              <a:t># DNS round-robin auto-load-balance:</a:t>
-            </a:r>
-            <a:endParaRPr sz="1100"/>
+              <a:t># 2. Hindari host port tetap pada API.</a:t>
+            </a:r>
           </a:p>
           <a:p xmlns:a="http://schemas.openxmlformats.org/drawingml/2006/main">
             <a:pPr marL="0" indent="0">
@@ -18300,15 +18206,14 @@
             <a:r>
               <a:rPr sz="1100">
                 <a:solidFill>
-                  <a:srgbClr val="10B981"/>
-                </a:solidFill>
-                <a:latin typeface="Consolas"/>
-                <a:ea typeface="Consolas"/>
-                <a:cs typeface="Consolas"/>
-              </a:rPr>
-              <a:t>$ docker compose exec web nslookup api</a:t>
-            </a:r>
-            <a:endParaRPr sz="1100"/>
+                  <a:srgbClr val="94A3B8"/>
+                </a:solidFill>
+                <a:latin typeface="Consolas"/>
+                <a:ea typeface="Consolas"/>
+                <a:cs typeface="Consolas"/>
+              </a:rPr>
+              <a:t># 3. Publish port pada proxy saja.</a:t>
+            </a:r>
           </a:p>
           <a:p xmlns:a="http://schemas.openxmlformats.org/drawingml/2006/main">
             <a:pPr marL="0" indent="0">
@@ -18320,15 +18225,14 @@
             <a:r>
               <a:rPr sz="1100">
                 <a:solidFill>
-                  <a:srgbClr val="E2E8F0"/>
-                </a:solidFill>
-                <a:latin typeface="Consolas"/>
-                <a:ea typeface="Consolas"/>
-                <a:cs typeface="Consolas"/>
-              </a:rPr>
-              <a:t>Name: api</a:t>
-            </a:r>
-            <a:endParaRPr sz="1100"/>
+                  <a:srgbClr val="94A3B8"/>
+                </a:solidFill>
+                <a:latin typeface="Consolas"/>
+                <a:ea typeface="Consolas"/>
+                <a:cs typeface="Consolas"/>
+              </a:rPr>
+              <a:t># 4. Konfigurasi upstream dan DNS.</a:t>
+            </a:r>
           </a:p>
           <a:p xmlns:a="http://schemas.openxmlformats.org/drawingml/2006/main">
             <a:pPr marL="0" indent="0">
@@ -18337,18 +18241,6 @@
               </a:spcAft>
               <a:buNone/>
             </a:pPr>
-            <a:r>
-              <a:rPr sz="1100">
-                <a:solidFill>
-                  <a:srgbClr val="E2E8F0"/>
-                </a:solidFill>
-                <a:latin typeface="Consolas"/>
-                <a:ea typeface="Consolas"/>
-                <a:cs typeface="Consolas"/>
-              </a:rPr>
-              <a:t>Address: 172.18.0.3</a:t>
-            </a:r>
-            <a:endParaRPr sz="1100"/>
           </a:p>
           <a:p xmlns:a="http://schemas.openxmlformats.org/drawingml/2006/main">
             <a:pPr marL="0" indent="0">
@@ -18360,15 +18252,14 @@
             <a:r>
               <a:rPr sz="1100">
                 <a:solidFill>
-                  <a:srgbClr val="E2E8F0"/>
-                </a:solidFill>
-                <a:latin typeface="Consolas"/>
-                <a:ea typeface="Consolas"/>
-                <a:cs typeface="Consolas"/>
-              </a:rPr>
-              <a:t>Address: 172.18.0.4</a:t>
-            </a:r>
-            <a:endParaRPr sz="1100"/>
+                  <a:srgbClr val="94A3B8"/>
+                </a:solidFill>
+                <a:latin typeface="Consolas"/>
+                <a:ea typeface="Consolas"/>
+                <a:cs typeface="Consolas"/>
+              </a:rPr>
+              <a:t># DNS service menemukan alamat.</a:t>
+            </a:r>
           </a:p>
           <a:p xmlns:a="http://schemas.openxmlformats.org/drawingml/2006/main">
             <a:pPr marL="0" indent="0">
@@ -18380,15 +18271,14 @@
             <a:r>
               <a:rPr sz="1100">
                 <a:solidFill>
-                  <a:srgbClr val="E2E8F0"/>
-                </a:solidFill>
-                <a:latin typeface="Consolas"/>
-                <a:ea typeface="Consolas"/>
-                <a:cs typeface="Consolas"/>
-              </a:rPr>
-              <a:t>Address: 172.18.0.5</a:t>
-            </a:r>
-            <a:endParaRPr sz="1100"/>
+                  <a:srgbClr val="94A3B8"/>
+                </a:solidFill>
+                <a:latin typeface="Consolas"/>
+                <a:ea typeface="Consolas"/>
+                <a:cs typeface="Consolas"/>
+              </a:rPr>
+              <a:t># Load balancer mengatur request.</a:t>
+            </a:r>
           </a:p>
           <a:p xmlns:a="http://schemas.openxmlformats.org/drawingml/2006/main">
             <a:pPr marL="0" indent="0">
@@ -18397,7 +18287,17 @@
               </a:spcAft>
               <a:buNone/>
             </a:pPr>
-            <a:endParaRPr sz="1100"/>
+            <a:r>
+              <a:rPr sz="1100">
+                <a:solidFill>
+                  <a:srgbClr val="94A3B8"/>
+                </a:solidFill>
+                <a:latin typeface="Consolas"/>
+                <a:ea typeface="Consolas"/>
+                <a:cs typeface="Consolas"/>
+              </a:rPr>
+              <a:t># Nginx perlu konfigurasi upstream.</a:t>
+            </a:r>
           </a:p>
           <a:p xmlns:a="http://schemas.openxmlformats.org/drawingml/2006/main">
             <a:pPr marL="0" indent="0">
@@ -18415,29 +18315,8 @@
                 <a:ea typeface="Consolas"/>
                 <a:cs typeface="Consolas"/>
               </a:rPr>
-              <a:t># Nginx auto-distribute request</a:t>
-            </a:r>
-            <a:endParaRPr sz="1100"/>
-          </a:p>
-          <a:p xmlns:a="http://schemas.openxmlformats.org/drawingml/2006/main">
-            <a:pPr marL="0" indent="0">
-              <a:spcAft>
-                <a:spcPts val="200"/>
-              </a:spcAft>
-              <a:buNone/>
-            </a:pPr>
-            <a:r>
-              <a:rPr sz="1100">
-                <a:solidFill>
-                  <a:srgbClr val="94A3B8"/>
-                </a:solidFill>
-                <a:latin typeface="Consolas"/>
-                <a:ea typeface="Consolas"/>
-                <a:cs typeface="Consolas"/>
-              </a:rPr>
-              <a:t># ke 3 api instance</a:t>
-            </a:r>
-            <a:endParaRPr sz="1100"/>
+              <a:t># Jangan copy --scale ke lab saat ini.</a:t>
+            </a:r>
           </a:p>
         </p:txBody>
       </p:sp>
@@ -18597,14 +18476,20 @@
       </p:sp>
       <p:pic>
         <p:nvPicPr>
-          <p:cNvPr id="36" name="Image 0"/>
+          <p:cNvPr id="36" name="Image 0">
+            <a:extLst xmlns:a="http://schemas.openxmlformats.org/drawingml/2006/main">
+              <a:ext uri="{FF2B5EF4-FFF2-40B4-BE49-F238E27FC236}">
+                <a16:creationId xmlns:a16="http://schemas.microsoft.com/office/drawing/2014/main" id="{3AA58387-EB6A-46BF-94CD-5C52CC495E6F}"/>
+              </a:ext>
+            </a:extLst>
+          </p:cNvPr>
           <p:cNvPicPr>
             <a:picLocks xmlns:a="http://schemas.openxmlformats.org/drawingml/2006/main" noChangeAspect="1"/>
           </p:cNvPicPr>
           <p:nvPr/>
         </p:nvPicPr>
         <p:blipFill>
-          <a:blip xmlns:r="http://schemas.openxmlformats.org/officeDocument/2006/relationships" xmlns:a="http://schemas.openxmlformats.org/drawingml/2006/main" r:embed="Rbda592902f5c49a8"/>
+          <a:blip xmlns:r="http://schemas.openxmlformats.org/officeDocument/2006/relationships" xmlns:a="http://schemas.openxmlformats.org/drawingml/2006/main" r:embed="R370af1749ae340d4"/>
           <a:stretch xmlns:a="http://schemas.openxmlformats.org/drawingml/2006/main">
             <a:fillRect l="0" t="0" r="0" b="0"/>
           </a:stretch>
@@ -18621,14 +18506,20 @@
       </p:pic>
       <p:pic>
         <p:nvPicPr>
-          <p:cNvPr id="37" name="Image 1"/>
+          <p:cNvPr id="37" name="Image 1">
+            <a:extLst xmlns:a="http://schemas.openxmlformats.org/drawingml/2006/main">
+              <a:ext uri="{FF2B5EF4-FFF2-40B4-BE49-F238E27FC236}">
+                <a16:creationId xmlns:a16="http://schemas.microsoft.com/office/drawing/2014/main" id="{428452EF-1E39-48A5-B0C5-494A7EBDF75D}"/>
+              </a:ext>
+            </a:extLst>
+          </p:cNvPr>
           <p:cNvPicPr>
             <a:picLocks xmlns:a="http://schemas.openxmlformats.org/drawingml/2006/main" noChangeAspect="1"/>
           </p:cNvPicPr>
           <p:nvPr/>
         </p:nvPicPr>
         <p:blipFill>
-          <a:blip xmlns:r="http://schemas.openxmlformats.org/officeDocument/2006/relationships" xmlns:a="http://schemas.openxmlformats.org/drawingml/2006/main" r:embed="R4719a554e5a64c31"/>
+          <a:blip xmlns:r="http://schemas.openxmlformats.org/officeDocument/2006/relationships" xmlns:a="http://schemas.openxmlformats.org/drawingml/2006/main" r:embed="R806d8d1a1c96407c"/>
           <a:stretch xmlns:a="http://schemas.openxmlformats.org/drawingml/2006/main">
             <a:fillRect l="0" t="0" r="0" b="0"/>
           </a:stretch>
@@ -18881,14 +18772,20 @@
       </p:sp>
       <p:pic>
         <p:nvPicPr>
-          <p:cNvPr id="43" name="Image 2"/>
+          <p:cNvPr id="43" name="Image 2">
+            <a:extLst xmlns:a="http://schemas.openxmlformats.org/drawingml/2006/main">
+              <a:ext uri="{FF2B5EF4-FFF2-40B4-BE49-F238E27FC236}">
+                <a16:creationId xmlns:a16="http://schemas.microsoft.com/office/drawing/2014/main" id="{C3F82C41-F0E4-4370-8312-F2F7B869112D}"/>
+              </a:ext>
+            </a:extLst>
+          </p:cNvPr>
           <p:cNvPicPr>
             <a:picLocks xmlns:a="http://schemas.openxmlformats.org/drawingml/2006/main" noChangeAspect="1"/>
           </p:cNvPicPr>
           <p:nvPr/>
         </p:nvPicPr>
         <p:blipFill>
-          <a:blip xmlns:r="http://schemas.openxmlformats.org/officeDocument/2006/relationships" xmlns:a="http://schemas.openxmlformats.org/drawingml/2006/main" r:embed="R0a77127c832b440d"/>
+          <a:blip xmlns:r="http://schemas.openxmlformats.org/officeDocument/2006/relationships" xmlns:a="http://schemas.openxmlformats.org/drawingml/2006/main" r:embed="Rd8fd92e6cd51445c"/>
           <a:stretch xmlns:a="http://schemas.openxmlformats.org/drawingml/2006/main">
             <a:fillRect l="0" t="0" r="0" b="0"/>
           </a:stretch>
@@ -18951,14 +18848,20 @@
       </p:sp>
       <p:pic>
         <p:nvPicPr>
-          <p:cNvPr id="45" name="Image 3"/>
+          <p:cNvPr id="45" name="Image 3">
+            <a:extLst xmlns:a="http://schemas.openxmlformats.org/drawingml/2006/main">
+              <a:ext uri="{FF2B5EF4-FFF2-40B4-BE49-F238E27FC236}">
+                <a16:creationId xmlns:a16="http://schemas.microsoft.com/office/drawing/2014/main" id="{CBA03A6C-82CC-4F77-882F-A460D7BF7210}"/>
+              </a:ext>
+            </a:extLst>
+          </p:cNvPr>
           <p:cNvPicPr>
             <a:picLocks xmlns:a="http://schemas.openxmlformats.org/drawingml/2006/main" noChangeAspect="1"/>
           </p:cNvPicPr>
           <p:nvPr/>
         </p:nvPicPr>
         <p:blipFill>
-          <a:blip xmlns:r="http://schemas.openxmlformats.org/officeDocument/2006/relationships" xmlns:a="http://schemas.openxmlformats.org/drawingml/2006/main" r:embed="Rf8ac08be739445b6"/>
+          <a:blip xmlns:r="http://schemas.openxmlformats.org/officeDocument/2006/relationships" xmlns:a="http://schemas.openxmlformats.org/drawingml/2006/main" r:embed="R7fd3e590e9424b47"/>
           <a:stretch xmlns:a="http://schemas.openxmlformats.org/drawingml/2006/main">
             <a:fillRect l="0" t="0" r="0" b="0"/>
           </a:stretch>
@@ -19021,14 +18924,20 @@
       </p:sp>
       <p:pic>
         <p:nvPicPr>
-          <p:cNvPr id="47" name="Image 4"/>
+          <p:cNvPr id="47" name="Image 4">
+            <a:extLst xmlns:a="http://schemas.openxmlformats.org/drawingml/2006/main">
+              <a:ext uri="{FF2B5EF4-FFF2-40B4-BE49-F238E27FC236}">
+                <a16:creationId xmlns:a16="http://schemas.microsoft.com/office/drawing/2014/main" id="{CD73F00C-76C3-4DC3-967A-99F38D1B99AE}"/>
+              </a:ext>
+            </a:extLst>
+          </p:cNvPr>
           <p:cNvPicPr>
             <a:picLocks xmlns:a="http://schemas.openxmlformats.org/drawingml/2006/main" noChangeAspect="1"/>
           </p:cNvPicPr>
           <p:nvPr/>
         </p:nvPicPr>
         <p:blipFill>
-          <a:blip xmlns:r="http://schemas.openxmlformats.org/officeDocument/2006/relationships" xmlns:a="http://schemas.openxmlformats.org/drawingml/2006/main" r:embed="Rcfcfd462e9b74b1d"/>
+          <a:blip xmlns:r="http://schemas.openxmlformats.org/officeDocument/2006/relationships" xmlns:a="http://schemas.openxmlformats.org/drawingml/2006/main" r:embed="R0513111419f948e3"/>
           <a:stretch xmlns:a="http://schemas.openxmlformats.org/drawingml/2006/main">
             <a:fillRect l="0" t="0" r="0" b="0"/>
           </a:stretch>
@@ -19091,14 +19000,20 @@
       </p:sp>
       <p:pic>
         <p:nvPicPr>
-          <p:cNvPr id="49" name="Image 5"/>
+          <p:cNvPr id="49" name="Image 5">
+            <a:extLst xmlns:a="http://schemas.openxmlformats.org/drawingml/2006/main">
+              <a:ext uri="{FF2B5EF4-FFF2-40B4-BE49-F238E27FC236}">
+                <a16:creationId xmlns:a16="http://schemas.microsoft.com/office/drawing/2014/main" id="{A31ADBF2-A443-401D-BEB6-8B1B89959958}"/>
+              </a:ext>
+            </a:extLst>
+          </p:cNvPr>
           <p:cNvPicPr>
             <a:picLocks xmlns:a="http://schemas.openxmlformats.org/drawingml/2006/main" noChangeAspect="1"/>
           </p:cNvPicPr>
           <p:nvPr/>
         </p:nvPicPr>
         <p:blipFill>
-          <a:blip xmlns:r="http://schemas.openxmlformats.org/officeDocument/2006/relationships" xmlns:a="http://schemas.openxmlformats.org/drawingml/2006/main" r:embed="R85f72471a91f43da"/>
+          <a:blip xmlns:r="http://schemas.openxmlformats.org/officeDocument/2006/relationships" xmlns:a="http://schemas.openxmlformats.org/drawingml/2006/main" r:embed="R3ee4120429bc48d1"/>
           <a:stretch xmlns:a="http://schemas.openxmlformats.org/drawingml/2006/main">
             <a:fillRect l="0" t="0" r="0" b="0"/>
           </a:stretch>
@@ -19153,7 +19068,7 @@
                 <a:ea typeface="Calibri"/>
                 <a:cs typeface="Calibri"/>
               </a:rPr>
-              <a:t>Multi-stage build + alpine = image 150 MB</a:t>
+              <a:t>Multi-stage: ukur ukuran image hasil build</a:t>
             </a:r>
             <a:endParaRPr sz="1200"/>
           </a:p>
@@ -19161,14 +19076,20 @@
       </p:sp>
       <p:pic>
         <p:nvPicPr>
-          <p:cNvPr id="51" name="Image 6"/>
+          <p:cNvPr id="51" name="Image 6">
+            <a:extLst xmlns:a="http://schemas.openxmlformats.org/drawingml/2006/main">
+              <a:ext uri="{FF2B5EF4-FFF2-40B4-BE49-F238E27FC236}">
+                <a16:creationId xmlns:a16="http://schemas.microsoft.com/office/drawing/2014/main" id="{F1A2C80B-8696-4164-99B2-9ACA4558800E}"/>
+              </a:ext>
+            </a:extLst>
+          </p:cNvPr>
           <p:cNvPicPr>
             <a:picLocks xmlns:a="http://schemas.openxmlformats.org/drawingml/2006/main" noChangeAspect="1"/>
           </p:cNvPicPr>
           <p:nvPr/>
         </p:nvPicPr>
         <p:blipFill>
-          <a:blip xmlns:r="http://schemas.openxmlformats.org/officeDocument/2006/relationships" xmlns:a="http://schemas.openxmlformats.org/drawingml/2006/main" r:embed="R32f6f06974534cc7"/>
+          <a:blip xmlns:r="http://schemas.openxmlformats.org/officeDocument/2006/relationships" xmlns:a="http://schemas.openxmlformats.org/drawingml/2006/main" r:embed="R836597d77b9f4434"/>
           <a:stretch xmlns:a="http://schemas.openxmlformats.org/drawingml/2006/main">
             <a:fillRect l="0" t="0" r="0" b="0"/>
           </a:stretch>
@@ -19693,14 +19614,20 @@
       </p:sp>
       <p:pic>
         <p:nvPicPr>
-          <p:cNvPr id="45" name="Image 0"/>
+          <p:cNvPr id="45" name="Image 0">
+            <a:extLst xmlns:a="http://schemas.openxmlformats.org/drawingml/2006/main">
+              <a:ext uri="{FF2B5EF4-FFF2-40B4-BE49-F238E27FC236}">
+                <a16:creationId xmlns:a16="http://schemas.microsoft.com/office/drawing/2014/main" id="{0E2EE811-44E7-4432-95B4-C3392BB8CC5C}"/>
+              </a:ext>
+            </a:extLst>
+          </p:cNvPr>
           <p:cNvPicPr>
             <a:picLocks xmlns:a="http://schemas.openxmlformats.org/drawingml/2006/main" noChangeAspect="1"/>
           </p:cNvPicPr>
           <p:nvPr/>
         </p:nvPicPr>
         <p:blipFill>
-          <a:blip xmlns:r="http://schemas.openxmlformats.org/officeDocument/2006/relationships" xmlns:a="http://schemas.openxmlformats.org/drawingml/2006/main" r:embed="Rc875593dbe4e46a5"/>
+          <a:blip xmlns:r="http://schemas.openxmlformats.org/officeDocument/2006/relationships" xmlns:a="http://schemas.openxmlformats.org/drawingml/2006/main" r:embed="R83a81cdbc9e5418c"/>
           <a:stretch xmlns:a="http://schemas.openxmlformats.org/drawingml/2006/main">
             <a:fillRect l="0" t="0" r="0" b="0"/>
           </a:stretch>
@@ -19717,14 +19644,20 @@
       </p:pic>
       <p:pic>
         <p:nvPicPr>
-          <p:cNvPr id="46" name="Image 1"/>
+          <p:cNvPr id="46" name="Image 1">
+            <a:extLst xmlns:a="http://schemas.openxmlformats.org/drawingml/2006/main">
+              <a:ext uri="{FF2B5EF4-FFF2-40B4-BE49-F238E27FC236}">
+                <a16:creationId xmlns:a16="http://schemas.microsoft.com/office/drawing/2014/main" id="{7A8EAC65-F509-466D-BB70-62263C4697E1}"/>
+              </a:ext>
+            </a:extLst>
+          </p:cNvPr>
           <p:cNvPicPr>
             <a:picLocks xmlns:a="http://schemas.openxmlformats.org/drawingml/2006/main" noChangeAspect="1"/>
           </p:cNvPicPr>
           <p:nvPr/>
         </p:nvPicPr>
         <p:blipFill>
-          <a:blip xmlns:r="http://schemas.openxmlformats.org/officeDocument/2006/relationships" xmlns:a="http://schemas.openxmlformats.org/drawingml/2006/main" r:embed="R4709e7529f504fda"/>
+          <a:blip xmlns:r="http://schemas.openxmlformats.org/officeDocument/2006/relationships" xmlns:a="http://schemas.openxmlformats.org/drawingml/2006/main" r:embed="R719499f36f5246e9"/>
           <a:stretch xmlns:a="http://schemas.openxmlformats.org/drawingml/2006/main">
             <a:fillRect l="0" t="0" r="0" b="0"/>
           </a:stretch>
@@ -21340,14 +21273,20 @@
       </p:sp>
       <p:pic>
         <p:nvPicPr>
-          <p:cNvPr id="37" name="Image 0"/>
+          <p:cNvPr id="37" name="Image 0">
+            <a:extLst xmlns:a="http://schemas.openxmlformats.org/drawingml/2006/main">
+              <a:ext uri="{FF2B5EF4-FFF2-40B4-BE49-F238E27FC236}">
+                <a16:creationId xmlns:a16="http://schemas.microsoft.com/office/drawing/2014/main" id="{25D84E7D-01BB-46CF-B5FD-7C18658A74F0}"/>
+              </a:ext>
+            </a:extLst>
+          </p:cNvPr>
           <p:cNvPicPr>
             <a:picLocks xmlns:a="http://schemas.openxmlformats.org/drawingml/2006/main" noChangeAspect="1"/>
           </p:cNvPicPr>
           <p:nvPr/>
         </p:nvPicPr>
         <p:blipFill>
-          <a:blip xmlns:r="http://schemas.openxmlformats.org/officeDocument/2006/relationships" xmlns:a="http://schemas.openxmlformats.org/drawingml/2006/main" r:embed="Rbb7cf3f9c94e4236"/>
+          <a:blip xmlns:r="http://schemas.openxmlformats.org/officeDocument/2006/relationships" xmlns:a="http://schemas.openxmlformats.org/drawingml/2006/main" r:embed="R59101b979c3e4765"/>
           <a:stretch xmlns:a="http://schemas.openxmlformats.org/drawingml/2006/main">
             <a:fillRect l="0" t="0" r="0" b="0"/>
           </a:stretch>
@@ -21364,14 +21303,20 @@
       </p:pic>
       <p:pic>
         <p:nvPicPr>
-          <p:cNvPr id="38" name="Image 1"/>
+          <p:cNvPr id="38" name="Image 1">
+            <a:extLst xmlns:a="http://schemas.openxmlformats.org/drawingml/2006/main">
+              <a:ext uri="{FF2B5EF4-FFF2-40B4-BE49-F238E27FC236}">
+                <a16:creationId xmlns:a16="http://schemas.microsoft.com/office/drawing/2014/main" id="{5B4BBB0F-16C0-4D1D-A534-3F9F9E72431F}"/>
+              </a:ext>
+            </a:extLst>
+          </p:cNvPr>
           <p:cNvPicPr>
             <a:picLocks xmlns:a="http://schemas.openxmlformats.org/drawingml/2006/main" noChangeAspect="1"/>
           </p:cNvPicPr>
           <p:nvPr/>
         </p:nvPicPr>
         <p:blipFill>
-          <a:blip xmlns:r="http://schemas.openxmlformats.org/officeDocument/2006/relationships" xmlns:a="http://schemas.openxmlformats.org/drawingml/2006/main" r:embed="R61799fc43f284914"/>
+          <a:blip xmlns:r="http://schemas.openxmlformats.org/officeDocument/2006/relationships" xmlns:a="http://schemas.openxmlformats.org/drawingml/2006/main" r:embed="Rd515492ed8a44867"/>
           <a:stretch xmlns:a="http://schemas.openxmlformats.org/drawingml/2006/main">
             <a:fillRect l="0" t="0" r="0" b="0"/>
           </a:stretch>
@@ -23133,14 +23078,20 @@
       </p:sp>
       <p:pic>
         <p:nvPicPr>
-          <p:cNvPr id="24" name="Image 0"/>
+          <p:cNvPr id="24" name="Image 0">
+            <a:extLst xmlns:a="http://schemas.openxmlformats.org/drawingml/2006/main">
+              <a:ext uri="{FF2B5EF4-FFF2-40B4-BE49-F238E27FC236}">
+                <a16:creationId xmlns:a16="http://schemas.microsoft.com/office/drawing/2014/main" id="{3F15BE97-52F6-4575-AA43-D001F4A150B6}"/>
+              </a:ext>
+            </a:extLst>
+          </p:cNvPr>
           <p:cNvPicPr>
             <a:picLocks xmlns:a="http://schemas.openxmlformats.org/drawingml/2006/main" noChangeAspect="1"/>
           </p:cNvPicPr>
           <p:nvPr/>
         </p:nvPicPr>
         <p:blipFill>
-          <a:blip xmlns:r="http://schemas.openxmlformats.org/officeDocument/2006/relationships" xmlns:a="http://schemas.openxmlformats.org/drawingml/2006/main" r:embed="R17b7897936424f55"/>
+          <a:blip xmlns:r="http://schemas.openxmlformats.org/officeDocument/2006/relationships" xmlns:a="http://schemas.openxmlformats.org/drawingml/2006/main" r:embed="Rba1b1785828a450b"/>
           <a:stretch xmlns:a="http://schemas.openxmlformats.org/drawingml/2006/main">
             <a:fillRect l="0" t="0" r="0" b="0"/>
           </a:stretch>
@@ -23157,14 +23108,20 @@
       </p:pic>
       <p:pic>
         <p:nvPicPr>
-          <p:cNvPr id="25" name="Image 1"/>
+          <p:cNvPr id="25" name="Image 1">
+            <a:extLst xmlns:a="http://schemas.openxmlformats.org/drawingml/2006/main">
+              <a:ext uri="{FF2B5EF4-FFF2-40B4-BE49-F238E27FC236}">
+                <a16:creationId xmlns:a16="http://schemas.microsoft.com/office/drawing/2014/main" id="{8A7D9BB9-166A-47EC-8323-68BA2A2E86B7}"/>
+              </a:ext>
+            </a:extLst>
+          </p:cNvPr>
           <p:cNvPicPr>
             <a:picLocks xmlns:a="http://schemas.openxmlformats.org/drawingml/2006/main" noChangeAspect="1"/>
           </p:cNvPicPr>
           <p:nvPr/>
         </p:nvPicPr>
         <p:blipFill>
-          <a:blip xmlns:r="http://schemas.openxmlformats.org/officeDocument/2006/relationships" xmlns:a="http://schemas.openxmlformats.org/drawingml/2006/main" r:embed="Reda10a9a8d7f4a22"/>
+          <a:blip xmlns:r="http://schemas.openxmlformats.org/officeDocument/2006/relationships" xmlns:a="http://schemas.openxmlformats.org/drawingml/2006/main" r:embed="R08eddf8f52584291"/>
           <a:stretch xmlns:a="http://schemas.openxmlformats.org/drawingml/2006/main">
             <a:fillRect l="0" t="0" r="0" b="0"/>
           </a:stretch>
@@ -23523,14 +23480,20 @@
       </p:sp>
       <p:pic>
         <p:nvPicPr>
-          <p:cNvPr id="42" name="Image 0"/>
+          <p:cNvPr id="42" name="Image 0">
+            <a:extLst xmlns:a="http://schemas.openxmlformats.org/drawingml/2006/main">
+              <a:ext uri="{FF2B5EF4-FFF2-40B4-BE49-F238E27FC236}">
+                <a16:creationId xmlns:a16="http://schemas.microsoft.com/office/drawing/2014/main" id="{22BA2244-2DD6-4E07-8F2D-EF750719C48B}"/>
+              </a:ext>
+            </a:extLst>
+          </p:cNvPr>
           <p:cNvPicPr>
             <a:picLocks xmlns:a="http://schemas.openxmlformats.org/drawingml/2006/main" noChangeAspect="1"/>
           </p:cNvPicPr>
           <p:nvPr/>
         </p:nvPicPr>
         <p:blipFill>
-          <a:blip xmlns:r="http://schemas.openxmlformats.org/officeDocument/2006/relationships" xmlns:a="http://schemas.openxmlformats.org/drawingml/2006/main" r:embed="R45f4903eb0fb47c1"/>
+          <a:blip xmlns:r="http://schemas.openxmlformats.org/officeDocument/2006/relationships" xmlns:a="http://schemas.openxmlformats.org/drawingml/2006/main" r:embed="R95661b1547ca4279"/>
           <a:stretch xmlns:a="http://schemas.openxmlformats.org/drawingml/2006/main">
             <a:fillRect l="0" t="0" r="0" b="0"/>
           </a:stretch>
@@ -23547,14 +23510,20 @@
       </p:pic>
       <p:pic>
         <p:nvPicPr>
-          <p:cNvPr id="43" name="Image 1"/>
+          <p:cNvPr id="43" name="Image 1">
+            <a:extLst xmlns:a="http://schemas.openxmlformats.org/drawingml/2006/main">
+              <a:ext uri="{FF2B5EF4-FFF2-40B4-BE49-F238E27FC236}">
+                <a16:creationId xmlns:a16="http://schemas.microsoft.com/office/drawing/2014/main" id="{4481D855-56EA-4E3E-AD50-AE1BCB471F9E}"/>
+              </a:ext>
+            </a:extLst>
+          </p:cNvPr>
           <p:cNvPicPr>
             <a:picLocks xmlns:a="http://schemas.openxmlformats.org/drawingml/2006/main" noChangeAspect="1"/>
           </p:cNvPicPr>
           <p:nvPr/>
         </p:nvPicPr>
         <p:blipFill>
-          <a:blip xmlns:r="http://schemas.openxmlformats.org/officeDocument/2006/relationships" xmlns:a="http://schemas.openxmlformats.org/drawingml/2006/main" r:embed="Rcb2f9376c83c4d69"/>
+          <a:blip xmlns:r="http://schemas.openxmlformats.org/officeDocument/2006/relationships" xmlns:a="http://schemas.openxmlformats.org/drawingml/2006/main" r:embed="Rd5658cc7653447af"/>
           <a:stretch xmlns:a="http://schemas.openxmlformats.org/drawingml/2006/main">
             <a:fillRect l="0" t="0" r="0" b="0"/>
           </a:stretch>
@@ -23773,14 +23742,20 @@
       </p:sp>
       <p:pic>
         <p:nvPicPr>
-          <p:cNvPr id="49" name="Image 2"/>
+          <p:cNvPr id="49" name="Image 2">
+            <a:extLst xmlns:a="http://schemas.openxmlformats.org/drawingml/2006/main">
+              <a:ext uri="{FF2B5EF4-FFF2-40B4-BE49-F238E27FC236}">
+                <a16:creationId xmlns:a16="http://schemas.microsoft.com/office/drawing/2014/main" id="{273183AA-9A94-464A-AC9C-9D34703ED97C}"/>
+              </a:ext>
+            </a:extLst>
+          </p:cNvPr>
           <p:cNvPicPr>
             <a:picLocks xmlns:a="http://schemas.openxmlformats.org/drawingml/2006/main" noChangeAspect="1"/>
           </p:cNvPicPr>
           <p:nvPr/>
         </p:nvPicPr>
         <p:blipFill>
-          <a:blip xmlns:r="http://schemas.openxmlformats.org/officeDocument/2006/relationships" xmlns:a="http://schemas.openxmlformats.org/drawingml/2006/main" r:embed="Rc292f6611ffd403e"/>
+          <a:blip xmlns:r="http://schemas.openxmlformats.org/officeDocument/2006/relationships" xmlns:a="http://schemas.openxmlformats.org/drawingml/2006/main" r:embed="Rf2cb171445f2443b"/>
           <a:stretch xmlns:a="http://schemas.openxmlformats.org/drawingml/2006/main">
             <a:fillRect l="0" t="0" r="0" b="0"/>
           </a:stretch>
@@ -23843,14 +23818,20 @@
       </p:sp>
       <p:pic>
         <p:nvPicPr>
-          <p:cNvPr id="51" name="Image 3"/>
+          <p:cNvPr id="51" name="Image 3">
+            <a:extLst xmlns:a="http://schemas.openxmlformats.org/drawingml/2006/main">
+              <a:ext uri="{FF2B5EF4-FFF2-40B4-BE49-F238E27FC236}">
+                <a16:creationId xmlns:a16="http://schemas.microsoft.com/office/drawing/2014/main" id="{8842F7F4-33BE-478A-AD19-DFD566FC5F21}"/>
+              </a:ext>
+            </a:extLst>
+          </p:cNvPr>
           <p:cNvPicPr>
             <a:picLocks xmlns:a="http://schemas.openxmlformats.org/drawingml/2006/main" noChangeAspect="1"/>
           </p:cNvPicPr>
           <p:nvPr/>
         </p:nvPicPr>
         <p:blipFill>
-          <a:blip xmlns:r="http://schemas.openxmlformats.org/officeDocument/2006/relationships" xmlns:a="http://schemas.openxmlformats.org/drawingml/2006/main" r:embed="Rc292f6611ffd403e"/>
+          <a:blip xmlns:r="http://schemas.openxmlformats.org/officeDocument/2006/relationships" xmlns:a="http://schemas.openxmlformats.org/drawingml/2006/main" r:embed="Rf2cb171445f2443b"/>
           <a:stretch xmlns:a="http://schemas.openxmlformats.org/drawingml/2006/main">
             <a:fillRect l="0" t="0" r="0" b="0"/>
           </a:stretch>
@@ -23913,14 +23894,20 @@
       </p:sp>
       <p:pic>
         <p:nvPicPr>
-          <p:cNvPr id="53" name="Image 4"/>
+          <p:cNvPr id="53" name="Image 4">
+            <a:extLst xmlns:a="http://schemas.openxmlformats.org/drawingml/2006/main">
+              <a:ext uri="{FF2B5EF4-FFF2-40B4-BE49-F238E27FC236}">
+                <a16:creationId xmlns:a16="http://schemas.microsoft.com/office/drawing/2014/main" id="{D651C06C-445E-4BDF-A55D-3BD6D3C527B7}"/>
+              </a:ext>
+            </a:extLst>
+          </p:cNvPr>
           <p:cNvPicPr>
             <a:picLocks xmlns:a="http://schemas.openxmlformats.org/drawingml/2006/main" noChangeAspect="1"/>
           </p:cNvPicPr>
           <p:nvPr/>
         </p:nvPicPr>
         <p:blipFill>
-          <a:blip xmlns:r="http://schemas.openxmlformats.org/officeDocument/2006/relationships" xmlns:a="http://schemas.openxmlformats.org/drawingml/2006/main" r:embed="Rc292f6611ffd403e"/>
+          <a:blip xmlns:r="http://schemas.openxmlformats.org/officeDocument/2006/relationships" xmlns:a="http://schemas.openxmlformats.org/drawingml/2006/main" r:embed="Rf2cb171445f2443b"/>
           <a:stretch xmlns:a="http://schemas.openxmlformats.org/drawingml/2006/main">
             <a:fillRect l="0" t="0" r="0" b="0"/>
           </a:stretch>
@@ -23983,14 +23970,20 @@
       </p:sp>
       <p:pic>
         <p:nvPicPr>
-          <p:cNvPr id="55" name="Image 5"/>
+          <p:cNvPr id="55" name="Image 5">
+            <a:extLst xmlns:a="http://schemas.openxmlformats.org/drawingml/2006/main">
+              <a:ext uri="{FF2B5EF4-FFF2-40B4-BE49-F238E27FC236}">
+                <a16:creationId xmlns:a16="http://schemas.microsoft.com/office/drawing/2014/main" id="{A17843F2-07DD-4FF9-B618-208F8594CED0}"/>
+              </a:ext>
+            </a:extLst>
+          </p:cNvPr>
           <p:cNvPicPr>
             <a:picLocks xmlns:a="http://schemas.openxmlformats.org/drawingml/2006/main" noChangeAspect="1"/>
           </p:cNvPicPr>
           <p:nvPr/>
         </p:nvPicPr>
         <p:blipFill>
-          <a:blip xmlns:r="http://schemas.openxmlformats.org/officeDocument/2006/relationships" xmlns:a="http://schemas.openxmlformats.org/drawingml/2006/main" r:embed="Rc292f6611ffd403e"/>
+          <a:blip xmlns:r="http://schemas.openxmlformats.org/officeDocument/2006/relationships" xmlns:a="http://schemas.openxmlformats.org/drawingml/2006/main" r:embed="Rf2cb171445f2443b"/>
           <a:stretch xmlns:a="http://schemas.openxmlformats.org/drawingml/2006/main">
             <a:fillRect l="0" t="0" r="0" b="0"/>
           </a:stretch>
@@ -24053,14 +24046,20 @@
       </p:sp>
       <p:pic>
         <p:nvPicPr>
-          <p:cNvPr id="57" name="Image 6"/>
+          <p:cNvPr id="57" name="Image 6">
+            <a:extLst xmlns:a="http://schemas.openxmlformats.org/drawingml/2006/main">
+              <a:ext uri="{FF2B5EF4-FFF2-40B4-BE49-F238E27FC236}">
+                <a16:creationId xmlns:a16="http://schemas.microsoft.com/office/drawing/2014/main" id="{55F8C4F1-9951-4927-BC83-758E73FB5773}"/>
+              </a:ext>
+            </a:extLst>
+          </p:cNvPr>
           <p:cNvPicPr>
             <a:picLocks xmlns:a="http://schemas.openxmlformats.org/drawingml/2006/main" noChangeAspect="1"/>
           </p:cNvPicPr>
           <p:nvPr/>
         </p:nvPicPr>
         <p:blipFill>
-          <a:blip xmlns:r="http://schemas.openxmlformats.org/officeDocument/2006/relationships" xmlns:a="http://schemas.openxmlformats.org/drawingml/2006/main" r:embed="Rffbda30d63d94bf0"/>
+          <a:blip xmlns:r="http://schemas.openxmlformats.org/officeDocument/2006/relationships" xmlns:a="http://schemas.openxmlformats.org/drawingml/2006/main" r:embed="Rcba6d6009e8b412f"/>
           <a:stretch xmlns:a="http://schemas.openxmlformats.org/drawingml/2006/main">
             <a:fillRect l="0" t="0" r="0" b="0"/>
           </a:stretch>
@@ -24123,14 +24122,20 @@
       </p:sp>
       <p:pic>
         <p:nvPicPr>
-          <p:cNvPr id="59" name="Image 7"/>
+          <p:cNvPr id="59" name="Image 7">
+            <a:extLst xmlns:a="http://schemas.openxmlformats.org/drawingml/2006/main">
+              <a:ext uri="{FF2B5EF4-FFF2-40B4-BE49-F238E27FC236}">
+                <a16:creationId xmlns:a16="http://schemas.microsoft.com/office/drawing/2014/main" id="{153CE28D-40B3-4A36-B37F-63079C3746FC}"/>
+              </a:ext>
+            </a:extLst>
+          </p:cNvPr>
           <p:cNvPicPr>
             <a:picLocks xmlns:a="http://schemas.openxmlformats.org/drawingml/2006/main" noChangeAspect="1"/>
           </p:cNvPicPr>
           <p:nvPr/>
         </p:nvPicPr>
         <p:blipFill>
-          <a:blip xmlns:r="http://schemas.openxmlformats.org/officeDocument/2006/relationships" xmlns:a="http://schemas.openxmlformats.org/drawingml/2006/main" r:embed="Rffbda30d63d94bf0"/>
+          <a:blip xmlns:r="http://schemas.openxmlformats.org/officeDocument/2006/relationships" xmlns:a="http://schemas.openxmlformats.org/drawingml/2006/main" r:embed="Rcba6d6009e8b412f"/>
           <a:stretch xmlns:a="http://schemas.openxmlformats.org/drawingml/2006/main">
             <a:fillRect l="0" t="0" r="0" b="0"/>
           </a:stretch>
@@ -24965,14 +24970,20 @@
       </p:sp>
       <p:pic>
         <p:nvPicPr>
-          <p:cNvPr id="31" name="Image 0"/>
+          <p:cNvPr id="31" name="Image 0">
+            <a:extLst xmlns:a="http://schemas.openxmlformats.org/drawingml/2006/main">
+              <a:ext uri="{FF2B5EF4-FFF2-40B4-BE49-F238E27FC236}">
+                <a16:creationId xmlns:a16="http://schemas.microsoft.com/office/drawing/2014/main" id="{819718D9-0EA5-4FAC-951A-0F070C5604D3}"/>
+              </a:ext>
+            </a:extLst>
+          </p:cNvPr>
           <p:cNvPicPr>
             <a:picLocks xmlns:a="http://schemas.openxmlformats.org/drawingml/2006/main" noChangeAspect="1"/>
           </p:cNvPicPr>
           <p:nvPr/>
         </p:nvPicPr>
         <p:blipFill>
-          <a:blip xmlns:r="http://schemas.openxmlformats.org/officeDocument/2006/relationships" xmlns:a="http://schemas.openxmlformats.org/drawingml/2006/main" r:embed="R1e1643273e7c4929"/>
+          <a:blip xmlns:r="http://schemas.openxmlformats.org/officeDocument/2006/relationships" xmlns:a="http://schemas.openxmlformats.org/drawingml/2006/main" r:embed="Ra96d34f8e8254417"/>
           <a:stretch xmlns:a="http://schemas.openxmlformats.org/drawingml/2006/main">
             <a:fillRect l="0" t="0" r="0" b="0"/>
           </a:stretch>
@@ -24989,14 +25000,20 @@
       </p:pic>
       <p:pic>
         <p:nvPicPr>
-          <p:cNvPr id="32" name="Image 1"/>
+          <p:cNvPr id="32" name="Image 1">
+            <a:extLst xmlns:a="http://schemas.openxmlformats.org/drawingml/2006/main">
+              <a:ext uri="{FF2B5EF4-FFF2-40B4-BE49-F238E27FC236}">
+                <a16:creationId xmlns:a16="http://schemas.microsoft.com/office/drawing/2014/main" id="{97B8F285-BB56-4D9E-AA15-1FB59A0E5E08}"/>
+              </a:ext>
+            </a:extLst>
+          </p:cNvPr>
           <p:cNvPicPr>
             <a:picLocks xmlns:a="http://schemas.openxmlformats.org/drawingml/2006/main" noChangeAspect="1"/>
           </p:cNvPicPr>
           <p:nvPr/>
         </p:nvPicPr>
         <p:blipFill>
-          <a:blip xmlns:r="http://schemas.openxmlformats.org/officeDocument/2006/relationships" xmlns:a="http://schemas.openxmlformats.org/drawingml/2006/main" r:embed="Rd4fa81a897364099"/>
+          <a:blip xmlns:r="http://schemas.openxmlformats.org/officeDocument/2006/relationships" xmlns:a="http://schemas.openxmlformats.org/drawingml/2006/main" r:embed="R4def9a7825394e08"/>
           <a:stretch xmlns:a="http://schemas.openxmlformats.org/drawingml/2006/main">
             <a:fillRect l="0" t="0" r="0" b="0"/>
           </a:stretch>
@@ -26307,7 +26324,18 @@
                 <a:ea typeface="Consolas"/>
                 <a:cs typeface="Consolas"/>
               </a:rPr>
-              <a:t># -&gt; reload dalam &lt; 1 detik</a:t>
+              <a:t># </a:t>
+            </a:r>
+            <a:r>
+              <a:rPr sz="1100">
+                <a:solidFill>
+                  <a:srgbClr val="10B981"/>
+                </a:solidFill>
+                <a:latin typeface="Consolas"/>
+                <a:ea typeface="Consolas"/>
+                <a:cs typeface="Consolas"/>
+              </a:rPr>
+              <a:t>-&gt; reload setelah perubahan terdeteksi</a:t>
             </a:r>
             <a:endParaRPr sz="1100"/>
           </a:p>
@@ -26489,14 +26517,20 @@
       </p:sp>
       <p:pic>
         <p:nvPicPr>
-          <p:cNvPr id="22" name="Image 0"/>
+          <p:cNvPr id="22" name="Image 0">
+            <a:extLst xmlns:a="http://schemas.openxmlformats.org/drawingml/2006/main">
+              <a:ext uri="{FF2B5EF4-FFF2-40B4-BE49-F238E27FC236}">
+                <a16:creationId xmlns:a16="http://schemas.microsoft.com/office/drawing/2014/main" id="{0A8B58BC-B8E6-45DE-875C-981DB17B0353}"/>
+              </a:ext>
+            </a:extLst>
+          </p:cNvPr>
           <p:cNvPicPr>
             <a:picLocks xmlns:a="http://schemas.openxmlformats.org/drawingml/2006/main" noChangeAspect="1"/>
           </p:cNvPicPr>
           <p:nvPr/>
         </p:nvPicPr>
         <p:blipFill>
-          <a:blip xmlns:r="http://schemas.openxmlformats.org/officeDocument/2006/relationships" xmlns:a="http://schemas.openxmlformats.org/drawingml/2006/main" r:embed="Ree96a3875dfb4394"/>
+          <a:blip xmlns:r="http://schemas.openxmlformats.org/officeDocument/2006/relationships" xmlns:a="http://schemas.openxmlformats.org/drawingml/2006/main" r:embed="Re4bbf0d3bc754254"/>
           <a:stretch xmlns:a="http://schemas.openxmlformats.org/drawingml/2006/main">
             <a:fillRect l="0" t="0" r="0" b="0"/>
           </a:stretch>
@@ -26513,14 +26547,20 @@
       </p:pic>
       <p:pic>
         <p:nvPicPr>
-          <p:cNvPr id="23" name="Image 1"/>
+          <p:cNvPr id="23" name="Image 1">
+            <a:extLst xmlns:a="http://schemas.openxmlformats.org/drawingml/2006/main">
+              <a:ext uri="{FF2B5EF4-FFF2-40B4-BE49-F238E27FC236}">
+                <a16:creationId xmlns:a16="http://schemas.microsoft.com/office/drawing/2014/main" id="{3B50954C-B226-4A28-9D59-D568FFFF83B6}"/>
+              </a:ext>
+            </a:extLst>
+          </p:cNvPr>
           <p:cNvPicPr>
             <a:picLocks xmlns:a="http://schemas.openxmlformats.org/drawingml/2006/main" noChangeAspect="1"/>
           </p:cNvPicPr>
           <p:nvPr/>
         </p:nvPicPr>
         <p:blipFill>
-          <a:blip xmlns:r="http://schemas.openxmlformats.org/officeDocument/2006/relationships" xmlns:a="http://schemas.openxmlformats.org/drawingml/2006/main" r:embed="R26ae9eb8c6024457"/>
+          <a:blip xmlns:r="http://schemas.openxmlformats.org/officeDocument/2006/relationships" xmlns:a="http://schemas.openxmlformats.org/drawingml/2006/main" r:embed="Rac7dfa86fe3d4142"/>
           <a:stretch xmlns:a="http://schemas.openxmlformats.org/drawingml/2006/main">
             <a:fillRect l="0" t="0" r="0" b="0"/>
           </a:stretch>
@@ -26606,7 +26646,7 @@
                 <a:ea typeface="Calibri"/>
                 <a:cs typeface="Calibri"/>
               </a:rPr>
-              <a:t>Volume Backup Strategy</a:t>
+              <a:t>Backup PostgreSQL dan Uji Restore</a:t>
             </a:r>
             <a:endParaRPr sz="2200"/>
           </a:p>
@@ -26652,7 +26692,7 @@
                 <a:ea typeface="Calibri"/>
                 <a:cs typeface="Calibri"/>
               </a:rPr>
-              <a:t>Backup data sebelum container di-recreate - lebih baik aman daripada menyesal</a:t>
+              <a:t>pg_dump membuat backup logis. Uji restore pada database baru.</a:t>
             </a:r>
             <a:endParaRPr sz="1200"/>
           </a:p>
@@ -26863,7 +26903,7 @@
                 <a:ea typeface="Consolas"/>
                 <a:cs typeface="Consolas"/>
               </a:rPr>
-              <a:t>backup + restore named volume</a:t>
+              <a:t>Bash, root Lab 06, database sumber tetap ada</a:t>
             </a:r>
             <a:endParaRPr sz="900"/>
           </a:p>
@@ -26912,7 +26952,7 @@
                 <a:ea typeface="Consolas"/>
                 <a:cs typeface="Consolas"/>
               </a:rPr>
-              <a:t># === BACKUP ===</a:t>
+              <a:t># 1. Backup saat DB Lab 06 sedang berjalan</a:t>
             </a:r>
             <a:endParaRPr sz="1100"/>
           </a:p>
@@ -26932,9 +26972,8 @@
                 <a:ea typeface="Consolas"/>
                 <a:cs typeface="Consolas"/>
               </a:rPr>
-              <a:t># 1. Stop database supaya tidak corrupt</a:t>
-            </a:r>
-            <a:endParaRPr sz="1100"/>
+              <a:t>mkdir -p "./backups"</a:t>
+            </a:r>
           </a:p>
           <a:p xmlns:a="http://schemas.openxmlformats.org/drawingml/2006/main">
             <a:pPr marL="0" indent="0">
@@ -26946,26 +26985,14 @@
             <a:r>
               <a:rPr sz="1100">
                 <a:solidFill>
-                  <a:srgbClr val="10B981"/>
-                </a:solidFill>
-                <a:latin typeface="Consolas"/>
-                <a:ea typeface="Consolas"/>
-                <a:cs typeface="Consolas"/>
-              </a:rPr>
-              <a:t>$ </a:t>
-            </a:r>
-            <a:r>
-              <a:rPr sz="1100">
-                <a:solidFill>
-                  <a:srgbClr val="E2E8F0"/>
-                </a:solidFill>
-                <a:latin typeface="Consolas"/>
-                <a:ea typeface="Consolas"/>
-                <a:cs typeface="Consolas"/>
-              </a:rPr>
-              <a:t>docker compose stop db</a:t>
-            </a:r>
-            <a:endParaRPr sz="1100"/>
+                  <a:srgbClr val="94A3B8"/>
+                </a:solidFill>
+                <a:latin typeface="Consolas"/>
+                <a:ea typeface="Consolas"/>
+                <a:cs typeface="Consolas"/>
+              </a:rPr>
+              <a:t>docker compose exec -T db pg_dump -U clouduser -d cloudnotes \</a:t>
+            </a:r>
           </a:p>
           <a:p xmlns:a="http://schemas.openxmlformats.org/drawingml/2006/main">
             <a:pPr marL="0" indent="0">
@@ -26974,7 +27001,17 @@
               </a:spcAft>
               <a:buNone/>
             </a:pPr>
-            <a:endParaRPr sz="1100"/>
+            <a:r>
+              <a:rPr sz="1100">
+                <a:solidFill>
+                  <a:srgbClr val="94A3B8"/>
+                </a:solidFill>
+                <a:latin typeface="Consolas"/>
+                <a:ea typeface="Consolas"/>
+                <a:cs typeface="Consolas"/>
+              </a:rPr>
+              <a:t>  -Fc -f /tmp/cloudnotes.dump</a:t>
+            </a:r>
           </a:p>
           <a:p xmlns:a="http://schemas.openxmlformats.org/drawingml/2006/main">
             <a:pPr marL="0" indent="0">
@@ -26992,9 +27029,8 @@
                 <a:ea typeface="Consolas"/>
                 <a:cs typeface="Consolas"/>
               </a:rPr>
-              <a:t># 2. Run container sementara untuk tar volume jadi backup</a:t>
-            </a:r>
-            <a:endParaRPr sz="1100"/>
+              <a:t>docker compose cp db:/tmp/cloudnotes.dump "./backups/cloudnotes.dump"</a:t>
+            </a:r>
           </a:p>
           <a:p xmlns:a="http://schemas.openxmlformats.org/drawingml/2006/main">
             <a:pPr marL="0" indent="0">
@@ -27003,29 +27039,6 @@
               </a:spcAft>
               <a:buNone/>
             </a:pPr>
-            <a:r>
-              <a:rPr sz="1100">
-                <a:solidFill>
-                  <a:srgbClr val="10B981"/>
-                </a:solidFill>
-                <a:latin typeface="Consolas"/>
-                <a:ea typeface="Consolas"/>
-                <a:cs typeface="Consolas"/>
-              </a:rPr>
-              <a:t>$ </a:t>
-            </a:r>
-            <a:r>
-              <a:rPr sz="1100">
-                <a:solidFill>
-                  <a:srgbClr val="E2E8F0"/>
-                </a:solidFill>
-                <a:latin typeface="Consolas"/>
-                <a:ea typeface="Consolas"/>
-                <a:cs typeface="Consolas"/>
-              </a:rPr>
-              <a:t>docker run --rm \</a:t>
-            </a:r>
-            <a:endParaRPr sz="1100"/>
           </a:p>
           <a:p xmlns:a="http://schemas.openxmlformats.org/drawingml/2006/main">
             <a:pPr marL="0" indent="0">
@@ -27037,15 +27050,14 @@
             <a:r>
               <a:rPr sz="1100">
                 <a:solidFill>
-                  <a:srgbClr val="E2E8F0"/>
-                </a:solidFill>
-                <a:latin typeface="Consolas"/>
-                <a:ea typeface="Consolas"/>
-                <a:cs typeface="Consolas"/>
-              </a:rPr>
-              <a:t>    -v myapp_db-data:/source:ro \</a:t>
-            </a:r>
-            <a:endParaRPr sz="1100"/>
+                  <a:srgbClr val="94A3B8"/>
+                </a:solidFill>
+                <a:latin typeface="Consolas"/>
+                <a:ea typeface="Consolas"/>
+                <a:cs typeface="Consolas"/>
+              </a:rPr>
+              <a:t># 2. Uji arsip. Periksa exit status 0 setelah setiap command.</a:t>
+            </a:r>
           </a:p>
           <a:p xmlns:a="http://schemas.openxmlformats.org/drawingml/2006/main">
             <a:pPr marL="0" indent="0">
@@ -27057,15 +27069,14 @@
             <a:r>
               <a:rPr sz="1100">
                 <a:solidFill>
-                  <a:srgbClr val="E2E8F0"/>
-                </a:solidFill>
-                <a:latin typeface="Consolas"/>
-                <a:ea typeface="Consolas"/>
-                <a:cs typeface="Consolas"/>
-              </a:rPr>
-              <a:t>    -v $(pwd)/backups:/backup \</a:t>
-            </a:r>
-            <a:endParaRPr sz="1100"/>
+                  <a:srgbClr val="94A3B8"/>
+                </a:solidFill>
+                <a:latin typeface="Consolas"/>
+                <a:ea typeface="Consolas"/>
+                <a:cs typeface="Consolas"/>
+              </a:rPr>
+              <a:t>docker compose exec -T db pg_restore -l /tmp/cloudnotes.dump</a:t>
+            </a:r>
           </a:p>
           <a:p xmlns:a="http://schemas.openxmlformats.org/drawingml/2006/main">
             <a:pPr marL="0" indent="0">
@@ -27074,18 +27085,6 @@
               </a:spcAft>
               <a:buNone/>
             </a:pPr>
-            <a:r>
-              <a:rPr sz="1100">
-                <a:solidFill>
-                  <a:srgbClr val="E2E8F0"/>
-                </a:solidFill>
-                <a:latin typeface="Consolas"/>
-                <a:ea typeface="Consolas"/>
-                <a:cs typeface="Consolas"/>
-              </a:rPr>
-              <a:t>    alpine tar czf /backup/db-$(date +%Y%m%d).tar.gz -C /source .</a:t>
-            </a:r>
-            <a:endParaRPr sz="1100"/>
           </a:p>
           <a:p xmlns:a="http://schemas.openxmlformats.org/drawingml/2006/main">
             <a:pPr marL="0" indent="0">
@@ -27094,7 +27093,17 @@
               </a:spcAft>
               <a:buNone/>
             </a:pPr>
-            <a:endParaRPr sz="1100"/>
+            <a:r>
+              <a:rPr sz="1100">
+                <a:solidFill>
+                  <a:srgbClr val="94A3B8"/>
+                </a:solidFill>
+                <a:latin typeface="Consolas"/>
+                <a:ea typeface="Consolas"/>
+                <a:cs typeface="Consolas"/>
+              </a:rPr>
+              <a:t># 3. Restore ke database BARU (nama belum pernah dipakai)</a:t>
+            </a:r>
           </a:p>
           <a:p xmlns:a="http://schemas.openxmlformats.org/drawingml/2006/main">
             <a:pPr marL="0" indent="0">
@@ -27112,9 +27121,8 @@
                 <a:ea typeface="Consolas"/>
                 <a:cs typeface="Consolas"/>
               </a:rPr>
-              <a:t># 3. Start lagi database</a:t>
-            </a:r>
-            <a:endParaRPr sz="1100"/>
+              <a:t>docker compose exec -T db createdb -U clouduser cloudnotes_restore_check</a:t>
+            </a:r>
           </a:p>
           <a:p xmlns:a="http://schemas.openxmlformats.org/drawingml/2006/main">
             <a:pPr marL="0" indent="0">
@@ -27126,26 +27134,36 @@
             <a:r>
               <a:rPr sz="1100">
                 <a:solidFill>
-                  <a:srgbClr val="10B981"/>
-                </a:solidFill>
-                <a:latin typeface="Consolas"/>
-                <a:ea typeface="Consolas"/>
-                <a:cs typeface="Consolas"/>
-              </a:rPr>
-              <a:t>$ </a:t>
+                  <a:srgbClr val="94A3B8"/>
+                </a:solidFill>
+                <a:latin typeface="Consolas"/>
+                <a:ea typeface="Consolas"/>
+                <a:cs typeface="Consolas"/>
+              </a:rPr>
+              <a:t>docker compose exec -T db </a:t>
             </a:r>
             <a:r>
               <a:rPr sz="1100">
                 <a:solidFill>
-                  <a:srgbClr val="E2E8F0"/>
-                </a:solidFill>
-                <a:latin typeface="Consolas"/>
-                <a:ea typeface="Consolas"/>
-                <a:cs typeface="Consolas"/>
-              </a:rPr>
-              <a:t>docker compose start db</a:t>
-            </a:r>
-            <a:endParaRPr sz="1100"/>
+                  <a:srgbClr val="94A3B8"/>
+                </a:solidFill>
+                <a:latin typeface="Consolas"/>
+                <a:ea typeface="Consolas"/>
+                <a:cs typeface="Consolas"/>
+              </a:rPr>
+              <a:t>pg_restore --exit-on-error -U clouduser</a:t>
+            </a:r>
+            <a:r>
+              <a:rPr sz="1100">
+                <a:solidFill>
+                  <a:srgbClr val="94A3B8"/>
+                </a:solidFill>
+                <a:latin typeface="Consolas"/>
+                <a:ea typeface="Consolas"/>
+                <a:cs typeface="Consolas"/>
+              </a:rPr>
+              <a:t> \</a:t>
+            </a:r>
           </a:p>
           <a:p xmlns:a="http://schemas.openxmlformats.org/drawingml/2006/main">
             <a:pPr marL="0" indent="0">
@@ -27154,7 +27172,17 @@
               </a:spcAft>
               <a:buNone/>
             </a:pPr>
-            <a:endParaRPr sz="1100"/>
+            <a:r>
+              <a:rPr sz="1100">
+                <a:solidFill>
+                  <a:srgbClr val="94A3B8"/>
+                </a:solidFill>
+                <a:latin typeface="Consolas"/>
+                <a:ea typeface="Consolas"/>
+                <a:cs typeface="Consolas"/>
+              </a:rPr>
+              <a:t>  -d cloudnotes_restore_check /tmp/cloudnotes.dump</a:t>
+            </a:r>
           </a:p>
           <a:p xmlns:a="http://schemas.openxmlformats.org/drawingml/2006/main">
             <a:pPr marL="0" indent="0">
@@ -27163,18 +27191,6 @@
               </a:spcAft>
               <a:buNone/>
             </a:pPr>
-            <a:r>
-              <a:rPr sz="1100">
-                <a:solidFill>
-                  <a:srgbClr val="94A3B8"/>
-                </a:solidFill>
-                <a:latin typeface="Consolas"/>
-                <a:ea typeface="Consolas"/>
-                <a:cs typeface="Consolas"/>
-              </a:rPr>
-              <a:t># === RESTORE ===</a:t>
-            </a:r>
-            <a:endParaRPr sz="1100"/>
           </a:p>
           <a:p xmlns:a="http://schemas.openxmlformats.org/drawingml/2006/main">
             <a:pPr marL="0" indent="0">
@@ -27192,9 +27208,8 @@
                 <a:ea typeface="Consolas"/>
                 <a:cs typeface="Consolas"/>
               </a:rPr>
-              <a:t># Recreate volume + extract tar ke dalamnya</a:t>
-            </a:r>
-            <a:endParaRPr sz="1100"/>
+              <a:t># 4. Cocokkan jumlah dan isi baris dengan database sumber</a:t>
+            </a:r>
           </a:p>
           <a:p xmlns:a="http://schemas.openxmlformats.org/drawingml/2006/main">
             <a:pPr marL="0" indent="0">
@@ -27206,26 +27221,14 @@
             <a:r>
               <a:rPr sz="1100">
                 <a:solidFill>
-                  <a:srgbClr val="10B981"/>
-                </a:solidFill>
-                <a:latin typeface="Consolas"/>
-                <a:ea typeface="Consolas"/>
-                <a:cs typeface="Consolas"/>
-              </a:rPr>
-              <a:t>$ </a:t>
-            </a:r>
-            <a:r>
-              <a:rPr sz="1100">
-                <a:solidFill>
-                  <a:srgbClr val="E2E8F0"/>
-                </a:solidFill>
-                <a:latin typeface="Consolas"/>
-                <a:ea typeface="Consolas"/>
-                <a:cs typeface="Consolas"/>
-              </a:rPr>
-              <a:t>docker compose down -v   # hapus volume lama</a:t>
-            </a:r>
-            <a:endParaRPr sz="1100"/>
+                  <a:srgbClr val="94A3B8"/>
+                </a:solidFill>
+                <a:latin typeface="Consolas"/>
+                <a:ea typeface="Consolas"/>
+                <a:cs typeface="Consolas"/>
+              </a:rPr>
+              <a:t>docker compose exec -T db psql -U clouduser -d cloudnotes_restore_check \</a:t>
+            </a:r>
           </a:p>
           <a:p xmlns:a="http://schemas.openxmlformats.org/drawingml/2006/main">
             <a:pPr marL="0" indent="0">
@@ -27237,26 +27240,14 @@
             <a:r>
               <a:rPr sz="1100">
                 <a:solidFill>
-                  <a:srgbClr val="10B981"/>
-                </a:solidFill>
-                <a:latin typeface="Consolas"/>
-                <a:ea typeface="Consolas"/>
-                <a:cs typeface="Consolas"/>
-              </a:rPr>
-              <a:t>$ </a:t>
-            </a:r>
-            <a:r>
-              <a:rPr sz="1100">
-                <a:solidFill>
-                  <a:srgbClr val="E2E8F0"/>
-                </a:solidFill>
-                <a:latin typeface="Consolas"/>
-                <a:ea typeface="Consolas"/>
-                <a:cs typeface="Consolas"/>
-              </a:rPr>
-              <a:t>docker volume create myapp_db-data</a:t>
-            </a:r>
-            <a:endParaRPr sz="1100"/>
+                  <a:srgbClr val="94A3B8"/>
+                </a:solidFill>
+                <a:latin typeface="Consolas"/>
+                <a:ea typeface="Consolas"/>
+                <a:cs typeface="Consolas"/>
+              </a:rPr>
+              <a:t>  -c "SELECT id, title FROM notes;"</a:t>
+            </a:r>
           </a:p>
           <a:p xmlns:a="http://schemas.openxmlformats.org/drawingml/2006/main">
             <a:pPr marL="0" indent="0">
@@ -27265,29 +27256,6 @@
               </a:spcAft>
               <a:buNone/>
             </a:pPr>
-            <a:r>
-              <a:rPr sz="1100">
-                <a:solidFill>
-                  <a:srgbClr val="10B981"/>
-                </a:solidFill>
-                <a:latin typeface="Consolas"/>
-                <a:ea typeface="Consolas"/>
-                <a:cs typeface="Consolas"/>
-              </a:rPr>
-              <a:t>$ </a:t>
-            </a:r>
-            <a:r>
-              <a:rPr sz="1100">
-                <a:solidFill>
-                  <a:srgbClr val="E2E8F0"/>
-                </a:solidFill>
-                <a:latin typeface="Consolas"/>
-                <a:ea typeface="Consolas"/>
-                <a:cs typeface="Consolas"/>
-              </a:rPr>
-              <a:t>docker run --rm \</a:t>
-            </a:r>
-            <a:endParaRPr sz="1100"/>
           </a:p>
           <a:p xmlns:a="http://schemas.openxmlformats.org/drawingml/2006/main">
             <a:pPr marL="0" indent="0">
@@ -27299,15 +27267,14 @@
             <a:r>
               <a:rPr sz="1100">
                 <a:solidFill>
-                  <a:srgbClr val="E2E8F0"/>
-                </a:solidFill>
-                <a:latin typeface="Consolas"/>
-                <a:ea typeface="Consolas"/>
-                <a:cs typeface="Consolas"/>
-              </a:rPr>
-              <a:t>    -v myapp_db-data:/target \</a:t>
-            </a:r>
-            <a:endParaRPr sz="1100"/>
+                  <a:srgbClr val="94A3B8"/>
+                </a:solidFill>
+                <a:latin typeface="Consolas"/>
+                <a:ea typeface="Consolas"/>
+                <a:cs typeface="Consolas"/>
+              </a:rPr>
+              <a:t># Sumber cloudnotes dan named volume tetap ada.</a:t>
+            </a:r>
           </a:p>
           <a:p xmlns:a="http://schemas.openxmlformats.org/drawingml/2006/main">
             <a:pPr marL="0" indent="0">
@@ -27319,66 +27286,14 @@
             <a:r>
               <a:rPr sz="1100">
                 <a:solidFill>
-                  <a:srgbClr val="E2E8F0"/>
-                </a:solidFill>
-                <a:latin typeface="Consolas"/>
-                <a:ea typeface="Consolas"/>
-                <a:cs typeface="Consolas"/>
-              </a:rPr>
-              <a:t>    -v $(pwd)/backups:/backup:ro \</a:t>
-            </a:r>
-            <a:endParaRPr sz="1100"/>
-          </a:p>
-          <a:p xmlns:a="http://schemas.openxmlformats.org/drawingml/2006/main">
-            <a:pPr marL="0" indent="0">
-              <a:spcAft>
-                <a:spcPts val="200"/>
-              </a:spcAft>
-              <a:buNone/>
-            </a:pPr>
-            <a:r>
-              <a:rPr sz="1100">
-                <a:solidFill>
-                  <a:srgbClr val="E2E8F0"/>
-                </a:solidFill>
-                <a:latin typeface="Consolas"/>
-                <a:ea typeface="Consolas"/>
-                <a:cs typeface="Consolas"/>
-              </a:rPr>
-              <a:t>    alpine tar xzf /backup/db-20260515.tar.gz -C /target</a:t>
-            </a:r>
-            <a:endParaRPr sz="1100"/>
-          </a:p>
-          <a:p xmlns:a="http://schemas.openxmlformats.org/drawingml/2006/main">
-            <a:pPr marL="0" indent="0">
-              <a:spcAft>
-                <a:spcPts val="200"/>
-              </a:spcAft>
-              <a:buNone/>
-            </a:pPr>
-            <a:r>
-              <a:rPr sz="1100">
-                <a:solidFill>
-                  <a:srgbClr val="10B981"/>
-                </a:solidFill>
-                <a:latin typeface="Consolas"/>
-                <a:ea typeface="Consolas"/>
-                <a:cs typeface="Consolas"/>
-              </a:rPr>
-              <a:t>$ </a:t>
-            </a:r>
-            <a:r>
-              <a:rPr sz="1100">
-                <a:solidFill>
-                  <a:srgbClr val="E2E8F0"/>
-                </a:solidFill>
-                <a:latin typeface="Consolas"/>
-                <a:ea typeface="Consolas"/>
-                <a:cs typeface="Consolas"/>
-              </a:rPr>
-              <a:t>docker compose up -d   # start dengan data restored</a:t>
-            </a:r>
-            <a:endParaRPr sz="1100"/>
+                  <a:srgbClr val="94A3B8"/>
+                </a:solidFill>
+                <a:latin typeface="Consolas"/>
+                <a:ea typeface="Consolas"/>
+                <a:cs typeface="Consolas"/>
+              </a:rPr>
+              <a:t># Panduan teori memuat bentuk PowerShell dan cek kegagalan.</a:t>
+            </a:r>
           </a:p>
         </p:txBody>
       </p:sp>
@@ -27652,14 +27567,20 @@
       </p:sp>
       <p:pic>
         <p:nvPicPr>
-          <p:cNvPr id="24" name="Image 0"/>
+          <p:cNvPr id="24" name="Image 0">
+            <a:extLst xmlns:a="http://schemas.openxmlformats.org/drawingml/2006/main">
+              <a:ext uri="{FF2B5EF4-FFF2-40B4-BE49-F238E27FC236}">
+                <a16:creationId xmlns:a16="http://schemas.microsoft.com/office/drawing/2014/main" id="{B3BECDDA-2BBD-4AF0-A067-9762A2233409}"/>
+              </a:ext>
+            </a:extLst>
+          </p:cNvPr>
           <p:cNvPicPr>
             <a:picLocks xmlns:a="http://schemas.openxmlformats.org/drawingml/2006/main" noChangeAspect="1"/>
           </p:cNvPicPr>
           <p:nvPr/>
         </p:nvPicPr>
         <p:blipFill>
-          <a:blip xmlns:r="http://schemas.openxmlformats.org/officeDocument/2006/relationships" xmlns:a="http://schemas.openxmlformats.org/drawingml/2006/main" r:embed="R033a1252dcf4433e"/>
+          <a:blip xmlns:r="http://schemas.openxmlformats.org/officeDocument/2006/relationships" xmlns:a="http://schemas.openxmlformats.org/drawingml/2006/main" r:embed="R7b19160caa984091"/>
           <a:stretch xmlns:a="http://schemas.openxmlformats.org/drawingml/2006/main">
             <a:fillRect l="0" t="0" r="0" b="0"/>
           </a:stretch>
@@ -27676,14 +27597,20 @@
       </p:pic>
       <p:pic>
         <p:nvPicPr>
-          <p:cNvPr id="25" name="Image 1"/>
+          <p:cNvPr id="25" name="Image 1">
+            <a:extLst xmlns:a="http://schemas.openxmlformats.org/drawingml/2006/main">
+              <a:ext uri="{FF2B5EF4-FFF2-40B4-BE49-F238E27FC236}">
+                <a16:creationId xmlns:a16="http://schemas.microsoft.com/office/drawing/2014/main" id="{31E8E845-C589-4B91-A85F-9B21E471CB72}"/>
+              </a:ext>
+            </a:extLst>
+          </p:cNvPr>
           <p:cNvPicPr>
             <a:picLocks xmlns:a="http://schemas.openxmlformats.org/drawingml/2006/main" noChangeAspect="1"/>
           </p:cNvPicPr>
           <p:nvPr/>
         </p:nvPicPr>
         <p:blipFill>
-          <a:blip xmlns:r="http://schemas.openxmlformats.org/officeDocument/2006/relationships" xmlns:a="http://schemas.openxmlformats.org/drawingml/2006/main" r:embed="R5f91681f84e34811"/>
+          <a:blip xmlns:r="http://schemas.openxmlformats.org/officeDocument/2006/relationships" xmlns:a="http://schemas.openxmlformats.org/drawingml/2006/main" r:embed="R111e6cc5743f42ea"/>
           <a:stretch xmlns:a="http://schemas.openxmlformats.org/drawingml/2006/main">
             <a:fillRect l="0" t="0" r="0" b="0"/>
           </a:stretch>
@@ -28042,14 +27969,20 @@
       </p:sp>
       <p:pic>
         <p:nvPicPr>
-          <p:cNvPr id="31" name="Image 0"/>
+          <p:cNvPr id="31" name="Image 0">
+            <a:extLst xmlns:a="http://schemas.openxmlformats.org/drawingml/2006/main">
+              <a:ext uri="{FF2B5EF4-FFF2-40B4-BE49-F238E27FC236}">
+                <a16:creationId xmlns:a16="http://schemas.microsoft.com/office/drawing/2014/main" id="{71BB4D26-FA35-43C4-9AC0-45BB6B67B0FB}"/>
+              </a:ext>
+            </a:extLst>
+          </p:cNvPr>
           <p:cNvPicPr>
             <a:picLocks xmlns:a="http://schemas.openxmlformats.org/drawingml/2006/main" noChangeAspect="1"/>
           </p:cNvPicPr>
           <p:nvPr/>
         </p:nvPicPr>
         <p:blipFill>
-          <a:blip xmlns:r="http://schemas.openxmlformats.org/officeDocument/2006/relationships" xmlns:a="http://schemas.openxmlformats.org/drawingml/2006/main" r:embed="Ra6a9237192644b4d"/>
+          <a:blip xmlns:r="http://schemas.openxmlformats.org/officeDocument/2006/relationships" xmlns:a="http://schemas.openxmlformats.org/drawingml/2006/main" r:embed="Re540f253f9bb467a"/>
           <a:stretch xmlns:a="http://schemas.openxmlformats.org/drawingml/2006/main">
             <a:fillRect l="0" t="0" r="0" b="0"/>
           </a:stretch>
@@ -28066,14 +27999,20 @@
       </p:pic>
       <p:pic>
         <p:nvPicPr>
-          <p:cNvPr id="32" name="Image 1"/>
+          <p:cNvPr id="32" name="Image 1">
+            <a:extLst xmlns:a="http://schemas.openxmlformats.org/drawingml/2006/main">
+              <a:ext uri="{FF2B5EF4-FFF2-40B4-BE49-F238E27FC236}">
+                <a16:creationId xmlns:a16="http://schemas.microsoft.com/office/drawing/2014/main" id="{6C220890-4EE1-4C07-8C8B-0336FD4E09A7}"/>
+              </a:ext>
+            </a:extLst>
+          </p:cNvPr>
           <p:cNvPicPr>
             <a:picLocks xmlns:a="http://schemas.openxmlformats.org/drawingml/2006/main" noChangeAspect="1"/>
           </p:cNvPicPr>
           <p:nvPr/>
         </p:nvPicPr>
         <p:blipFill>
-          <a:blip xmlns:r="http://schemas.openxmlformats.org/officeDocument/2006/relationships" xmlns:a="http://schemas.openxmlformats.org/drawingml/2006/main" r:embed="Rd0ddcbf448e54767"/>
+          <a:blip xmlns:r="http://schemas.openxmlformats.org/officeDocument/2006/relationships" xmlns:a="http://schemas.openxmlformats.org/drawingml/2006/main" r:embed="R03dd375649064925"/>
           <a:stretch xmlns:a="http://schemas.openxmlformats.org/drawingml/2006/main">
             <a:fillRect l="0" t="0" r="0" b="0"/>
           </a:stretch>
@@ -29241,7 +29180,7 @@
                 <a:ea typeface="Consolas"/>
                 <a:cs typeface="Consolas"/>
               </a:rPr>
-              <a:t>      replicas: 3</a:t>
+              <a:t>      replicas: 1  # fixed host port di contoh ini</a:t>
             </a:r>
             <a:endParaRPr sz="1100"/>
           </a:p>
@@ -29310,7 +29249,7 @@
                 <a:ea typeface="Consolas"/>
                 <a:cs typeface="Consolas"/>
               </a:rPr>
-              <a:t># Dev (default - auto merge override.yml):</a:t>
+              <a:t># Dev memakai base dan override</a:t>
             </a:r>
             <a:endParaRPr sz="1100"/>
           </a:p>
@@ -29324,7 +29263,7 @@
             <a:r>
               <a:rPr sz="1100">
                 <a:solidFill>
-                  <a:srgbClr val="10B981"/>
+                  <a:srgbClr val="94A3B8"/>
                 </a:solidFill>
                 <a:latin typeface="Consolas"/>
                 <a:ea typeface="Consolas"/>
@@ -29332,7 +29271,6 @@
               </a:rPr>
               <a:t>$ docker compose up -d</a:t>
             </a:r>
-            <a:endParaRPr sz="1100"/>
           </a:p>
           <a:p xmlns:a="http://schemas.openxmlformats.org/drawingml/2006/main">
             <a:pPr marL="0" indent="0">
@@ -29341,7 +29279,6 @@
               </a:spcAft>
               <a:buNone/>
             </a:pPr>
-            <a:endParaRPr sz="1100"/>
           </a:p>
           <a:p xmlns:a="http://schemas.openxmlformats.org/drawingml/2006/main">
             <a:pPr marL="0" indent="0">
@@ -29359,9 +29296,8 @@
                 <a:ea typeface="Consolas"/>
                 <a:cs typeface="Consolas"/>
               </a:rPr>
-              <a:t># Prod (explicit specify file):</a:t>
-            </a:r>
-            <a:endParaRPr sz="1100"/>
+              <a:t># Prod memakai file yang ditentukan</a:t>
+            </a:r>
           </a:p>
           <a:p xmlns:a="http://schemas.openxmlformats.org/drawingml/2006/main">
             <a:pPr marL="0" indent="0">
@@ -29373,15 +29309,14 @@
             <a:r>
               <a:rPr sz="1100">
                 <a:solidFill>
-                  <a:srgbClr val="10B981"/>
-                </a:solidFill>
-                <a:latin typeface="Consolas"/>
-                <a:ea typeface="Consolas"/>
-                <a:cs typeface="Consolas"/>
-              </a:rPr>
-              <a:t>$ docker compose \</a:t>
-            </a:r>
-            <a:endParaRPr sz="1100"/>
+                  <a:srgbClr val="94A3B8"/>
+                </a:solidFill>
+                <a:latin typeface="Consolas"/>
+                <a:ea typeface="Consolas"/>
+                <a:cs typeface="Consolas"/>
+              </a:rPr>
+              <a:t>$ docker compose -f compose.yml \</a:t>
+            </a:r>
           </a:p>
           <a:p xmlns:a="http://schemas.openxmlformats.org/drawingml/2006/main">
             <a:pPr marL="0" indent="0">
@@ -29393,55 +29328,14 @@
             <a:r>
               <a:rPr sz="1100">
                 <a:solidFill>
-                  <a:srgbClr val="10B981"/>
-                </a:solidFill>
-                <a:latin typeface="Consolas"/>
-                <a:ea typeface="Consolas"/>
-                <a:cs typeface="Consolas"/>
-              </a:rPr>
-              <a:t>  -f compose.yml \</a:t>
-            </a:r>
-            <a:endParaRPr sz="1100"/>
-          </a:p>
-          <a:p xmlns:a="http://schemas.openxmlformats.org/drawingml/2006/main">
-            <a:pPr marL="0" indent="0">
-              <a:spcAft>
-                <a:spcPts val="200"/>
-              </a:spcAft>
-              <a:buNone/>
-            </a:pPr>
-            <a:r>
-              <a:rPr sz="1100">
-                <a:solidFill>
-                  <a:srgbClr val="10B981"/>
-                </a:solidFill>
-                <a:latin typeface="Consolas"/>
-                <a:ea typeface="Consolas"/>
-                <a:cs typeface="Consolas"/>
-              </a:rPr>
-              <a:t>  -f compose.prod.yml \</a:t>
-            </a:r>
-            <a:endParaRPr sz="1100"/>
-          </a:p>
-          <a:p xmlns:a="http://schemas.openxmlformats.org/drawingml/2006/main">
-            <a:pPr marL="0" indent="0">
-              <a:spcAft>
-                <a:spcPts val="200"/>
-              </a:spcAft>
-              <a:buNone/>
-            </a:pPr>
-            <a:r>
-              <a:rPr sz="1100">
-                <a:solidFill>
-                  <a:srgbClr val="10B981"/>
-                </a:solidFill>
-                <a:latin typeface="Consolas"/>
-                <a:ea typeface="Consolas"/>
-                <a:cs typeface="Consolas"/>
-              </a:rPr>
-              <a:t>  up -d</a:t>
-            </a:r>
-            <a:endParaRPr sz="1100"/>
+                  <a:srgbClr val="94A3B8"/>
+                </a:solidFill>
+                <a:latin typeface="Consolas"/>
+                <a:ea typeface="Consolas"/>
+                <a:cs typeface="Consolas"/>
+              </a:rPr>
+              <a:t>  -f compose.prod.yml up -d</a:t>
+            </a:r>
           </a:p>
         </p:txBody>
       </p:sp>
@@ -29601,14 +29495,20 @@
       </p:sp>
       <p:pic>
         <p:nvPicPr>
-          <p:cNvPr id="35" name="Image 0"/>
+          <p:cNvPr id="35" name="Image 0">
+            <a:extLst xmlns:a="http://schemas.openxmlformats.org/drawingml/2006/main">
+              <a:ext uri="{FF2B5EF4-FFF2-40B4-BE49-F238E27FC236}">
+                <a16:creationId xmlns:a16="http://schemas.microsoft.com/office/drawing/2014/main" id="{557B7F82-C429-4D73-9B81-F151DF4ADF07}"/>
+              </a:ext>
+            </a:extLst>
+          </p:cNvPr>
           <p:cNvPicPr>
             <a:picLocks xmlns:a="http://schemas.openxmlformats.org/drawingml/2006/main" noChangeAspect="1"/>
           </p:cNvPicPr>
           <p:nvPr/>
         </p:nvPicPr>
         <p:blipFill>
-          <a:blip xmlns:r="http://schemas.openxmlformats.org/officeDocument/2006/relationships" xmlns:a="http://schemas.openxmlformats.org/drawingml/2006/main" r:embed="Re14cb5abe75c44eb"/>
+          <a:blip xmlns:r="http://schemas.openxmlformats.org/officeDocument/2006/relationships" xmlns:a="http://schemas.openxmlformats.org/drawingml/2006/main" r:embed="Rbbde7262bdb8461b"/>
           <a:stretch xmlns:a="http://schemas.openxmlformats.org/drawingml/2006/main">
             <a:fillRect l="0" t="0" r="0" b="0"/>
           </a:stretch>
@@ -29625,14 +29525,20 @@
       </p:pic>
       <p:pic>
         <p:nvPicPr>
-          <p:cNvPr id="36" name="Image 1"/>
+          <p:cNvPr id="36" name="Image 1">
+            <a:extLst xmlns:a="http://schemas.openxmlformats.org/drawingml/2006/main">
+              <a:ext uri="{FF2B5EF4-FFF2-40B4-BE49-F238E27FC236}">
+                <a16:creationId xmlns:a16="http://schemas.microsoft.com/office/drawing/2014/main" id="{6DC4E784-4A3B-4CC1-BE2E-63BB0178DC49}"/>
+              </a:ext>
+            </a:extLst>
+          </p:cNvPr>
           <p:cNvPicPr>
             <a:picLocks xmlns:a="http://schemas.openxmlformats.org/drawingml/2006/main" noChangeAspect="1"/>
           </p:cNvPicPr>
           <p:nvPr/>
         </p:nvPicPr>
         <p:blipFill>
-          <a:blip xmlns:r="http://schemas.openxmlformats.org/officeDocument/2006/relationships" xmlns:a="http://schemas.openxmlformats.org/drawingml/2006/main" r:embed="R0c48a86d1c22458a"/>
+          <a:blip xmlns:r="http://schemas.openxmlformats.org/officeDocument/2006/relationships" xmlns:a="http://schemas.openxmlformats.org/drawingml/2006/main" r:embed="Rafdb5601c84e4a25"/>
           <a:stretch xmlns:a="http://schemas.openxmlformats.org/drawingml/2006/main">
             <a:fillRect l="0" t="0" r="0" b="0"/>
           </a:stretch>
@@ -29718,7 +29624,7 @@
                 <a:ea typeface="Calibri"/>
                 <a:cs typeface="Calibri"/>
               </a:rPr>
-              <a:t>Secrets - Jangan Pakai environment untuk Password</a:t>
+              <a:t>Secrets melalui File Lokal</a:t>
             </a:r>
             <a:endParaRPr sz="2200"/>
           </a:p>
@@ -29764,7 +29670,7 @@
                 <a:ea typeface="Calibri"/>
                 <a:cs typeface="Calibri"/>
               </a:rPr>
-              <a:t>Pakai docker secrets atau external secrets manager</a:t>
+              <a:t>File secret lokal dan perlindungan kredensial</a:t>
             </a:r>
             <a:endParaRPr sz="1200"/>
           </a:p>
@@ -29805,14 +29711,20 @@
       </p:sp>
       <p:pic>
         <p:nvPicPr>
-          <p:cNvPr id="41" name="Image 2"/>
+          <p:cNvPr id="41" name="Image 2">
+            <a:extLst xmlns:a="http://schemas.openxmlformats.org/drawingml/2006/main">
+              <a:ext uri="{FF2B5EF4-FFF2-40B4-BE49-F238E27FC236}">
+                <a16:creationId xmlns:a16="http://schemas.microsoft.com/office/drawing/2014/main" id="{740B6754-6658-494A-9EED-0B80D39D166C}"/>
+              </a:ext>
+            </a:extLst>
+          </p:cNvPr>
           <p:cNvPicPr>
             <a:picLocks xmlns:a="http://schemas.openxmlformats.org/drawingml/2006/main" noChangeAspect="1"/>
           </p:cNvPicPr>
           <p:nvPr/>
         </p:nvPicPr>
         <p:blipFill>
-          <a:blip xmlns:r="http://schemas.openxmlformats.org/officeDocument/2006/relationships" xmlns:a="http://schemas.openxmlformats.org/drawingml/2006/main" r:embed="R7a1885ba21254b39"/>
+          <a:blip xmlns:r="http://schemas.openxmlformats.org/officeDocument/2006/relationships" xmlns:a="http://schemas.openxmlformats.org/drawingml/2006/main" r:embed="R9f6d277782ab4bc4"/>
           <a:stretch xmlns:a="http://schemas.openxmlformats.org/drawingml/2006/main">
             <a:fillRect l="0" t="0" r="0" b="0"/>
           </a:stretch>
@@ -29913,7 +29825,7 @@
                 <a:ea typeface="Calibri"/>
                 <a:cs typeface="Calibri"/>
               </a:rPr>
-              <a:t>password di environment: di-log saat docker inspect, visible di 'docker compose config'.</a:t>
+              <a:t>nilai password di environment dapat terlihat melalui inspect/config. Batasi akses ke Docker dan file lokal.</a:t>
             </a:r>
             <a:endParaRPr sz="1300"/>
           </a:p>
@@ -30995,9 +30907,8 @@
                 <a:ea typeface="Consolas"/>
                 <a:cs typeface="Consolas"/>
               </a:rPr>
-              <a:t># Postgres baca dari file, no env leak</a:t>
-            </a:r>
-            <a:endParaRPr sz="1100"/>
+              <a:t># File tetap sensitif, lindungi aksesnya.</a:t>
+            </a:r>
           </a:p>
         </p:txBody>
       </p:sp>
@@ -31157,14 +31068,20 @@
       </p:sp>
       <p:pic>
         <p:nvPicPr>
-          <p:cNvPr id="51" name="Image 0"/>
+          <p:cNvPr id="51" name="Image 0">
+            <a:extLst xmlns:a="http://schemas.openxmlformats.org/drawingml/2006/main">
+              <a:ext uri="{FF2B5EF4-FFF2-40B4-BE49-F238E27FC236}">
+                <a16:creationId xmlns:a16="http://schemas.microsoft.com/office/drawing/2014/main" id="{7A1077D5-1562-45F5-9352-8A31879C4FBD}"/>
+              </a:ext>
+            </a:extLst>
+          </p:cNvPr>
           <p:cNvPicPr>
             <a:picLocks xmlns:a="http://schemas.openxmlformats.org/drawingml/2006/main" noChangeAspect="1"/>
           </p:cNvPicPr>
           <p:nvPr/>
         </p:nvPicPr>
         <p:blipFill>
-          <a:blip xmlns:r="http://schemas.openxmlformats.org/officeDocument/2006/relationships" xmlns:a="http://schemas.openxmlformats.org/drawingml/2006/main" r:embed="Re2845415aab74ba2"/>
+          <a:blip xmlns:r="http://schemas.openxmlformats.org/officeDocument/2006/relationships" xmlns:a="http://schemas.openxmlformats.org/drawingml/2006/main" r:embed="R3246c430318d4387"/>
           <a:stretch xmlns:a="http://schemas.openxmlformats.org/drawingml/2006/main">
             <a:fillRect l="0" t="0" r="0" b="0"/>
           </a:stretch>
@@ -31181,14 +31098,20 @@
       </p:pic>
       <p:pic>
         <p:nvPicPr>
-          <p:cNvPr id="52" name="Image 1"/>
+          <p:cNvPr id="52" name="Image 1">
+            <a:extLst xmlns:a="http://schemas.openxmlformats.org/drawingml/2006/main">
+              <a:ext uri="{FF2B5EF4-FFF2-40B4-BE49-F238E27FC236}">
+                <a16:creationId xmlns:a16="http://schemas.microsoft.com/office/drawing/2014/main" id="{0B5F8AA3-A4A4-4740-A9EB-DEC9F66A2B7F}"/>
+              </a:ext>
+            </a:extLst>
+          </p:cNvPr>
           <p:cNvPicPr>
             <a:picLocks xmlns:a="http://schemas.openxmlformats.org/drawingml/2006/main" noChangeAspect="1"/>
           </p:cNvPicPr>
           <p:nvPr/>
         </p:nvPicPr>
         <p:blipFill>
-          <a:blip xmlns:r="http://schemas.openxmlformats.org/officeDocument/2006/relationships" xmlns:a="http://schemas.openxmlformats.org/drawingml/2006/main" r:embed="Re1b8e16c7b0e4649"/>
+          <a:blip xmlns:r="http://schemas.openxmlformats.org/officeDocument/2006/relationships" xmlns:a="http://schemas.openxmlformats.org/drawingml/2006/main" r:embed="R5ab55fafc7764d86"/>
           <a:stretch xmlns:a="http://schemas.openxmlformats.org/drawingml/2006/main">
             <a:fillRect l="0" t="0" r="0" b="0"/>
           </a:stretch>
@@ -31816,7 +31739,7 @@
                 <a:ea typeface="Calibri"/>
                 <a:cs typeface="Calibri"/>
               </a:rPr>
-              <a:t>Backup dulu sebelum down -v, atau pakai 'docker compose rm -v' selective</a:t>
+              <a:t>Gunakan down tanpa -v. Uji backup dengan restore ke DB baru.</a:t>
             </a:r>
             <a:endParaRPr sz="1000"/>
           </a:p>
@@ -32222,7 +32145,7 @@
                 <a:ea typeface="Calibri"/>
                 <a:cs typeface="Calibri"/>
               </a:rPr>
-              <a:t>Compose tidak release port saat container crash unexpected.</a:t>
+              <a:t>Host port dipakai proses atau container lain.</a:t>
             </a:r>
             <a:endParaRPr sz="1050"/>
           </a:p>
@@ -32312,7 +32235,7 @@
                 <a:ea typeface="Calibri"/>
                 <a:cs typeface="Calibri"/>
               </a:rPr>
-              <a:t>docker compose down dulu, atau pakai port host yang beda</a:t>
+              <a:t>Cari pemilik port. Hentikan lab terkait atau ubah host port.</a:t>
             </a:r>
             <a:endParaRPr sz="1000"/>
           </a:p>
@@ -32970,14 +32893,20 @@
       </p:sp>
       <p:pic>
         <p:nvPicPr>
-          <p:cNvPr id="48" name="Image 0"/>
+          <p:cNvPr id="48" name="Image 0">
+            <a:extLst xmlns:a="http://schemas.openxmlformats.org/drawingml/2006/main">
+              <a:ext uri="{FF2B5EF4-FFF2-40B4-BE49-F238E27FC236}">
+                <a16:creationId xmlns:a16="http://schemas.microsoft.com/office/drawing/2014/main" id="{7E467FE0-D431-45A0-8FBA-C6F9240DA697}"/>
+              </a:ext>
+            </a:extLst>
+          </p:cNvPr>
           <p:cNvPicPr>
             <a:picLocks xmlns:a="http://schemas.openxmlformats.org/drawingml/2006/main" noChangeAspect="1"/>
           </p:cNvPicPr>
           <p:nvPr/>
         </p:nvPicPr>
         <p:blipFill>
-          <a:blip xmlns:r="http://schemas.openxmlformats.org/officeDocument/2006/relationships" xmlns:a="http://schemas.openxmlformats.org/drawingml/2006/main" r:embed="R294b93aaf0a2449f"/>
+          <a:blip xmlns:r="http://schemas.openxmlformats.org/officeDocument/2006/relationships" xmlns:a="http://schemas.openxmlformats.org/drawingml/2006/main" r:embed="Rfe6faf543a4d4de1"/>
           <a:stretch xmlns:a="http://schemas.openxmlformats.org/drawingml/2006/main">
             <a:fillRect l="0" t="0" r="0" b="0"/>
           </a:stretch>
@@ -32994,14 +32923,20 @@
       </p:pic>
       <p:pic>
         <p:nvPicPr>
-          <p:cNvPr id="49" name="Image 1"/>
+          <p:cNvPr id="49" name="Image 1">
+            <a:extLst xmlns:a="http://schemas.openxmlformats.org/drawingml/2006/main">
+              <a:ext uri="{FF2B5EF4-FFF2-40B4-BE49-F238E27FC236}">
+                <a16:creationId xmlns:a16="http://schemas.microsoft.com/office/drawing/2014/main" id="{467B0118-3A1F-4430-A134-24D2CBD52EAD}"/>
+              </a:ext>
+            </a:extLst>
+          </p:cNvPr>
           <p:cNvPicPr>
             <a:picLocks xmlns:a="http://schemas.openxmlformats.org/drawingml/2006/main" noChangeAspect="1"/>
           </p:cNvPicPr>
           <p:nvPr/>
         </p:nvPicPr>
         <p:blipFill>
-          <a:blip xmlns:r="http://schemas.openxmlformats.org/officeDocument/2006/relationships" xmlns:a="http://schemas.openxmlformats.org/drawingml/2006/main" r:embed="Rdffaf70734834acd"/>
+          <a:blip xmlns:r="http://schemas.openxmlformats.org/officeDocument/2006/relationships" xmlns:a="http://schemas.openxmlformats.org/drawingml/2006/main" r:embed="R6779a801667a41b5"/>
           <a:stretch xmlns:a="http://schemas.openxmlformats.org/drawingml/2006/main">
             <a:fillRect l="0" t="0" r="0" b="0"/>
           </a:stretch>
@@ -33286,14 +33221,20 @@
       </p:sp>
       <p:pic>
         <p:nvPicPr>
-          <p:cNvPr id="57" name="Image 2"/>
+          <p:cNvPr id="57" name="Image 2">
+            <a:extLst xmlns:a="http://schemas.openxmlformats.org/drawingml/2006/main">
+              <a:ext uri="{FF2B5EF4-FFF2-40B4-BE49-F238E27FC236}">
+                <a16:creationId xmlns:a16="http://schemas.microsoft.com/office/drawing/2014/main" id="{282A5EC3-2985-4FB0-88EC-A8EF784007D9}"/>
+              </a:ext>
+            </a:extLst>
+          </p:cNvPr>
           <p:cNvPicPr>
             <a:picLocks xmlns:a="http://schemas.openxmlformats.org/drawingml/2006/main" noChangeAspect="1"/>
           </p:cNvPicPr>
           <p:nvPr/>
         </p:nvPicPr>
         <p:blipFill>
-          <a:blip xmlns:r="http://schemas.openxmlformats.org/officeDocument/2006/relationships" xmlns:a="http://schemas.openxmlformats.org/drawingml/2006/main" r:embed="R7a57d9113a1d42b4"/>
+          <a:blip xmlns:r="http://schemas.openxmlformats.org/officeDocument/2006/relationships" xmlns:a="http://schemas.openxmlformats.org/drawingml/2006/main" r:embed="Raaad1d3bb7e24e4d"/>
           <a:stretch xmlns:a="http://schemas.openxmlformats.org/drawingml/2006/main">
             <a:fillRect l="0" t="0" r="0" b="0"/>
           </a:stretch>
@@ -33547,14 +33488,20 @@
       </p:sp>
       <p:pic>
         <p:nvPicPr>
-          <p:cNvPr id="64" name="Image 3"/>
+          <p:cNvPr id="64" name="Image 3">
+            <a:extLst xmlns:a="http://schemas.openxmlformats.org/drawingml/2006/main">
+              <a:ext uri="{FF2B5EF4-FFF2-40B4-BE49-F238E27FC236}">
+                <a16:creationId xmlns:a16="http://schemas.microsoft.com/office/drawing/2014/main" id="{090F50AF-5591-426D-BAA7-C7B0E84AB585}"/>
+              </a:ext>
+            </a:extLst>
+          </p:cNvPr>
           <p:cNvPicPr>
             <a:picLocks xmlns:a="http://schemas.openxmlformats.org/drawingml/2006/main" noChangeAspect="1"/>
           </p:cNvPicPr>
           <p:nvPr/>
         </p:nvPicPr>
         <p:blipFill>
-          <a:blip xmlns:r="http://schemas.openxmlformats.org/officeDocument/2006/relationships" xmlns:a="http://schemas.openxmlformats.org/drawingml/2006/main" r:embed="R457e2aa080664737"/>
+          <a:blip xmlns:r="http://schemas.openxmlformats.org/officeDocument/2006/relationships" xmlns:a="http://schemas.openxmlformats.org/drawingml/2006/main" r:embed="R8427d2f6bfa24713"/>
           <a:stretch xmlns:a="http://schemas.openxmlformats.org/drawingml/2006/main">
             <a:fillRect l="0" t="0" r="0" b="0"/>
           </a:stretch>
@@ -33808,14 +33755,20 @@
       </p:sp>
       <p:pic>
         <p:nvPicPr>
-          <p:cNvPr id="71" name="Image 4"/>
+          <p:cNvPr id="71" name="Image 4">
+            <a:extLst xmlns:a="http://schemas.openxmlformats.org/drawingml/2006/main">
+              <a:ext uri="{FF2B5EF4-FFF2-40B4-BE49-F238E27FC236}">
+                <a16:creationId xmlns:a16="http://schemas.microsoft.com/office/drawing/2014/main" id="{63ABCB39-F7F9-4A93-A392-CBB1CD7568F1}"/>
+              </a:ext>
+            </a:extLst>
+          </p:cNvPr>
           <p:cNvPicPr>
             <a:picLocks xmlns:a="http://schemas.openxmlformats.org/drawingml/2006/main" noChangeAspect="1"/>
           </p:cNvPicPr>
           <p:nvPr/>
         </p:nvPicPr>
         <p:blipFill>
-          <a:blip xmlns:r="http://schemas.openxmlformats.org/officeDocument/2006/relationships" xmlns:a="http://schemas.openxmlformats.org/drawingml/2006/main" r:embed="Re77a2e9a0aac4be3"/>
+          <a:blip xmlns:r="http://schemas.openxmlformats.org/officeDocument/2006/relationships" xmlns:a="http://schemas.openxmlformats.org/drawingml/2006/main" r:embed="R97bf5e7468a24a3b"/>
           <a:stretch xmlns:a="http://schemas.openxmlformats.org/drawingml/2006/main">
             <a:fillRect l="0" t="0" r="0" b="0"/>
           </a:stretch>
@@ -34069,14 +34022,20 @@
       </p:sp>
       <p:pic>
         <p:nvPicPr>
-          <p:cNvPr id="78" name="Image 5"/>
+          <p:cNvPr id="78" name="Image 5">
+            <a:extLst xmlns:a="http://schemas.openxmlformats.org/drawingml/2006/main">
+              <a:ext uri="{FF2B5EF4-FFF2-40B4-BE49-F238E27FC236}">
+                <a16:creationId xmlns:a16="http://schemas.microsoft.com/office/drawing/2014/main" id="{EEC24CFB-9490-4604-8AB6-BD652E1D5F9B}"/>
+              </a:ext>
+            </a:extLst>
+          </p:cNvPr>
           <p:cNvPicPr>
             <a:picLocks xmlns:a="http://schemas.openxmlformats.org/drawingml/2006/main" noChangeAspect="1"/>
           </p:cNvPicPr>
           <p:nvPr/>
         </p:nvPicPr>
         <p:blipFill>
-          <a:blip xmlns:r="http://schemas.openxmlformats.org/officeDocument/2006/relationships" xmlns:a="http://schemas.openxmlformats.org/drawingml/2006/main" r:embed="R5b7b0e63731c4233"/>
+          <a:blip xmlns:r="http://schemas.openxmlformats.org/officeDocument/2006/relationships" xmlns:a="http://schemas.openxmlformats.org/drawingml/2006/main" r:embed="Rf2a04e284c8a423b"/>
           <a:stretch xmlns:a="http://schemas.openxmlformats.org/drawingml/2006/main">
             <a:fillRect l="0" t="0" r="0" b="0"/>
           </a:stretch>
@@ -34396,14 +34355,20 @@
       </p:sp>
       <p:pic>
         <p:nvPicPr>
-          <p:cNvPr id="47" name="Image 0"/>
+          <p:cNvPr id="47" name="Image 0">
+            <a:extLst xmlns:a="http://schemas.openxmlformats.org/drawingml/2006/main">
+              <a:ext uri="{FF2B5EF4-FFF2-40B4-BE49-F238E27FC236}">
+                <a16:creationId xmlns:a16="http://schemas.microsoft.com/office/drawing/2014/main" id="{CAF4A79E-FABB-4963-A05D-31B87E196085}"/>
+              </a:ext>
+            </a:extLst>
+          </p:cNvPr>
           <p:cNvPicPr>
             <a:picLocks xmlns:a="http://schemas.openxmlformats.org/drawingml/2006/main" noChangeAspect="1"/>
           </p:cNvPicPr>
           <p:nvPr/>
         </p:nvPicPr>
         <p:blipFill>
-          <a:blip xmlns:r="http://schemas.openxmlformats.org/officeDocument/2006/relationships" xmlns:a="http://schemas.openxmlformats.org/drawingml/2006/main" r:embed="Rbeb01ba974ec4e49"/>
+          <a:blip xmlns:r="http://schemas.openxmlformats.org/officeDocument/2006/relationships" xmlns:a="http://schemas.openxmlformats.org/drawingml/2006/main" r:embed="R3527f5b3c6b6474d"/>
           <a:stretch xmlns:a="http://schemas.openxmlformats.org/drawingml/2006/main">
             <a:fillRect l="0" t="0" r="0" b="0"/>
           </a:stretch>
@@ -34420,14 +34385,20 @@
       </p:pic>
       <p:pic>
         <p:nvPicPr>
-          <p:cNvPr id="48" name="Image 1"/>
+          <p:cNvPr id="48" name="Image 1">
+            <a:extLst xmlns:a="http://schemas.openxmlformats.org/drawingml/2006/main">
+              <a:ext uri="{FF2B5EF4-FFF2-40B4-BE49-F238E27FC236}">
+                <a16:creationId xmlns:a16="http://schemas.microsoft.com/office/drawing/2014/main" id="{55D5C846-14AC-4848-ADAE-2839F0100BF4}"/>
+              </a:ext>
+            </a:extLst>
+          </p:cNvPr>
           <p:cNvPicPr>
             <a:picLocks xmlns:a="http://schemas.openxmlformats.org/drawingml/2006/main" noChangeAspect="1"/>
           </p:cNvPicPr>
           <p:nvPr/>
         </p:nvPicPr>
         <p:blipFill>
-          <a:blip xmlns:r="http://schemas.openxmlformats.org/officeDocument/2006/relationships" xmlns:a="http://schemas.openxmlformats.org/drawingml/2006/main" r:embed="Re41f9ef26dd445e1"/>
+          <a:blip xmlns:r="http://schemas.openxmlformats.org/officeDocument/2006/relationships" xmlns:a="http://schemas.openxmlformats.org/drawingml/2006/main" r:embed="Re2b556f5f3ac400c"/>
           <a:stretch xmlns:a="http://schemas.openxmlformats.org/drawingml/2006/main">
             <a:fillRect l="0" t="0" r="0" b="0"/>
           </a:stretch>
@@ -34720,7 +34691,7 @@
                 <a:ea typeface="Consolas"/>
                 <a:cs typeface="Consolas"/>
               </a:rPr>
-              <a:t>compose up -d</a:t>
+              <a:t>docker compose up -d</a:t>
             </a:r>
             <a:endParaRPr sz="1100"/>
           </a:p>
@@ -34740,9 +34711,8 @@
                 <a:ea typeface="Consolas"/>
                 <a:cs typeface="Consolas"/>
               </a:rPr>
-              <a:t>compose down</a:t>
-            </a:r>
-            <a:endParaRPr sz="1100"/>
+              <a:t>docker compose down</a:t>
+            </a:r>
           </a:p>
           <a:p xmlns:a="http://schemas.openxmlformats.org/drawingml/2006/main">
             <a:pPr marL="0" indent="0">
@@ -34760,9 +34730,8 @@
                 <a:ea typeface="Consolas"/>
                 <a:cs typeface="Consolas"/>
               </a:rPr>
-              <a:t>compose restart api</a:t>
-            </a:r>
-            <a:endParaRPr sz="1100"/>
+              <a:t>docker compose restart api</a:t>
+            </a:r>
           </a:p>
           <a:p xmlns:a="http://schemas.openxmlformats.org/drawingml/2006/main">
             <a:pPr marL="0" indent="0">
@@ -34780,9 +34749,8 @@
                 <a:ea typeface="Consolas"/>
                 <a:cs typeface="Consolas"/>
               </a:rPr>
-              <a:t>compose stop / start</a:t>
-            </a:r>
-            <a:endParaRPr sz="1100"/>
+              <a:t>docker compose stop api</a:t>
+            </a:r>
           </a:p>
           <a:p xmlns:a="http://schemas.openxmlformats.org/drawingml/2006/main">
             <a:pPr marL="0" indent="0">
@@ -34800,9 +34768,8 @@
                 <a:ea typeface="Consolas"/>
                 <a:cs typeface="Consolas"/>
               </a:rPr>
-              <a:t>compose ps</a:t>
-            </a:r>
-            <a:endParaRPr sz="1100"/>
+              <a:t>docker compose ps</a:t>
+            </a:r>
           </a:p>
           <a:p xmlns:a="http://schemas.openxmlformats.org/drawingml/2006/main">
             <a:pPr marL="0" indent="0">
@@ -34820,9 +34787,8 @@
                 <a:ea typeface="Consolas"/>
                 <a:cs typeface="Consolas"/>
               </a:rPr>
-              <a:t>compose down -v (!)</a:t>
-            </a:r>
-            <a:endParaRPr sz="1100"/>
+              <a:t>-v menghapus volume</a:t>
+            </a:r>
           </a:p>
         </p:txBody>
       </p:sp>
@@ -34981,7 +34947,7 @@
                 <a:ea typeface="Consolas"/>
                 <a:cs typeface="Consolas"/>
               </a:rPr>
-              <a:t>compose logs -f</a:t>
+              <a:t>docker compose logs -f</a:t>
             </a:r>
             <a:endParaRPr sz="1100"/>
           </a:p>
@@ -35001,9 +34967,8 @@
                 <a:ea typeface="Consolas"/>
                 <a:cs typeface="Consolas"/>
               </a:rPr>
-              <a:t>compose logs api</a:t>
-            </a:r>
-            <a:endParaRPr sz="1100"/>
+              <a:t>docker compose logs api</a:t>
+            </a:r>
           </a:p>
           <a:p xmlns:a="http://schemas.openxmlformats.org/drawingml/2006/main">
             <a:pPr marL="0" indent="0">
@@ -35021,9 +34986,8 @@
                 <a:ea typeface="Consolas"/>
                 <a:cs typeface="Consolas"/>
               </a:rPr>
-              <a:t>compose exec api bash</a:t>
-            </a:r>
-            <a:endParaRPr sz="1100"/>
+              <a:t>docker compose exec api sh</a:t>
+            </a:r>
           </a:p>
           <a:p xmlns:a="http://schemas.openxmlformats.org/drawingml/2006/main">
             <a:pPr marL="0" indent="0">
@@ -35041,9 +35005,8 @@
                 <a:ea typeface="Consolas"/>
                 <a:cs typeface="Consolas"/>
               </a:rPr>
-              <a:t>compose top</a:t>
-            </a:r>
-            <a:endParaRPr sz="1100"/>
+              <a:t>docker compose top</a:t>
+            </a:r>
           </a:p>
           <a:p xmlns:a="http://schemas.openxmlformats.org/drawingml/2006/main">
             <a:pPr marL="0" indent="0">
@@ -35061,9 +35024,8 @@
                 <a:ea typeface="Consolas"/>
                 <a:cs typeface="Consolas"/>
               </a:rPr>
-              <a:t>compose port api 3000</a:t>
-            </a:r>
-            <a:endParaRPr sz="1100"/>
+              <a:t>docker compose port api 8000</a:t>
+            </a:r>
           </a:p>
           <a:p xmlns:a="http://schemas.openxmlformats.org/drawingml/2006/main">
             <a:pPr marL="0" indent="0">
@@ -35081,9 +35043,8 @@
                 <a:ea typeface="Consolas"/>
                 <a:cs typeface="Consolas"/>
               </a:rPr>
-              <a:t>compose config</a:t>
-            </a:r>
-            <a:endParaRPr sz="1100"/>
+              <a:t>docker compose config -q</a:t>
+            </a:r>
           </a:p>
         </p:txBody>
       </p:sp>
@@ -35262,9 +35223,8 @@
                 <a:ea typeface="Consolas"/>
                 <a:cs typeface="Consolas"/>
               </a:rPr>
-              <a:t>compose build</a:t>
-            </a:r>
-            <a:endParaRPr sz="1100"/>
+              <a:t>docker compose build</a:t>
+            </a:r>
           </a:p>
           <a:p xmlns:a="http://schemas.openxmlformats.org/drawingml/2006/main">
             <a:pPr marL="0" indent="0">
@@ -35282,9 +35242,8 @@
                 <a:ea typeface="Consolas"/>
                 <a:cs typeface="Consolas"/>
               </a:rPr>
-              <a:t>compose build --no-cache</a:t>
-            </a:r>
-            <a:endParaRPr sz="1100"/>
+              <a:t>docker compose up --build</a:t>
+            </a:r>
           </a:p>
           <a:p xmlns:a="http://schemas.openxmlformats.org/drawingml/2006/main">
             <a:pPr marL="0" indent="0">
@@ -35302,9 +35261,8 @@
                 <a:ea typeface="Consolas"/>
                 <a:cs typeface="Consolas"/>
               </a:rPr>
-              <a:t>compose up --build</a:t>
-            </a:r>
-            <a:endParaRPr sz="1100"/>
+              <a:t>docker compose pull</a:t>
+            </a:r>
           </a:p>
           <a:p xmlns:a="http://schemas.openxmlformats.org/drawingml/2006/main">
             <a:pPr marL="0" indent="0">
@@ -35322,9 +35280,8 @@
                 <a:ea typeface="Consolas"/>
                 <a:cs typeface="Consolas"/>
               </a:rPr>
-              <a:t>compose pull</a:t>
-            </a:r>
-            <a:endParaRPr sz="1100"/>
+              <a:t>image: name:tag</a:t>
+            </a:r>
           </a:p>
           <a:p xmlns:a="http://schemas.openxmlformats.org/drawingml/2006/main">
             <a:pPr marL="0" indent="0">
@@ -35342,9 +35299,8 @@
                 <a:ea typeface="Consolas"/>
                 <a:cs typeface="Consolas"/>
               </a:rPr>
-              <a:t>image: name:tag</a:t>
-            </a:r>
-            <a:endParaRPr sz="1100"/>
+              <a:t>Ukur hasil docker images</a:t>
+            </a:r>
           </a:p>
         </p:txBody>
       </p:sp>
@@ -35503,7 +35459,7 @@
                 <a:ea typeface="Consolas"/>
                 <a:cs typeface="Consolas"/>
               </a:rPr>
-              <a:t>db-data:/var/lib/...</a:t>
+              <a:t>db_data:/var/lib/...</a:t>
             </a:r>
             <a:endParaRPr sz="1100"/>
           </a:p>
@@ -35525,7 +35481,6 @@
               </a:rPr>
               <a:t>./src:/app/src</a:t>
             </a:r>
-            <a:endParaRPr sz="1100"/>
           </a:p>
           <a:p xmlns:a="http://schemas.openxmlformats.org/drawingml/2006/main">
             <a:pPr marL="0" indent="0">
@@ -35545,7 +35500,6 @@
               </a:rPr>
               <a:t>./conf.yml:/cfg:ro</a:t>
             </a:r>
-            <a:endParaRPr sz="1100"/>
           </a:p>
           <a:p xmlns:a="http://schemas.openxmlformats.org/drawingml/2006/main">
             <a:pPr marL="0" indent="0">
@@ -35563,9 +35517,8 @@
                 <a:ea typeface="Consolas"/>
                 <a:cs typeface="Consolas"/>
               </a:rPr>
-              <a:t>/app/node_modules</a:t>
-            </a:r>
-            <a:endParaRPr sz="1100"/>
+              <a:t>docker volume ls</a:t>
+            </a:r>
           </a:p>
           <a:p xmlns:a="http://schemas.openxmlformats.org/drawingml/2006/main">
             <a:pPr marL="0" indent="0">
@@ -35583,9 +35536,8 @@
                 <a:ea typeface="Consolas"/>
                 <a:cs typeface="Consolas"/>
               </a:rPr>
-              <a:t>volume ls / inspect</a:t>
-            </a:r>
-            <a:endParaRPr sz="1100"/>
+              <a:t>docker volume inspect &lt;v&gt;</a:t>
+            </a:r>
           </a:p>
           <a:p xmlns:a="http://schemas.openxmlformats.org/drawingml/2006/main">
             <a:pPr marL="0" indent="0">
@@ -35603,9 +35555,8 @@
                 <a:ea typeface="Consolas"/>
                 <a:cs typeface="Consolas"/>
               </a:rPr>
-              <a:t>down -v hapus volume</a:t>
-            </a:r>
-            <a:endParaRPr sz="1100"/>
+              <a:t>down menjaga named volume</a:t>
+            </a:r>
           </a:p>
         </p:txBody>
       </p:sp>
@@ -35764,7 +35715,7 @@
                 <a:ea typeface="Consolas"/>
                 <a:cs typeface="Consolas"/>
               </a:rPr>
-              <a:t>service name = DNS</a:t>
+              <a:t>Nama service menjadi DNS</a:t>
             </a:r>
             <a:endParaRPr sz="1100"/>
           </a:p>
@@ -35786,7 +35737,6 @@
               </a:rPr>
               <a:t>networks: [frontend]</a:t>
             </a:r>
-            <a:endParaRPr sz="1100"/>
           </a:p>
           <a:p xmlns:a="http://schemas.openxmlformats.org/drawingml/2006/main">
             <a:pPr marL="0" indent="0">
@@ -35806,7 +35756,6 @@
               </a:rPr>
               <a:t>internal: true</a:t>
             </a:r>
-            <a:endParaRPr sz="1100"/>
           </a:p>
           <a:p xmlns:a="http://schemas.openxmlformats.org/drawingml/2006/main">
             <a:pPr marL="0" indent="0">
@@ -35824,9 +35773,8 @@
                 <a:ea typeface="Consolas"/>
                 <a:cs typeface="Consolas"/>
               </a:rPr>
-              <a:t>compose network ls</a:t>
-            </a:r>
-            <a:endParaRPr sz="1100"/>
+              <a:t>docker network ls</a:t>
+            </a:r>
           </a:p>
           <a:p xmlns:a="http://schemas.openxmlformats.org/drawingml/2006/main">
             <a:pPr marL="0" indent="0">
@@ -35844,9 +35792,8 @@
                 <a:ea typeface="Consolas"/>
                 <a:cs typeface="Consolas"/>
               </a:rPr>
-              <a:t>Default = auto-bridge</a:t>
-            </a:r>
-            <a:endParaRPr sz="1100"/>
+              <a:t>docker network inspect &lt;n&gt;</a:t>
+            </a:r>
           </a:p>
           <a:p xmlns:a="http://schemas.openxmlformats.org/drawingml/2006/main">
             <a:pPr marL="0" indent="0">
@@ -35864,9 +35811,8 @@
                 <a:ea typeface="Consolas"/>
                 <a:cs typeface="Consolas"/>
               </a:rPr>
-              <a:t>Scale = round-robin</a:t>
-            </a:r>
-            <a:endParaRPr sz="1100"/>
+              <a:t>Replica perlu proxy</a:t>
+            </a:r>
           </a:p>
         </p:txBody>
       </p:sp>
@@ -36286,7 +36232,7 @@
                 <a:ea typeface="Consolas"/>
                 <a:cs typeface="Consolas"/>
               </a:rPr>
-              <a:t>healthcheck:</a:t>
+              <a:t>healthcheck: per service</a:t>
             </a:r>
             <a:endParaRPr sz="1100"/>
           </a:p>
@@ -36306,9 +36252,8 @@
                 <a:ea typeface="Consolas"/>
                 <a:cs typeface="Consolas"/>
               </a:rPr>
-              <a:t>test: [CMD, ping]</a:t>
-            </a:r>
-            <a:endParaRPr sz="1100"/>
+              <a:t>DB memakai pg_isready</a:t>
+            </a:r>
           </a:p>
           <a:p xmlns:a="http://schemas.openxmlformats.org/drawingml/2006/main">
             <a:pPr marL="0" indent="0">
@@ -36326,9 +36271,8 @@
                 <a:ea typeface="Consolas"/>
                 <a:cs typeface="Consolas"/>
               </a:rPr>
-              <a:t>interval: 5s</a:t>
-            </a:r>
-            <a:endParaRPr sz="1100"/>
+              <a:t>Redis memakai redis-cli ping</a:t>
+            </a:r>
           </a:p>
           <a:p xmlns:a="http://schemas.openxmlformats.org/drawingml/2006/main">
             <a:pPr marL="0" indent="0">
@@ -36346,9 +36290,8 @@
                 <a:ea typeface="Consolas"/>
                 <a:cs typeface="Consolas"/>
               </a:rPr>
-              <a:t>retries: 5</a:t>
-            </a:r>
-            <a:endParaRPr sz="1100"/>
+              <a:t>API memeriksa /health</a:t>
+            </a:r>
           </a:p>
           <a:p xmlns:a="http://schemas.openxmlformats.org/drawingml/2006/main">
             <a:pPr marL="0" indent="0">
@@ -36366,9 +36309,8 @@
                 <a:ea typeface="Consolas"/>
                 <a:cs typeface="Consolas"/>
               </a:rPr>
-              <a:t>depends_on:</a:t>
-            </a:r>
-            <a:endParaRPr sz="1100"/>
+              <a:t>depends_on: service_healthy</a:t>
+            </a:r>
           </a:p>
           <a:p xmlns:a="http://schemas.openxmlformats.org/drawingml/2006/main">
             <a:pPr marL="0" indent="0">
@@ -36386,9 +36328,8 @@
                 <a:ea typeface="Consolas"/>
                 <a:cs typeface="Consolas"/>
               </a:rPr>
-              <a:t>condition: service_healthy</a:t>
-            </a:r>
-            <a:endParaRPr sz="1100"/>
+              <a:t>--wait menunggu kesiapan</a:t>
+            </a:r>
           </a:p>
         </p:txBody>
       </p:sp>
@@ -36547,7 +36488,7 @@
                 <a:ea typeface="Consolas"/>
                 <a:cs typeface="Consolas"/>
               </a:rPr>
-              <a:t>compose.yml = base</a:t>
+              <a:t>compose.yaml sebagai base</a:t>
             </a:r>
             <a:endParaRPr sz="1100"/>
           </a:p>
@@ -36567,9 +36508,8 @@
                 <a:ea typeface="Consolas"/>
                 <a:cs typeface="Consolas"/>
               </a:rPr>
-              <a:t>compose.override.yml dev</a:t>
-            </a:r>
-            <a:endParaRPr sz="1100"/>
+              <a:t>compose.override.yaml dev</a:t>
+            </a:r>
           </a:p>
           <a:p xmlns:a="http://schemas.openxmlformats.org/drawingml/2006/main">
             <a:pPr marL="0" indent="0">
@@ -36587,9 +36527,8 @@
                 <a:ea typeface="Consolas"/>
                 <a:cs typeface="Consolas"/>
               </a:rPr>
-              <a:t>compose.prod.yml prod</a:t>
-            </a:r>
-            <a:endParaRPr sz="1100"/>
+              <a:t>-f compose.prod.yaml</a:t>
+            </a:r>
           </a:p>
           <a:p xmlns:a="http://schemas.openxmlformats.org/drawingml/2006/main">
             <a:pPr marL="0" indent="0">
@@ -36607,9 +36546,8 @@
                 <a:ea typeface="Consolas"/>
                 <a:cs typeface="Consolas"/>
               </a:rPr>
-              <a:t>-f file -f file2</a:t>
-            </a:r>
-            <a:endParaRPr sz="1100"/>
+              <a:t>Gabung sesuai urutan -f</a:t>
+            </a:r>
           </a:p>
           <a:p xmlns:a="http://schemas.openxmlformats.org/drawingml/2006/main">
             <a:pPr marL="0" indent="0">
@@ -36627,9 +36565,8 @@
                 <a:ea typeface="Consolas"/>
                 <a:cs typeface="Consolas"/>
               </a:rPr>
-              <a:t>Auto-merge</a:t>
-            </a:r>
-            <a:endParaRPr sz="1100"/>
+              <a:t>Aturan merge per field</a:t>
+            </a:r>
           </a:p>
           <a:p xmlns:a="http://schemas.openxmlformats.org/drawingml/2006/main">
             <a:pPr marL="0" indent="0">
@@ -36647,9 +36584,8 @@
                 <a:ea typeface="Consolas"/>
                 <a:cs typeface="Consolas"/>
               </a:rPr>
-              <a:t>Override &gt; base</a:t>
-            </a:r>
-            <a:endParaRPr sz="1100"/>
+              <a:t>Cek docker compose config</a:t>
+            </a:r>
           </a:p>
         </p:txBody>
       </p:sp>
@@ -36809,14 +36745,20 @@
       </p:sp>
       <p:pic>
         <p:nvPicPr>
-          <p:cNvPr id="56" name="Image 0"/>
+          <p:cNvPr id="56" name="Image 0">
+            <a:extLst xmlns:a="http://schemas.openxmlformats.org/drawingml/2006/main">
+              <a:ext uri="{FF2B5EF4-FFF2-40B4-BE49-F238E27FC236}">
+                <a16:creationId xmlns:a16="http://schemas.microsoft.com/office/drawing/2014/main" id="{4D97DF95-B86E-44C5-BD6E-8CB375DDFC70}"/>
+              </a:ext>
+            </a:extLst>
+          </p:cNvPr>
           <p:cNvPicPr>
             <a:picLocks xmlns:a="http://schemas.openxmlformats.org/drawingml/2006/main" noChangeAspect="1"/>
           </p:cNvPicPr>
           <p:nvPr/>
         </p:nvPicPr>
         <p:blipFill>
-          <a:blip xmlns:r="http://schemas.openxmlformats.org/officeDocument/2006/relationships" xmlns:a="http://schemas.openxmlformats.org/drawingml/2006/main" r:embed="R32643cfc08e04ace"/>
+          <a:blip xmlns:r="http://schemas.openxmlformats.org/officeDocument/2006/relationships" xmlns:a="http://schemas.openxmlformats.org/drawingml/2006/main" r:embed="R63e20bf477b64537"/>
           <a:stretch xmlns:a="http://schemas.openxmlformats.org/drawingml/2006/main">
             <a:fillRect l="0" t="0" r="0" b="0"/>
           </a:stretch>
@@ -36833,14 +36775,20 @@
       </p:pic>
       <p:pic>
         <p:nvPicPr>
-          <p:cNvPr id="57" name="Image 1"/>
+          <p:cNvPr id="57" name="Image 1">
+            <a:extLst xmlns:a="http://schemas.openxmlformats.org/drawingml/2006/main">
+              <a:ext uri="{FF2B5EF4-FFF2-40B4-BE49-F238E27FC236}">
+                <a16:creationId xmlns:a16="http://schemas.microsoft.com/office/drawing/2014/main" id="{DE705DA8-6D34-446A-94D5-C03F407733C6}"/>
+              </a:ext>
+            </a:extLst>
+          </p:cNvPr>
           <p:cNvPicPr>
             <a:picLocks xmlns:a="http://schemas.openxmlformats.org/drawingml/2006/main" noChangeAspect="1"/>
           </p:cNvPicPr>
           <p:nvPr/>
         </p:nvPicPr>
         <p:blipFill>
-          <a:blip xmlns:r="http://schemas.openxmlformats.org/officeDocument/2006/relationships" xmlns:a="http://schemas.openxmlformats.org/drawingml/2006/main" r:embed="R99fee9c5eb33486c"/>
+          <a:blip xmlns:r="http://schemas.openxmlformats.org/officeDocument/2006/relationships" xmlns:a="http://schemas.openxmlformats.org/drawingml/2006/main" r:embed="R171c7124920542c7"/>
           <a:stretch xmlns:a="http://schemas.openxmlformats.org/drawingml/2006/main">
             <a:fillRect l="0" t="0" r="0" b="0"/>
           </a:stretch>
@@ -37893,7 +37841,7 @@
                 <a:ea typeface="Calibri"/>
                 <a:cs typeface="Calibri"/>
               </a:rPr>
-              <a:t>Production: jangan password di env. Pakai secrets file.</a:t>
+              <a:t>Password: file secret lokal perlu perlindungan akses.</a:t>
             </a:r>
             <a:endParaRPr sz="1050"/>
           </a:p>
@@ -37934,14 +37882,20 @@
       </p:sp>
       <p:pic>
         <p:nvPicPr>
-          <p:cNvPr id="84" name="Image 2"/>
+          <p:cNvPr id="84" name="Image 2">
+            <a:extLst xmlns:a="http://schemas.openxmlformats.org/drawingml/2006/main">
+              <a:ext uri="{FF2B5EF4-FFF2-40B4-BE49-F238E27FC236}">
+                <a16:creationId xmlns:a16="http://schemas.microsoft.com/office/drawing/2014/main" id="{F6478537-8C72-4C3A-9E7B-A0BB55422651}"/>
+              </a:ext>
+            </a:extLst>
+          </p:cNvPr>
           <p:cNvPicPr>
             <a:picLocks xmlns:a="http://schemas.openxmlformats.org/drawingml/2006/main" noChangeAspect="1"/>
           </p:cNvPicPr>
           <p:nvPr/>
         </p:nvPicPr>
         <p:blipFill>
-          <a:blip xmlns:r="http://schemas.openxmlformats.org/officeDocument/2006/relationships" xmlns:a="http://schemas.openxmlformats.org/drawingml/2006/main" r:embed="Rd3471f5e5b7647e7"/>
+          <a:blip xmlns:r="http://schemas.openxmlformats.org/officeDocument/2006/relationships" xmlns:a="http://schemas.openxmlformats.org/drawingml/2006/main" r:embed="R3e4dbd45865344f7"/>
           <a:stretch xmlns:a="http://schemas.openxmlformats.org/drawingml/2006/main">
             <a:fillRect l="0" t="0" r="0" b="0"/>
           </a:stretch>
@@ -38196,14 +38150,20 @@
       </p:sp>
       <p:pic>
         <p:nvPicPr>
-          <p:cNvPr id="89" name="Image 3"/>
+          <p:cNvPr id="89" name="Image 3">
+            <a:extLst xmlns:a="http://schemas.openxmlformats.org/drawingml/2006/main">
+              <a:ext uri="{FF2B5EF4-FFF2-40B4-BE49-F238E27FC236}">
+                <a16:creationId xmlns:a16="http://schemas.microsoft.com/office/drawing/2014/main" id="{A43849C8-9BD6-451D-AF69-32CE79CA0BC4}"/>
+              </a:ext>
+            </a:extLst>
+          </p:cNvPr>
           <p:cNvPicPr>
             <a:picLocks xmlns:a="http://schemas.openxmlformats.org/drawingml/2006/main" noChangeAspect="1"/>
           </p:cNvPicPr>
           <p:nvPr/>
         </p:nvPicPr>
         <p:blipFill>
-          <a:blip xmlns:r="http://schemas.openxmlformats.org/officeDocument/2006/relationships" xmlns:a="http://schemas.openxmlformats.org/drawingml/2006/main" r:embed="R4ff0026f62934447"/>
+          <a:blip xmlns:r="http://schemas.openxmlformats.org/officeDocument/2006/relationships" xmlns:a="http://schemas.openxmlformats.org/drawingml/2006/main" r:embed="R7234a4dabb0a464a"/>
           <a:stretch xmlns:a="http://schemas.openxmlformats.org/drawingml/2006/main">
             <a:fillRect l="0" t="0" r="0" b="0"/>
           </a:stretch>
@@ -38391,14 +38351,20 @@
       </p:sp>
       <p:pic>
         <p:nvPicPr>
-          <p:cNvPr id="94" name="Image 4"/>
+          <p:cNvPr id="94" name="Image 4">
+            <a:extLst xmlns:a="http://schemas.openxmlformats.org/drawingml/2006/main">
+              <a:ext uri="{FF2B5EF4-FFF2-40B4-BE49-F238E27FC236}">
+                <a16:creationId xmlns:a16="http://schemas.microsoft.com/office/drawing/2014/main" id="{132B4185-D5C1-470A-92F4-42A7991A00FE}"/>
+              </a:ext>
+            </a:extLst>
+          </p:cNvPr>
           <p:cNvPicPr>
             <a:picLocks xmlns:a="http://schemas.openxmlformats.org/drawingml/2006/main" noChangeAspect="1"/>
           </p:cNvPicPr>
           <p:nvPr/>
         </p:nvPicPr>
         <p:blipFill>
-          <a:blip xmlns:r="http://schemas.openxmlformats.org/officeDocument/2006/relationships" xmlns:a="http://schemas.openxmlformats.org/drawingml/2006/main" r:embed="R40a215b8129346a3"/>
+          <a:blip xmlns:r="http://schemas.openxmlformats.org/officeDocument/2006/relationships" xmlns:a="http://schemas.openxmlformats.org/drawingml/2006/main" r:embed="Rbb1c67d66c4e4699"/>
           <a:stretch xmlns:a="http://schemas.openxmlformats.org/drawingml/2006/main">
             <a:fillRect l="0" t="0" r="0" b="0"/>
           </a:stretch>
@@ -39015,7 +38981,7 @@
                 <a:latin typeface="Calibri"/>
                 <a:ea typeface="Calibri"/>
                 <a:cs typeface="Calibri"/>
-                <a:hlinkClick xmlns:r="http://schemas.openxmlformats.org/officeDocument/2006/relationships" r:id="Rf83f0f436dd04663"/>
+                <a:hlinkClick xmlns:r="http://schemas.openxmlformats.org/officeDocument/2006/relationships" r:id="Rdda3921cdc8b4d07"/>
               </a:rPr>
               <a:t>SeedFlora/meet6CloudService</a:t>
             </a:r>
@@ -39050,7 +39016,7 @@
         <p:spPr>
           <a:xfrm xmlns:a="http://schemas.openxmlformats.org/drawingml/2006/main">
             <a:off x="457200" y="6413500"/>
-            <a:ext cx="11277600" cy="138499"/>
+            <a:ext cx="11277600" cy="137160"/>
           </a:xfrm>
           <a:prstGeom xmlns:a="http://schemas.openxmlformats.org/drawingml/2006/main" prst="rect">
             <a:avLst/>
@@ -39072,7 +39038,7 @@
                 <a:ea typeface="Calibri"/>
                 <a:cs typeface="Calibri"/>
               </a:rPr>
-              <a:t>Materi praktik: </a:t>
+              <a:t>Panduan teori + screenshot: README repo. Materi praktik: </a:t>
             </a:r>
             <a:r>
               <a:rPr sz="900">
@@ -39082,7 +39048,7 @@
                 <a:latin typeface="Calibri"/>
                 <a:ea typeface="Calibri"/>
                 <a:cs typeface="Calibri"/>
-                <a:hlinkClick xmlns:r="http://schemas.openxmlformats.org/officeDocument/2006/relationships" r:id="R420149085e5a471e"/>
+                <a:hlinkClick xmlns:r="http://schemas.openxmlformats.org/officeDocument/2006/relationships" r:id="R9055a0e3759b461b"/>
               </a:rPr>
               <a:t>SeedFlora/meet6CloudService</a:t>
             </a:r>
@@ -39163,6 +39129,7 @@
           <a:lstStyle xmlns:a="http://schemas.openxmlformats.org/drawingml/2006/main"/>
           <a:p xmlns:a="http://schemas.openxmlformats.org/drawingml/2006/main">
             <a:pPr>
+              <a:buNone/>
               <a:defRPr sz="1050" b="0">
                 <a:solidFill>
                   <a:srgbClr val="666666"/>
@@ -39220,6 +39187,7 @@
           <a:lstStyle xmlns:a="http://schemas.openxmlformats.org/drawingml/2006/main"/>
           <a:p xmlns:a="http://schemas.openxmlformats.org/drawingml/2006/main">
             <a:pPr>
+              <a:buNone/>
               <a:defRPr sz="2925" b="1">
                 <a:solidFill>
                   <a:srgbClr val="064C8C"/>
@@ -39277,6 +39245,7 @@
           <a:lstStyle xmlns:a="http://schemas.openxmlformats.org/drawingml/2006/main"/>
           <a:p xmlns:a="http://schemas.openxmlformats.org/drawingml/2006/main">
             <a:pPr>
+              <a:buNone/>
               <a:defRPr sz="1650" b="0">
                 <a:solidFill>
                   <a:srgbClr val="243746"/>
@@ -39334,6 +39303,7 @@
           <a:lstStyle xmlns:a="http://schemas.openxmlformats.org/drawingml/2006/main"/>
           <a:p xmlns:a="http://schemas.openxmlformats.org/drawingml/2006/main">
             <a:pPr>
+              <a:buNone/>
               <a:defRPr sz="1725" b="1">
                 <a:solidFill>
                   <a:srgbClr val="0A3678"/>
@@ -39391,6 +39361,7 @@
           <a:lstStyle xmlns:a="http://schemas.openxmlformats.org/drawingml/2006/main"/>
           <a:p xmlns:a="http://schemas.openxmlformats.org/drawingml/2006/main">
             <a:pPr>
+              <a:buNone/>
               <a:defRPr sz="1575" b="0">
                 <a:solidFill>
                   <a:srgbClr val="243746"/>
@@ -39448,6 +39419,7 @@
           <a:lstStyle xmlns:a="http://schemas.openxmlformats.org/drawingml/2006/main"/>
           <a:p xmlns:a="http://schemas.openxmlformats.org/drawingml/2006/main">
             <a:pPr>
+              <a:buNone/>
               <a:defRPr sz="1425" b="1">
                 <a:solidFill>
                   <a:srgbClr val="0969AD"/>
@@ -39465,7 +39437,7 @@
                 <a:latin typeface="Arial"/>
                 <a:ea typeface="Arial"/>
                 <a:cs typeface="Arial"/>
-                <a:hlinkClick xmlns:r="http://schemas.openxmlformats.org/officeDocument/2006/relationships" r:id="Rd13ac162efdc4032"/>
+                <a:hlinkClick xmlns:r="http://schemas.openxmlformats.org/officeDocument/2006/relationships" r:id="R077bac7ecb2e4a70"/>
               </a:rPr>
               <a:t>Bacaan: How Compose works (Docker Docs)</a:t>
             </a:r>
@@ -39506,6 +39478,7 @@
           <a:lstStyle xmlns:a="http://schemas.openxmlformats.org/drawingml/2006/main"/>
           <a:p xmlns:a="http://schemas.openxmlformats.org/drawingml/2006/main">
             <a:pPr>
+              <a:buNone/>
               <a:defRPr sz="1425" b="1">
                 <a:solidFill>
                   <a:srgbClr val="0969AD"/>
@@ -39523,7 +39496,7 @@
                 <a:latin typeface="Arial"/>
                 <a:ea typeface="Arial"/>
                 <a:cs typeface="Arial"/>
-                <a:hlinkClick xmlns:r="http://schemas.openxmlformats.org/officeDocument/2006/relationships" r:id="R00be6fcf0b444c09"/>
+                <a:hlinkClick xmlns:r="http://schemas.openxmlformats.org/officeDocument/2006/relationships" r:id="R89df1a8c79ac409a"/>
               </a:rPr>
               <a:t>Video: All Things Compose, menit 8:18–16:38</a:t>
             </a:r>
@@ -39564,6 +39537,7 @@
           <a:lstStyle xmlns:a="http://schemas.openxmlformats.org/drawingml/2006/main"/>
           <a:p xmlns:a="http://schemas.openxmlformats.org/drawingml/2006/main">
             <a:pPr>
+              <a:buNone/>
               <a:defRPr sz="1425" b="1">
                 <a:solidFill>
                   <a:srgbClr val="0969AD"/>
@@ -39581,7 +39555,7 @@
                 <a:latin typeface="Arial"/>
                 <a:ea typeface="Arial"/>
                 <a:cs typeface="Arial"/>
-                <a:hlinkClick xmlns:r="http://schemas.openxmlformats.org/officeDocument/2006/relationships" r:id="R7ae3603fb48b48f1"/>
+                <a:hlinkClick xmlns:r="http://schemas.openxmlformats.org/officeDocument/2006/relationships" r:id="R39480d02c245482e"/>
               </a:rPr>
               <a:t>Buka repo Lab 06: SeedFlora/meet6CloudService</a:t>
             </a:r>
@@ -39622,6 +39596,7 @@
           <a:lstStyle xmlns:a="http://schemas.openxmlformats.org/drawingml/2006/main"/>
           <a:p xmlns:a="http://schemas.openxmlformats.org/drawingml/2006/main">
             <a:pPr>
+              <a:buNone/>
               <a:defRPr sz="1200" b="0">
                 <a:solidFill>
                   <a:srgbClr val="566270"/>
@@ -39647,14 +39622,20 @@
       </p:sp>
       <p:pic>
         <p:nvPicPr>
-          <p:cNvPr id="20" name=""/>
+          <p:cNvPr id="20" name="">
+            <a:extLst xmlns:a="http://schemas.openxmlformats.org/drawingml/2006/main">
+              <a:ext uri="{FF2B5EF4-FFF2-40B4-BE49-F238E27FC236}">
+                <a16:creationId xmlns:a16="http://schemas.microsoft.com/office/drawing/2014/main" id="{14ED10E8-C505-4BAB-BE41-64C9AF760729}"/>
+              </a:ext>
+            </a:extLst>
+          </p:cNvPr>
           <p:cNvPicPr>
             <a:picLocks xmlns:a="http://schemas.openxmlformats.org/drawingml/2006/main" noChangeAspect="1"/>
           </p:cNvPicPr>
           <p:nvPr/>
         </p:nvPicPr>
         <p:blipFill>
-          <a:blip xmlns:r="http://schemas.openxmlformats.org/officeDocument/2006/relationships" xmlns:a="http://schemas.openxmlformats.org/drawingml/2006/main" r:embed="R96d6494bfdcf4a32"/>
+          <a:blip xmlns:r="http://schemas.openxmlformats.org/officeDocument/2006/relationships" xmlns:a="http://schemas.openxmlformats.org/drawingml/2006/main" r:embed="R507061b7686e4039"/>
           <a:stretch xmlns:a="http://schemas.openxmlformats.org/drawingml/2006/main"/>
         </p:blipFill>
         <p:spPr>
@@ -39937,14 +39918,20 @@
       </p:sp>
       <p:pic>
         <p:nvPicPr>
-          <p:cNvPr id="24" name="Image 0"/>
+          <p:cNvPr id="24" name="Image 0">
+            <a:extLst xmlns:a="http://schemas.openxmlformats.org/drawingml/2006/main">
+              <a:ext uri="{FF2B5EF4-FFF2-40B4-BE49-F238E27FC236}">
+                <a16:creationId xmlns:a16="http://schemas.microsoft.com/office/drawing/2014/main" id="{7C0DE271-3934-46CB-997C-7C5042D46154}"/>
+              </a:ext>
+            </a:extLst>
+          </p:cNvPr>
           <p:cNvPicPr>
             <a:picLocks xmlns:a="http://schemas.openxmlformats.org/drawingml/2006/main" noChangeAspect="1"/>
           </p:cNvPicPr>
           <p:nvPr/>
         </p:nvPicPr>
         <p:blipFill>
-          <a:blip xmlns:r="http://schemas.openxmlformats.org/officeDocument/2006/relationships" xmlns:a="http://schemas.openxmlformats.org/drawingml/2006/main" r:embed="R988ecb1a3d424b32"/>
+          <a:blip xmlns:r="http://schemas.openxmlformats.org/officeDocument/2006/relationships" xmlns:a="http://schemas.openxmlformats.org/drawingml/2006/main" r:embed="R302ceabbdf12409e"/>
           <a:stretch xmlns:a="http://schemas.openxmlformats.org/drawingml/2006/main">
             <a:fillRect l="0" t="0" r="0" b="0"/>
           </a:stretch>
@@ -39961,14 +39948,20 @@
       </p:pic>
       <p:pic>
         <p:nvPicPr>
-          <p:cNvPr id="25" name="Image 1"/>
+          <p:cNvPr id="25" name="Image 1">
+            <a:extLst xmlns:a="http://schemas.openxmlformats.org/drawingml/2006/main">
+              <a:ext uri="{FF2B5EF4-FFF2-40B4-BE49-F238E27FC236}">
+                <a16:creationId xmlns:a16="http://schemas.microsoft.com/office/drawing/2014/main" id="{2D692682-BB0A-4155-B762-ADC3D4442369}"/>
+              </a:ext>
+            </a:extLst>
+          </p:cNvPr>
           <p:cNvPicPr>
             <a:picLocks xmlns:a="http://schemas.openxmlformats.org/drawingml/2006/main" noChangeAspect="1"/>
           </p:cNvPicPr>
           <p:nvPr/>
         </p:nvPicPr>
         <p:blipFill>
-          <a:blip xmlns:r="http://schemas.openxmlformats.org/officeDocument/2006/relationships" xmlns:a="http://schemas.openxmlformats.org/drawingml/2006/main" r:embed="R2077dacd09c34669"/>
+          <a:blip xmlns:r="http://schemas.openxmlformats.org/officeDocument/2006/relationships" xmlns:a="http://schemas.openxmlformats.org/drawingml/2006/main" r:embed="R5d148f1aff4c495e"/>
           <a:stretch xmlns:a="http://schemas.openxmlformats.org/drawingml/2006/main">
             <a:fillRect l="0" t="0" r="0" b="0"/>
           </a:stretch>
@@ -40327,14 +40320,20 @@
       </p:sp>
       <p:pic>
         <p:nvPicPr>
-          <p:cNvPr id="32" name="Image 0"/>
+          <p:cNvPr id="32" name="Image 0">
+            <a:extLst xmlns:a="http://schemas.openxmlformats.org/drawingml/2006/main">
+              <a:ext uri="{FF2B5EF4-FFF2-40B4-BE49-F238E27FC236}">
+                <a16:creationId xmlns:a16="http://schemas.microsoft.com/office/drawing/2014/main" id="{F6EC8AED-798E-4CD2-95B9-E8006D3FD5FB}"/>
+              </a:ext>
+            </a:extLst>
+          </p:cNvPr>
           <p:cNvPicPr>
             <a:picLocks xmlns:a="http://schemas.openxmlformats.org/drawingml/2006/main" noChangeAspect="1"/>
           </p:cNvPicPr>
           <p:nvPr/>
         </p:nvPicPr>
         <p:blipFill>
-          <a:blip xmlns:r="http://schemas.openxmlformats.org/officeDocument/2006/relationships" xmlns:a="http://schemas.openxmlformats.org/drawingml/2006/main" r:embed="R6ee659f7771f41c0"/>
+          <a:blip xmlns:r="http://schemas.openxmlformats.org/officeDocument/2006/relationships" xmlns:a="http://schemas.openxmlformats.org/drawingml/2006/main" r:embed="Rdfb69097053b4c95"/>
           <a:stretch xmlns:a="http://schemas.openxmlformats.org/drawingml/2006/main">
             <a:fillRect l="0" t="0" r="0" b="0"/>
           </a:stretch>
@@ -40351,14 +40350,20 @@
       </p:pic>
       <p:pic>
         <p:nvPicPr>
-          <p:cNvPr id="33" name="Image 1"/>
+          <p:cNvPr id="33" name="Image 1">
+            <a:extLst xmlns:a="http://schemas.openxmlformats.org/drawingml/2006/main">
+              <a:ext uri="{FF2B5EF4-FFF2-40B4-BE49-F238E27FC236}">
+                <a16:creationId xmlns:a16="http://schemas.microsoft.com/office/drawing/2014/main" id="{5D402F57-14EC-436F-8A1B-ADD1759573A0}"/>
+              </a:ext>
+            </a:extLst>
+          </p:cNvPr>
           <p:cNvPicPr>
             <a:picLocks xmlns:a="http://schemas.openxmlformats.org/drawingml/2006/main" noChangeAspect="1"/>
           </p:cNvPicPr>
           <p:nvPr/>
         </p:nvPicPr>
         <p:blipFill>
-          <a:blip xmlns:r="http://schemas.openxmlformats.org/officeDocument/2006/relationships" xmlns:a="http://schemas.openxmlformats.org/drawingml/2006/main" r:embed="R6d24b080ff22434a"/>
+          <a:blip xmlns:r="http://schemas.openxmlformats.org/officeDocument/2006/relationships" xmlns:a="http://schemas.openxmlformats.org/drawingml/2006/main" r:embed="R5c5352703f9c48ca"/>
           <a:stretch xmlns:a="http://schemas.openxmlformats.org/drawingml/2006/main">
             <a:fillRect l="0" t="0" r="0" b="0"/>
           </a:stretch>
@@ -40531,14 +40536,20 @@
       </p:sp>
       <p:pic>
         <p:nvPicPr>
-          <p:cNvPr id="38" name="Image 2"/>
+          <p:cNvPr id="38" name="Image 2">
+            <a:extLst xmlns:a="http://schemas.openxmlformats.org/drawingml/2006/main">
+              <a:ext uri="{FF2B5EF4-FFF2-40B4-BE49-F238E27FC236}">
+                <a16:creationId xmlns:a16="http://schemas.microsoft.com/office/drawing/2014/main" id="{743510AE-1B1C-4C88-9090-57CE9D33E5A7}"/>
+              </a:ext>
+            </a:extLst>
+          </p:cNvPr>
           <p:cNvPicPr>
             <a:picLocks xmlns:a="http://schemas.openxmlformats.org/drawingml/2006/main" noChangeAspect="1"/>
           </p:cNvPicPr>
           <p:nvPr/>
         </p:nvPicPr>
         <p:blipFill>
-          <a:blip xmlns:r="http://schemas.openxmlformats.org/officeDocument/2006/relationships" xmlns:a="http://schemas.openxmlformats.org/drawingml/2006/main" r:embed="R7485f3f89d024f0b"/>
+          <a:blip xmlns:r="http://schemas.openxmlformats.org/officeDocument/2006/relationships" xmlns:a="http://schemas.openxmlformats.org/drawingml/2006/main" r:embed="R5d9ff904333f49a2"/>
           <a:stretch xmlns:a="http://schemas.openxmlformats.org/drawingml/2006/main">
             <a:fillRect l="0" t="0" r="0" b="0"/>
           </a:stretch>
@@ -41279,14 +41290,20 @@
       </p:sp>
       <p:pic>
         <p:nvPicPr>
-          <p:cNvPr id="50" name="Image 3"/>
+          <p:cNvPr id="50" name="Image 3">
+            <a:extLst xmlns:a="http://schemas.openxmlformats.org/drawingml/2006/main">
+              <a:ext uri="{FF2B5EF4-FFF2-40B4-BE49-F238E27FC236}">
+                <a16:creationId xmlns:a16="http://schemas.microsoft.com/office/drawing/2014/main" id="{AEA40530-ABB7-4834-BE5F-3E961555F409}"/>
+              </a:ext>
+            </a:extLst>
+          </p:cNvPr>
           <p:cNvPicPr>
             <a:picLocks xmlns:a="http://schemas.openxmlformats.org/drawingml/2006/main" noChangeAspect="1"/>
           </p:cNvPicPr>
           <p:nvPr/>
         </p:nvPicPr>
         <p:blipFill>
-          <a:blip xmlns:r="http://schemas.openxmlformats.org/officeDocument/2006/relationships" xmlns:a="http://schemas.openxmlformats.org/drawingml/2006/main" r:embed="R7b28f519c7dd4b15"/>
+          <a:blip xmlns:r="http://schemas.openxmlformats.org/officeDocument/2006/relationships" xmlns:a="http://schemas.openxmlformats.org/drawingml/2006/main" r:embed="R3d692d4e3fb345b6"/>
           <a:stretch xmlns:a="http://schemas.openxmlformats.org/drawingml/2006/main">
             <a:fillRect l="0" t="0" r="0" b="0"/>
           </a:stretch>
@@ -41503,14 +41520,20 @@
       </p:sp>
       <p:pic>
         <p:nvPicPr>
-          <p:cNvPr id="44" name="Image 0"/>
+          <p:cNvPr id="44" name="Image 0">
+            <a:extLst xmlns:a="http://schemas.openxmlformats.org/drawingml/2006/main">
+              <a:ext uri="{FF2B5EF4-FFF2-40B4-BE49-F238E27FC236}">
+                <a16:creationId xmlns:a16="http://schemas.microsoft.com/office/drawing/2014/main" id="{CD41134E-BD11-4FF8-A451-50448950D4AE}"/>
+              </a:ext>
+            </a:extLst>
+          </p:cNvPr>
           <p:cNvPicPr>
             <a:picLocks xmlns:a="http://schemas.openxmlformats.org/drawingml/2006/main" noChangeAspect="1"/>
           </p:cNvPicPr>
           <p:nvPr/>
         </p:nvPicPr>
         <p:blipFill>
-          <a:blip xmlns:r="http://schemas.openxmlformats.org/officeDocument/2006/relationships" xmlns:a="http://schemas.openxmlformats.org/drawingml/2006/main" r:embed="R33bcb47784d642b2"/>
+          <a:blip xmlns:r="http://schemas.openxmlformats.org/officeDocument/2006/relationships" xmlns:a="http://schemas.openxmlformats.org/drawingml/2006/main" r:embed="Rb067713eb7654637"/>
           <a:stretch xmlns:a="http://schemas.openxmlformats.org/drawingml/2006/main">
             <a:fillRect l="0" t="0" r="0" b="0"/>
           </a:stretch>
@@ -41527,14 +41550,20 @@
       </p:pic>
       <p:pic>
         <p:nvPicPr>
-          <p:cNvPr id="45" name="Image 1"/>
+          <p:cNvPr id="45" name="Image 1">
+            <a:extLst xmlns:a="http://schemas.openxmlformats.org/drawingml/2006/main">
+              <a:ext uri="{FF2B5EF4-FFF2-40B4-BE49-F238E27FC236}">
+                <a16:creationId xmlns:a16="http://schemas.microsoft.com/office/drawing/2014/main" id="{D27C8843-2729-497D-B25B-850FA8956CA5}"/>
+              </a:ext>
+            </a:extLst>
+          </p:cNvPr>
           <p:cNvPicPr>
             <a:picLocks xmlns:a="http://schemas.openxmlformats.org/drawingml/2006/main" noChangeAspect="1"/>
           </p:cNvPicPr>
           <p:nvPr/>
         </p:nvPicPr>
         <p:blipFill>
-          <a:blip xmlns:r="http://schemas.openxmlformats.org/officeDocument/2006/relationships" xmlns:a="http://schemas.openxmlformats.org/drawingml/2006/main" r:embed="R963974b0acbf4933"/>
+          <a:blip xmlns:r="http://schemas.openxmlformats.org/officeDocument/2006/relationships" xmlns:a="http://schemas.openxmlformats.org/drawingml/2006/main" r:embed="Rb09234ac267640b6"/>
           <a:stretch xmlns:a="http://schemas.openxmlformats.org/drawingml/2006/main">
             <a:fillRect l="0" t="0" r="0" b="0"/>
           </a:stretch>
@@ -41707,14 +41736,20 @@
       </p:sp>
       <p:pic>
         <p:nvPicPr>
-          <p:cNvPr id="50" name="Image 2"/>
+          <p:cNvPr id="50" name="Image 2">
+            <a:extLst xmlns:a="http://schemas.openxmlformats.org/drawingml/2006/main">
+              <a:ext uri="{FF2B5EF4-FFF2-40B4-BE49-F238E27FC236}">
+                <a16:creationId xmlns:a16="http://schemas.microsoft.com/office/drawing/2014/main" id="{5537E099-DF37-4EA7-9127-43C86556A23E}"/>
+              </a:ext>
+            </a:extLst>
+          </p:cNvPr>
           <p:cNvPicPr>
             <a:picLocks xmlns:a="http://schemas.openxmlformats.org/drawingml/2006/main" noChangeAspect="1"/>
           </p:cNvPicPr>
           <p:nvPr/>
         </p:nvPicPr>
         <p:blipFill>
-          <a:blip xmlns:r="http://schemas.openxmlformats.org/officeDocument/2006/relationships" xmlns:a="http://schemas.openxmlformats.org/drawingml/2006/main" r:embed="Ra801cb0443084414"/>
+          <a:blip xmlns:r="http://schemas.openxmlformats.org/officeDocument/2006/relationships" xmlns:a="http://schemas.openxmlformats.org/drawingml/2006/main" r:embed="R3ebc596b8b3f4806"/>
           <a:stretch xmlns:a="http://schemas.openxmlformats.org/drawingml/2006/main">
             <a:fillRect l="0" t="0" r="0" b="0"/>
           </a:stretch>
@@ -41902,14 +41937,20 @@
       </p:sp>
       <p:pic>
         <p:nvPicPr>
-          <p:cNvPr id="55" name="Image 3"/>
+          <p:cNvPr id="55" name="Image 3">
+            <a:extLst xmlns:a="http://schemas.openxmlformats.org/drawingml/2006/main">
+              <a:ext uri="{FF2B5EF4-FFF2-40B4-BE49-F238E27FC236}">
+                <a16:creationId xmlns:a16="http://schemas.microsoft.com/office/drawing/2014/main" id="{F4728C64-7CB0-4CC6-B7EC-81C5E33E51B5}"/>
+              </a:ext>
+            </a:extLst>
+          </p:cNvPr>
           <p:cNvPicPr>
             <a:picLocks xmlns:a="http://schemas.openxmlformats.org/drawingml/2006/main" noChangeAspect="1"/>
           </p:cNvPicPr>
           <p:nvPr/>
         </p:nvPicPr>
         <p:blipFill>
-          <a:blip xmlns:r="http://schemas.openxmlformats.org/officeDocument/2006/relationships" xmlns:a="http://schemas.openxmlformats.org/drawingml/2006/main" r:embed="R866a9fe8ea304fe4"/>
+          <a:blip xmlns:r="http://schemas.openxmlformats.org/officeDocument/2006/relationships" xmlns:a="http://schemas.openxmlformats.org/drawingml/2006/main" r:embed="R38fd13c7983f4fa4"/>
           <a:stretch xmlns:a="http://schemas.openxmlformats.org/drawingml/2006/main">
             <a:fillRect l="0" t="0" r="0" b="0"/>
           </a:stretch>
@@ -42010,7 +42051,7 @@
                 <a:ea typeface="Calibri"/>
                 <a:cs typeface="Calibri"/>
               </a:rPr>
-              <a:t>Start, stop, restart semua container dengan urutan benar (depends_on).</a:t>
+              <a:t>Compose mengatur urutan startup. service_healthy menunggu healthcheck.</a:t>
             </a:r>
             <a:endParaRPr sz="1050"/>
           </a:p>
@@ -42051,14 +42092,20 @@
       </p:sp>
       <p:pic>
         <p:nvPicPr>
-          <p:cNvPr id="59" name="Image 4"/>
+          <p:cNvPr id="59" name="Image 4">
+            <a:extLst xmlns:a="http://schemas.openxmlformats.org/drawingml/2006/main">
+              <a:ext uri="{FF2B5EF4-FFF2-40B4-BE49-F238E27FC236}">
+                <a16:creationId xmlns:a16="http://schemas.microsoft.com/office/drawing/2014/main" id="{26C8EF1A-2EA4-485F-A4AF-AB06C42DCB71}"/>
+              </a:ext>
+            </a:extLst>
+          </p:cNvPr>
           <p:cNvPicPr>
             <a:picLocks xmlns:a="http://schemas.openxmlformats.org/drawingml/2006/main" noChangeAspect="1"/>
           </p:cNvPicPr>
           <p:nvPr/>
         </p:nvPicPr>
         <p:blipFill>
-          <a:blip xmlns:r="http://schemas.openxmlformats.org/officeDocument/2006/relationships" xmlns:a="http://schemas.openxmlformats.org/drawingml/2006/main" r:embed="Rff3c0f15d2b74548"/>
+          <a:blip xmlns:r="http://schemas.openxmlformats.org/officeDocument/2006/relationships" xmlns:a="http://schemas.openxmlformats.org/drawingml/2006/main" r:embed="R1fe609d5a981438f"/>
           <a:stretch xmlns:a="http://schemas.openxmlformats.org/drawingml/2006/main">
             <a:fillRect l="0" t="0" r="0" b="0"/>
           </a:stretch>
@@ -42200,14 +42247,20 @@
       </p:sp>
       <p:pic>
         <p:nvPicPr>
-          <p:cNvPr id="63" name="Image 5"/>
+          <p:cNvPr id="63" name="Image 5">
+            <a:extLst xmlns:a="http://schemas.openxmlformats.org/drawingml/2006/main">
+              <a:ext uri="{FF2B5EF4-FFF2-40B4-BE49-F238E27FC236}">
+                <a16:creationId xmlns:a16="http://schemas.microsoft.com/office/drawing/2014/main" id="{11451180-8D7C-472D-A409-8B904DE74AD5}"/>
+              </a:ext>
+            </a:extLst>
+          </p:cNvPr>
           <p:cNvPicPr>
             <a:picLocks xmlns:a="http://schemas.openxmlformats.org/drawingml/2006/main" noChangeAspect="1"/>
           </p:cNvPicPr>
           <p:nvPr/>
         </p:nvPicPr>
         <p:blipFill>
-          <a:blip xmlns:r="http://schemas.openxmlformats.org/officeDocument/2006/relationships" xmlns:a="http://schemas.openxmlformats.org/drawingml/2006/main" r:embed="R68dc8d2aeb6046fa"/>
+          <a:blip xmlns:r="http://schemas.openxmlformats.org/officeDocument/2006/relationships" xmlns:a="http://schemas.openxmlformats.org/drawingml/2006/main" r:embed="R0db60af22793403a"/>
           <a:stretch xmlns:a="http://schemas.openxmlformats.org/drawingml/2006/main">
             <a:fillRect l="0" t="0" r="0" b="0"/>
           </a:stretch>
@@ -42349,14 +42402,20 @@
       </p:sp>
       <p:pic>
         <p:nvPicPr>
-          <p:cNvPr id="67" name="Image 6"/>
+          <p:cNvPr id="67" name="Image 6">
+            <a:extLst xmlns:a="http://schemas.openxmlformats.org/drawingml/2006/main">
+              <a:ext uri="{FF2B5EF4-FFF2-40B4-BE49-F238E27FC236}">
+                <a16:creationId xmlns:a16="http://schemas.microsoft.com/office/drawing/2014/main" id="{43F1FD8D-177B-403F-A75D-6767E073050F}"/>
+              </a:ext>
+            </a:extLst>
+          </p:cNvPr>
           <p:cNvPicPr>
             <a:picLocks xmlns:a="http://schemas.openxmlformats.org/drawingml/2006/main" noChangeAspect="1"/>
           </p:cNvPicPr>
           <p:nvPr/>
         </p:nvPicPr>
         <p:blipFill>
-          <a:blip xmlns:r="http://schemas.openxmlformats.org/officeDocument/2006/relationships" xmlns:a="http://schemas.openxmlformats.org/drawingml/2006/main" r:embed="Rd2246320b8724d47"/>
+          <a:blip xmlns:r="http://schemas.openxmlformats.org/officeDocument/2006/relationships" xmlns:a="http://schemas.openxmlformats.org/drawingml/2006/main" r:embed="R2516a6f198be4395"/>
           <a:stretch xmlns:a="http://schemas.openxmlformats.org/drawingml/2006/main">
             <a:fillRect l="0" t="0" r="0" b="0"/>
           </a:stretch>
@@ -42833,14 +42892,20 @@
       </p:sp>
       <p:pic>
         <p:nvPicPr>
-          <p:cNvPr id="44" name="Image 0"/>
+          <p:cNvPr id="44" name="Image 0">
+            <a:extLst xmlns:a="http://schemas.openxmlformats.org/drawingml/2006/main">
+              <a:ext uri="{FF2B5EF4-FFF2-40B4-BE49-F238E27FC236}">
+                <a16:creationId xmlns:a16="http://schemas.microsoft.com/office/drawing/2014/main" id="{7BC7F778-6AD6-4469-A39B-520BAFC86B62}"/>
+              </a:ext>
+            </a:extLst>
+          </p:cNvPr>
           <p:cNvPicPr>
             <a:picLocks xmlns:a="http://schemas.openxmlformats.org/drawingml/2006/main" noChangeAspect="1"/>
           </p:cNvPicPr>
           <p:nvPr/>
         </p:nvPicPr>
         <p:blipFill>
-          <a:blip xmlns:r="http://schemas.openxmlformats.org/officeDocument/2006/relationships" xmlns:a="http://schemas.openxmlformats.org/drawingml/2006/main" r:embed="Ra41e72d29c2646a0"/>
+          <a:blip xmlns:r="http://schemas.openxmlformats.org/officeDocument/2006/relationships" xmlns:a="http://schemas.openxmlformats.org/drawingml/2006/main" r:embed="R004ce4213c4446de"/>
           <a:stretch xmlns:a="http://schemas.openxmlformats.org/drawingml/2006/main">
             <a:fillRect l="0" t="0" r="0" b="0"/>
           </a:stretch>
@@ -42857,14 +42922,20 @@
       </p:pic>
       <p:pic>
         <p:nvPicPr>
-          <p:cNvPr id="45" name="Image 1"/>
+          <p:cNvPr id="45" name="Image 1">
+            <a:extLst xmlns:a="http://schemas.openxmlformats.org/drawingml/2006/main">
+              <a:ext uri="{FF2B5EF4-FFF2-40B4-BE49-F238E27FC236}">
+                <a16:creationId xmlns:a16="http://schemas.microsoft.com/office/drawing/2014/main" id="{89958CED-C960-48B2-9CB4-28A63450923E}"/>
+              </a:ext>
+            </a:extLst>
+          </p:cNvPr>
           <p:cNvPicPr>
             <a:picLocks xmlns:a="http://schemas.openxmlformats.org/drawingml/2006/main" noChangeAspect="1"/>
           </p:cNvPicPr>
           <p:nvPr/>
         </p:nvPicPr>
         <p:blipFill>
-          <a:blip xmlns:r="http://schemas.openxmlformats.org/officeDocument/2006/relationships" xmlns:a="http://schemas.openxmlformats.org/drawingml/2006/main" r:embed="Rcfb8c6f51ea44388"/>
+          <a:blip xmlns:r="http://schemas.openxmlformats.org/officeDocument/2006/relationships" xmlns:a="http://schemas.openxmlformats.org/drawingml/2006/main" r:embed="Rc28951b2243c4c66"/>
           <a:stretch xmlns:a="http://schemas.openxmlformats.org/drawingml/2006/main">
             <a:fillRect l="0" t="0" r="0" b="0"/>
           </a:stretch>
@@ -44748,14 +44819,20 @@
       </p:sp>
       <p:pic>
         <p:nvPicPr>
-          <p:cNvPr id="24" name="Image 0"/>
+          <p:cNvPr id="24" name="Image 0">
+            <a:extLst xmlns:a="http://schemas.openxmlformats.org/drawingml/2006/main">
+              <a:ext uri="{FF2B5EF4-FFF2-40B4-BE49-F238E27FC236}">
+                <a16:creationId xmlns:a16="http://schemas.microsoft.com/office/drawing/2014/main" id="{03E017D0-4A80-443F-9EB9-27ACFC972ED3}"/>
+              </a:ext>
+            </a:extLst>
+          </p:cNvPr>
           <p:cNvPicPr>
             <a:picLocks xmlns:a="http://schemas.openxmlformats.org/drawingml/2006/main" noChangeAspect="1"/>
           </p:cNvPicPr>
           <p:nvPr/>
         </p:nvPicPr>
         <p:blipFill>
-          <a:blip xmlns:r="http://schemas.openxmlformats.org/officeDocument/2006/relationships" xmlns:a="http://schemas.openxmlformats.org/drawingml/2006/main" r:embed="R7990afa2fd8d404a"/>
+          <a:blip xmlns:r="http://schemas.openxmlformats.org/officeDocument/2006/relationships" xmlns:a="http://schemas.openxmlformats.org/drawingml/2006/main" r:embed="Rdb436852592c4669"/>
           <a:stretch xmlns:a="http://schemas.openxmlformats.org/drawingml/2006/main">
             <a:fillRect l="0" t="0" r="0" b="0"/>
           </a:stretch>
@@ -44772,14 +44849,20 @@
       </p:pic>
       <p:pic>
         <p:nvPicPr>
-          <p:cNvPr id="25" name="Image 1"/>
+          <p:cNvPr id="25" name="Image 1">
+            <a:extLst xmlns:a="http://schemas.openxmlformats.org/drawingml/2006/main">
+              <a:ext uri="{FF2B5EF4-FFF2-40B4-BE49-F238E27FC236}">
+                <a16:creationId xmlns:a16="http://schemas.microsoft.com/office/drawing/2014/main" id="{EECE0D1B-0464-4F32-8893-BDABCADBA802}"/>
+              </a:ext>
+            </a:extLst>
+          </p:cNvPr>
           <p:cNvPicPr>
             <a:picLocks xmlns:a="http://schemas.openxmlformats.org/drawingml/2006/main" noChangeAspect="1"/>
           </p:cNvPicPr>
           <p:nvPr/>
         </p:nvPicPr>
         <p:blipFill>
-          <a:blip xmlns:r="http://schemas.openxmlformats.org/officeDocument/2006/relationships" xmlns:a="http://schemas.openxmlformats.org/drawingml/2006/main" r:embed="R09ac28be87b848bc"/>
+          <a:blip xmlns:r="http://schemas.openxmlformats.org/officeDocument/2006/relationships" xmlns:a="http://schemas.openxmlformats.org/drawingml/2006/main" r:embed="Rbd2440c22d8d45c1"/>
           <a:stretch xmlns:a="http://schemas.openxmlformats.org/drawingml/2006/main">
             <a:fillRect l="0" t="0" r="0" b="0"/>
           </a:stretch>
@@ -45138,14 +45221,20 @@
       </p:sp>
       <p:pic>
         <p:nvPicPr>
-          <p:cNvPr id="56" name="Image 0"/>
+          <p:cNvPr id="56" name="Image 0">
+            <a:extLst xmlns:a="http://schemas.openxmlformats.org/drawingml/2006/main">
+              <a:ext uri="{FF2B5EF4-FFF2-40B4-BE49-F238E27FC236}">
+                <a16:creationId xmlns:a16="http://schemas.microsoft.com/office/drawing/2014/main" id="{8DFA5624-60B0-4F2E-8AA5-5B14D5CA0395}"/>
+              </a:ext>
+            </a:extLst>
+          </p:cNvPr>
           <p:cNvPicPr>
             <a:picLocks xmlns:a="http://schemas.openxmlformats.org/drawingml/2006/main" noChangeAspect="1"/>
           </p:cNvPicPr>
           <p:nvPr/>
         </p:nvPicPr>
         <p:blipFill>
-          <a:blip xmlns:r="http://schemas.openxmlformats.org/officeDocument/2006/relationships" xmlns:a="http://schemas.openxmlformats.org/drawingml/2006/main" r:embed="R895dff3f3a79477a"/>
+          <a:blip xmlns:r="http://schemas.openxmlformats.org/officeDocument/2006/relationships" xmlns:a="http://schemas.openxmlformats.org/drawingml/2006/main" r:embed="R75d30d24454b44cf"/>
           <a:stretch xmlns:a="http://schemas.openxmlformats.org/drawingml/2006/main">
             <a:fillRect l="0" t="0" r="0" b="0"/>
           </a:stretch>
@@ -45162,14 +45251,20 @@
       </p:pic>
       <p:pic>
         <p:nvPicPr>
-          <p:cNvPr id="57" name="Image 1"/>
+          <p:cNvPr id="57" name="Image 1">
+            <a:extLst xmlns:a="http://schemas.openxmlformats.org/drawingml/2006/main">
+              <a:ext uri="{FF2B5EF4-FFF2-40B4-BE49-F238E27FC236}">
+                <a16:creationId xmlns:a16="http://schemas.microsoft.com/office/drawing/2014/main" id="{7C0C196B-1AB2-4877-885A-FC3BC5CF41CA}"/>
+              </a:ext>
+            </a:extLst>
+          </p:cNvPr>
           <p:cNvPicPr>
             <a:picLocks xmlns:a="http://schemas.openxmlformats.org/drawingml/2006/main" noChangeAspect="1"/>
           </p:cNvPicPr>
           <p:nvPr/>
         </p:nvPicPr>
         <p:blipFill>
-          <a:blip xmlns:r="http://schemas.openxmlformats.org/officeDocument/2006/relationships" xmlns:a="http://schemas.openxmlformats.org/drawingml/2006/main" r:embed="R574953035bcb424a"/>
+          <a:blip xmlns:r="http://schemas.openxmlformats.org/officeDocument/2006/relationships" xmlns:a="http://schemas.openxmlformats.org/drawingml/2006/main" r:embed="R030f8a4de4864d3a"/>
           <a:stretch xmlns:a="http://schemas.openxmlformats.org/drawingml/2006/main">
             <a:fillRect l="0" t="0" r="0" b="0"/>
           </a:stretch>
@@ -47073,7 +47168,7 @@
                 <a:ea typeface="Consolas"/>
                 <a:cs typeface="Consolas"/>
               </a:rPr>
-              <a:t>    container_name: myapp-api</a:t>
+              <a:t>    # Hindari container_name jika perlu replica</a:t>
             </a:r>
             <a:endParaRPr sz="1100"/>
           </a:p>
